--- a/cse3002_iwp_t/10. JavaScript.pptx
+++ b/cse3002_iwp_t/10. JavaScript.pptx
@@ -1,103 +1,103 @@
 
 <file path=ppt/presentation.xml><?xml version="1.0" encoding="utf-8"?>
-<p:presentation xmlns:a="http://schemas.openxmlformats.org/drawingml/2006/main" xmlns:r="http://schemas.openxmlformats.org/officeDocument/2006/relationships" xmlns:p="http://schemas.openxmlformats.org/presentationml/2006/main" saveSubsetFonts="1">
+<p:presentation xmlns:a="http://schemas.openxmlformats.org/drawingml/2006/main" xmlns:r="http://schemas.openxmlformats.org/officeDocument/2006/relationships" xmlns:p="http://schemas.openxmlformats.org/presentationml/2006/main">
   <p:sldMasterIdLst>
     <p:sldMasterId id="2147483648" r:id="rId1"/>
   </p:sldMasterIdLst>
   <p:sldIdLst>
-    <p:sldId id="256" r:id="rId2"/>
-    <p:sldId id="257" r:id="rId3"/>
-    <p:sldId id="259" r:id="rId4"/>
-    <p:sldId id="258" r:id="rId5"/>
-    <p:sldId id="260" r:id="rId6"/>
-    <p:sldId id="261" r:id="rId7"/>
-    <p:sldId id="262" r:id="rId8"/>
-    <p:sldId id="263" r:id="rId9"/>
-    <p:sldId id="264" r:id="rId10"/>
-    <p:sldId id="265" r:id="rId11"/>
-    <p:sldId id="266" r:id="rId12"/>
-    <p:sldId id="267" r:id="rId13"/>
-    <p:sldId id="268" r:id="rId14"/>
-    <p:sldId id="269" r:id="rId15"/>
-    <p:sldId id="270" r:id="rId16"/>
-    <p:sldId id="271" r:id="rId17"/>
-    <p:sldId id="272" r:id="rId18"/>
-    <p:sldId id="273" r:id="rId19"/>
-    <p:sldId id="274" r:id="rId20"/>
-    <p:sldId id="275" r:id="rId21"/>
-    <p:sldId id="276" r:id="rId22"/>
-    <p:sldId id="277" r:id="rId23"/>
-    <p:sldId id="278" r:id="rId24"/>
-    <p:sldId id="279" r:id="rId25"/>
-    <p:sldId id="280" r:id="rId26"/>
-    <p:sldId id="281" r:id="rId27"/>
-    <p:sldId id="282" r:id="rId28"/>
-    <p:sldId id="283" r:id="rId29"/>
-    <p:sldId id="284" r:id="rId30"/>
-    <p:sldId id="285" r:id="rId31"/>
-    <p:sldId id="286" r:id="rId32"/>
-    <p:sldId id="287" r:id="rId33"/>
-    <p:sldId id="288" r:id="rId34"/>
-    <p:sldId id="289" r:id="rId35"/>
-    <p:sldId id="290" r:id="rId36"/>
-    <p:sldId id="291" r:id="rId37"/>
-    <p:sldId id="292" r:id="rId38"/>
-    <p:sldId id="293" r:id="rId39"/>
-    <p:sldId id="294" r:id="rId40"/>
-    <p:sldId id="295" r:id="rId41"/>
-    <p:sldId id="296" r:id="rId42"/>
-    <p:sldId id="297" r:id="rId43"/>
-    <p:sldId id="298" r:id="rId44"/>
-    <p:sldId id="299" r:id="rId45"/>
-    <p:sldId id="300" r:id="rId46"/>
-    <p:sldId id="301" r:id="rId47"/>
-    <p:sldId id="302" r:id="rId48"/>
-    <p:sldId id="303" r:id="rId49"/>
-    <p:sldId id="304" r:id="rId50"/>
-    <p:sldId id="305" r:id="rId51"/>
-    <p:sldId id="306" r:id="rId52"/>
-    <p:sldId id="307" r:id="rId53"/>
-    <p:sldId id="308" r:id="rId54"/>
-    <p:sldId id="309" r:id="rId55"/>
-    <p:sldId id="310" r:id="rId56"/>
-    <p:sldId id="311" r:id="rId57"/>
-    <p:sldId id="312" r:id="rId58"/>
-    <p:sldId id="313" r:id="rId59"/>
-    <p:sldId id="314" r:id="rId60"/>
-    <p:sldId id="315" r:id="rId61"/>
-    <p:sldId id="316" r:id="rId62"/>
-    <p:sldId id="317" r:id="rId63"/>
-    <p:sldId id="318" r:id="rId64"/>
-    <p:sldId id="319" r:id="rId65"/>
-    <p:sldId id="320" r:id="rId66"/>
-    <p:sldId id="321" r:id="rId67"/>
-    <p:sldId id="322" r:id="rId68"/>
-    <p:sldId id="323" r:id="rId69"/>
-    <p:sldId id="324" r:id="rId70"/>
-    <p:sldId id="325" r:id="rId71"/>
-    <p:sldId id="326" r:id="rId72"/>
-    <p:sldId id="327" r:id="rId73"/>
-    <p:sldId id="328" r:id="rId74"/>
-    <p:sldId id="329" r:id="rId75"/>
-    <p:sldId id="330" r:id="rId76"/>
-    <p:sldId id="331" r:id="rId77"/>
-    <p:sldId id="332" r:id="rId78"/>
-    <p:sldId id="333" r:id="rId79"/>
-    <p:sldId id="334" r:id="rId80"/>
-    <p:sldId id="335" r:id="rId81"/>
-    <p:sldId id="336" r:id="rId82"/>
-    <p:sldId id="337" r:id="rId83"/>
-    <p:sldId id="338" r:id="rId84"/>
-    <p:sldId id="339" r:id="rId85"/>
-    <p:sldId id="340" r:id="rId86"/>
-    <p:sldId id="341" r:id="rId87"/>
-    <p:sldId id="342" r:id="rId88"/>
-    <p:sldId id="343" r:id="rId89"/>
-    <p:sldId id="344" r:id="rId90"/>
-    <p:sldId id="345" r:id="rId91"/>
-    <p:sldId id="346" r:id="rId92"/>
-    <p:sldId id="347" r:id="rId93"/>
-    <p:sldId id="348" r:id="rId94"/>
+    <p:sldId id="256" r:id="rId3"/>
+    <p:sldId id="257" r:id="rId4"/>
+    <p:sldId id="259" r:id="rId5"/>
+    <p:sldId id="258" r:id="rId6"/>
+    <p:sldId id="260" r:id="rId7"/>
+    <p:sldId id="261" r:id="rId8"/>
+    <p:sldId id="262" r:id="rId9"/>
+    <p:sldId id="263" r:id="rId10"/>
+    <p:sldId id="264" r:id="rId11"/>
+    <p:sldId id="265" r:id="rId12"/>
+    <p:sldId id="266" r:id="rId13"/>
+    <p:sldId id="267" r:id="rId14"/>
+    <p:sldId id="268" r:id="rId15"/>
+    <p:sldId id="269" r:id="rId16"/>
+    <p:sldId id="270" r:id="rId17"/>
+    <p:sldId id="271" r:id="rId18"/>
+    <p:sldId id="272" r:id="rId19"/>
+    <p:sldId id="273" r:id="rId20"/>
+    <p:sldId id="274" r:id="rId21"/>
+    <p:sldId id="275" r:id="rId22"/>
+    <p:sldId id="276" r:id="rId23"/>
+    <p:sldId id="277" r:id="rId24"/>
+    <p:sldId id="278" r:id="rId25"/>
+    <p:sldId id="279" r:id="rId26"/>
+    <p:sldId id="280" r:id="rId27"/>
+    <p:sldId id="281" r:id="rId28"/>
+    <p:sldId id="282" r:id="rId29"/>
+    <p:sldId id="283" r:id="rId30"/>
+    <p:sldId id="284" r:id="rId31"/>
+    <p:sldId id="285" r:id="rId32"/>
+    <p:sldId id="286" r:id="rId33"/>
+    <p:sldId id="287" r:id="rId34"/>
+    <p:sldId id="288" r:id="rId35"/>
+    <p:sldId id="289" r:id="rId36"/>
+    <p:sldId id="290" r:id="rId37"/>
+    <p:sldId id="291" r:id="rId38"/>
+    <p:sldId id="292" r:id="rId39"/>
+    <p:sldId id="293" r:id="rId40"/>
+    <p:sldId id="294" r:id="rId41"/>
+    <p:sldId id="295" r:id="rId42"/>
+    <p:sldId id="296" r:id="rId43"/>
+    <p:sldId id="297" r:id="rId44"/>
+    <p:sldId id="298" r:id="rId45"/>
+    <p:sldId id="299" r:id="rId46"/>
+    <p:sldId id="300" r:id="rId47"/>
+    <p:sldId id="301" r:id="rId48"/>
+    <p:sldId id="302" r:id="rId49"/>
+    <p:sldId id="303" r:id="rId50"/>
+    <p:sldId id="304" r:id="rId51"/>
+    <p:sldId id="305" r:id="rId52"/>
+    <p:sldId id="306" r:id="rId53"/>
+    <p:sldId id="307" r:id="rId54"/>
+    <p:sldId id="308" r:id="rId55"/>
+    <p:sldId id="309" r:id="rId56"/>
+    <p:sldId id="310" r:id="rId57"/>
+    <p:sldId id="311" r:id="rId58"/>
+    <p:sldId id="312" r:id="rId59"/>
+    <p:sldId id="313" r:id="rId60"/>
+    <p:sldId id="314" r:id="rId61"/>
+    <p:sldId id="315" r:id="rId62"/>
+    <p:sldId id="316" r:id="rId63"/>
+    <p:sldId id="317" r:id="rId64"/>
+    <p:sldId id="318" r:id="rId65"/>
+    <p:sldId id="319" r:id="rId66"/>
+    <p:sldId id="320" r:id="rId67"/>
+    <p:sldId id="321" r:id="rId68"/>
+    <p:sldId id="322" r:id="rId69"/>
+    <p:sldId id="323" r:id="rId70"/>
+    <p:sldId id="324" r:id="rId71"/>
+    <p:sldId id="325" r:id="rId72"/>
+    <p:sldId id="326" r:id="rId73"/>
+    <p:sldId id="327" r:id="rId74"/>
+    <p:sldId id="328" r:id="rId75"/>
+    <p:sldId id="329" r:id="rId76"/>
+    <p:sldId id="330" r:id="rId77"/>
+    <p:sldId id="331" r:id="rId78"/>
+    <p:sldId id="332" r:id="rId79"/>
+    <p:sldId id="333" r:id="rId80"/>
+    <p:sldId id="334" r:id="rId81"/>
+    <p:sldId id="335" r:id="rId82"/>
+    <p:sldId id="336" r:id="rId83"/>
+    <p:sldId id="337" r:id="rId84"/>
+    <p:sldId id="338" r:id="rId85"/>
+    <p:sldId id="339" r:id="rId86"/>
+    <p:sldId id="340" r:id="rId87"/>
+    <p:sldId id="341" r:id="rId88"/>
+    <p:sldId id="342" r:id="rId89"/>
+    <p:sldId id="343" r:id="rId90"/>
+    <p:sldId id="344" r:id="rId91"/>
+    <p:sldId id="345" r:id="rId92"/>
+    <p:sldId id="346" r:id="rId93"/>
+    <p:sldId id="347" r:id="rId94"/>
+    <p:sldId id="348" r:id="rId95"/>
   </p:sldIdLst>
   <p:sldSz cx="12192000" cy="6858000"/>
   <p:notesSz cx="6858000" cy="9144000"/>
@@ -196,11 +196,6 @@
       </a:defRPr>
     </a:lvl9pPr>
   </p:defaultTextStyle>
-  <p:extLst>
-    <p:ext uri="{EFAFB233-063F-42B5-8137-9DF3F51BA10A}">
-      <p15:sldGuideLst xmlns:p15="http://schemas.microsoft.com/office/powerpoint/2012/main"/>
-    </p:ext>
-  </p:extLst>
 </p:presentation>
 </file>
 
@@ -223,13 +218,7 @@
       </p:grpSpPr>
       <p:sp>
         <p:nvSpPr>
-          <p:cNvPr id="2" name="Title 1">
-            <a:extLst>
-              <a:ext uri="{FF2B5EF4-FFF2-40B4-BE49-F238E27FC236}">
-                <a16:creationId xmlns:a16="http://schemas.microsoft.com/office/drawing/2014/main" id="{116D84B2-924E-4574-BF5D-44DFA5573184}"/>
-              </a:ext>
-            </a:extLst>
-          </p:cNvPr>
+          <p:cNvPr id="2" name="Title 1"/>
           <p:cNvSpPr>
             <a:spLocks noGrp="1"/>
           </p:cNvSpPr>
@@ -261,13 +250,7 @@
       </p:sp>
       <p:sp>
         <p:nvSpPr>
-          <p:cNvPr id="3" name="Subtitle 2">
-            <a:extLst>
-              <a:ext uri="{FF2B5EF4-FFF2-40B4-BE49-F238E27FC236}">
-                <a16:creationId xmlns:a16="http://schemas.microsoft.com/office/drawing/2014/main" id="{7331EF62-A810-44E6-BF22-21AF24886E62}"/>
-              </a:ext>
-            </a:extLst>
-          </p:cNvPr>
+          <p:cNvPr id="3" name="Subtitle 2"/>
           <p:cNvSpPr>
             <a:spLocks noGrp="1"/>
           </p:cNvSpPr>
@@ -332,13 +315,7 @@
       </p:sp>
       <p:sp>
         <p:nvSpPr>
-          <p:cNvPr id="4" name="Date Placeholder 3">
-            <a:extLst>
-              <a:ext uri="{FF2B5EF4-FFF2-40B4-BE49-F238E27FC236}">
-                <a16:creationId xmlns:a16="http://schemas.microsoft.com/office/drawing/2014/main" id="{0D66CDF5-8F9F-4E6C-B6F6-C11D5EA33C49}"/>
-              </a:ext>
-            </a:extLst>
-          </p:cNvPr>
+          <p:cNvPr id="4" name="Date Placeholder 3"/>
           <p:cNvSpPr>
             <a:spLocks noGrp="1"/>
           </p:cNvSpPr>
@@ -353,7 +330,6 @@
           <a:p>
             <a:fld id="{45416148-3C4D-4E03-A99B-A1D5D3DCFA13}" type="datetimeFigureOut">
               <a:rPr lang="en-IN" smtClean="0"/>
-              <a:t>19-04-2022</a:t>
             </a:fld>
             <a:endParaRPr lang="en-IN"/>
           </a:p>
@@ -361,13 +337,7 @@
       </p:sp>
       <p:sp>
         <p:nvSpPr>
-          <p:cNvPr id="5" name="Footer Placeholder 4">
-            <a:extLst>
-              <a:ext uri="{FF2B5EF4-FFF2-40B4-BE49-F238E27FC236}">
-                <a16:creationId xmlns:a16="http://schemas.microsoft.com/office/drawing/2014/main" id="{43DF2918-8273-4155-B938-56049FA2E253}"/>
-              </a:ext>
-            </a:extLst>
-          </p:cNvPr>
+          <p:cNvPr id="5" name="Footer Placeholder 4"/>
           <p:cNvSpPr>
             <a:spLocks noGrp="1"/>
           </p:cNvSpPr>
@@ -386,13 +356,7 @@
       </p:sp>
       <p:sp>
         <p:nvSpPr>
-          <p:cNvPr id="6" name="Slide Number Placeholder 5">
-            <a:extLst>
-              <a:ext uri="{FF2B5EF4-FFF2-40B4-BE49-F238E27FC236}">
-                <a16:creationId xmlns:a16="http://schemas.microsoft.com/office/drawing/2014/main" id="{3FADD6E8-E7BC-48CB-9BAA-BF3CC2C75DA8}"/>
-              </a:ext>
-            </a:extLst>
-          </p:cNvPr>
+          <p:cNvPr id="6" name="Slide Number Placeholder 5"/>
           <p:cNvSpPr>
             <a:spLocks noGrp="1"/>
           </p:cNvSpPr>
@@ -407,18 +371,12 @@
           <a:p>
             <a:fld id="{9F389D3E-1DE8-403E-8666-8DEA5D9A2707}" type="slidenum">
               <a:rPr lang="en-IN" smtClean="0"/>
-              <a:t>‹#›</a:t>
             </a:fld>
             <a:endParaRPr lang="en-IN"/>
           </a:p>
         </p:txBody>
       </p:sp>
     </p:spTree>
-    <p:extLst>
-      <p:ext uri="{BB962C8B-B14F-4D97-AF65-F5344CB8AC3E}">
-        <p14:creationId xmlns:p14="http://schemas.microsoft.com/office/powerpoint/2010/main" val="3427728174"/>
-      </p:ext>
-    </p:extLst>
   </p:cSld>
   <p:clrMapOvr>
     <a:masterClrMapping/>
@@ -445,13 +403,7 @@
       </p:grpSpPr>
       <p:sp>
         <p:nvSpPr>
-          <p:cNvPr id="2" name="Title 1">
-            <a:extLst>
-              <a:ext uri="{FF2B5EF4-FFF2-40B4-BE49-F238E27FC236}">
-                <a16:creationId xmlns:a16="http://schemas.microsoft.com/office/drawing/2014/main" id="{AF8BE037-0E3F-4594-8637-2E47E66BB5ED}"/>
-              </a:ext>
-            </a:extLst>
-          </p:cNvPr>
+          <p:cNvPr id="2" name="Title 1"/>
           <p:cNvSpPr>
             <a:spLocks noGrp="1"/>
           </p:cNvSpPr>
@@ -474,13 +426,7 @@
       </p:sp>
       <p:sp>
         <p:nvSpPr>
-          <p:cNvPr id="3" name="Vertical Text Placeholder 2">
-            <a:extLst>
-              <a:ext uri="{FF2B5EF4-FFF2-40B4-BE49-F238E27FC236}">
-                <a16:creationId xmlns:a16="http://schemas.microsoft.com/office/drawing/2014/main" id="{A53A3835-F46E-4C8A-997F-85D3C6798D64}"/>
-              </a:ext>
-            </a:extLst>
-          </p:cNvPr>
+          <p:cNvPr id="3" name="Vertical Text Placeholder 2"/>
           <p:cNvSpPr>
             <a:spLocks noGrp="1"/>
           </p:cNvSpPr>
@@ -498,6 +444,7 @@
               <a:rPr lang="en-US"/>
               <a:t>Click to edit Master text styles</a:t>
             </a:r>
+            <a:endParaRPr lang="en-US"/>
           </a:p>
           <a:p>
             <a:pPr lvl="1"/>
@@ -505,6 +452,7 @@
               <a:rPr lang="en-US"/>
               <a:t>Second level</a:t>
             </a:r>
+            <a:endParaRPr lang="en-US"/>
           </a:p>
           <a:p>
             <a:pPr lvl="2"/>
@@ -512,6 +460,7 @@
               <a:rPr lang="en-US"/>
               <a:t>Third level</a:t>
             </a:r>
+            <a:endParaRPr lang="en-US"/>
           </a:p>
           <a:p>
             <a:pPr lvl="3"/>
@@ -519,6 +468,7 @@
               <a:rPr lang="en-US"/>
               <a:t>Fourth level</a:t>
             </a:r>
+            <a:endParaRPr lang="en-US"/>
           </a:p>
           <a:p>
             <a:pPr lvl="4"/>
@@ -532,13 +482,7 @@
       </p:sp>
       <p:sp>
         <p:nvSpPr>
-          <p:cNvPr id="4" name="Date Placeholder 3">
-            <a:extLst>
-              <a:ext uri="{FF2B5EF4-FFF2-40B4-BE49-F238E27FC236}">
-                <a16:creationId xmlns:a16="http://schemas.microsoft.com/office/drawing/2014/main" id="{B5AE2B16-4B81-419B-84D1-7E263CB59FF7}"/>
-              </a:ext>
-            </a:extLst>
-          </p:cNvPr>
+          <p:cNvPr id="4" name="Date Placeholder 3"/>
           <p:cNvSpPr>
             <a:spLocks noGrp="1"/>
           </p:cNvSpPr>
@@ -553,7 +497,6 @@
           <a:p>
             <a:fld id="{45416148-3C4D-4E03-A99B-A1D5D3DCFA13}" type="datetimeFigureOut">
               <a:rPr lang="en-IN" smtClean="0"/>
-              <a:t>19-04-2022</a:t>
             </a:fld>
             <a:endParaRPr lang="en-IN"/>
           </a:p>
@@ -561,13 +504,7 @@
       </p:sp>
       <p:sp>
         <p:nvSpPr>
-          <p:cNvPr id="5" name="Footer Placeholder 4">
-            <a:extLst>
-              <a:ext uri="{FF2B5EF4-FFF2-40B4-BE49-F238E27FC236}">
-                <a16:creationId xmlns:a16="http://schemas.microsoft.com/office/drawing/2014/main" id="{1C55C099-5E58-4EE3-AD6D-5749A371285E}"/>
-              </a:ext>
-            </a:extLst>
-          </p:cNvPr>
+          <p:cNvPr id="5" name="Footer Placeholder 4"/>
           <p:cNvSpPr>
             <a:spLocks noGrp="1"/>
           </p:cNvSpPr>
@@ -586,13 +523,7 @@
       </p:sp>
       <p:sp>
         <p:nvSpPr>
-          <p:cNvPr id="6" name="Slide Number Placeholder 5">
-            <a:extLst>
-              <a:ext uri="{FF2B5EF4-FFF2-40B4-BE49-F238E27FC236}">
-                <a16:creationId xmlns:a16="http://schemas.microsoft.com/office/drawing/2014/main" id="{E7844AFB-7453-4953-A26F-DABD1E5610FD}"/>
-              </a:ext>
-            </a:extLst>
-          </p:cNvPr>
+          <p:cNvPr id="6" name="Slide Number Placeholder 5"/>
           <p:cNvSpPr>
             <a:spLocks noGrp="1"/>
           </p:cNvSpPr>
@@ -607,18 +538,12 @@
           <a:p>
             <a:fld id="{9F389D3E-1DE8-403E-8666-8DEA5D9A2707}" type="slidenum">
               <a:rPr lang="en-IN" smtClean="0"/>
-              <a:t>‹#›</a:t>
             </a:fld>
             <a:endParaRPr lang="en-IN"/>
           </a:p>
         </p:txBody>
       </p:sp>
     </p:spTree>
-    <p:extLst>
-      <p:ext uri="{BB962C8B-B14F-4D97-AF65-F5344CB8AC3E}">
-        <p14:creationId xmlns:p14="http://schemas.microsoft.com/office/powerpoint/2010/main" val="3086381438"/>
-      </p:ext>
-    </p:extLst>
   </p:cSld>
   <p:clrMapOvr>
     <a:masterClrMapping/>
@@ -645,13 +570,7 @@
       </p:grpSpPr>
       <p:sp>
         <p:nvSpPr>
-          <p:cNvPr id="2" name="Vertical Title 1">
-            <a:extLst>
-              <a:ext uri="{FF2B5EF4-FFF2-40B4-BE49-F238E27FC236}">
-                <a16:creationId xmlns:a16="http://schemas.microsoft.com/office/drawing/2014/main" id="{D1D03468-1783-4000-B52F-E6F3EABCD18D}"/>
-              </a:ext>
-            </a:extLst>
-          </p:cNvPr>
+          <p:cNvPr id="2" name="Vertical Title 1"/>
           <p:cNvSpPr>
             <a:spLocks noGrp="1"/>
           </p:cNvSpPr>
@@ -679,13 +598,7 @@
       </p:sp>
       <p:sp>
         <p:nvSpPr>
-          <p:cNvPr id="3" name="Vertical Text Placeholder 2">
-            <a:extLst>
-              <a:ext uri="{FF2B5EF4-FFF2-40B4-BE49-F238E27FC236}">
-                <a16:creationId xmlns:a16="http://schemas.microsoft.com/office/drawing/2014/main" id="{7C629D45-A755-4828-8DFB-2043C8A37880}"/>
-              </a:ext>
-            </a:extLst>
-          </p:cNvPr>
+          <p:cNvPr id="3" name="Vertical Text Placeholder 2"/>
           <p:cNvSpPr>
             <a:spLocks noGrp="1"/>
           </p:cNvSpPr>
@@ -708,6 +621,7 @@
               <a:rPr lang="en-US"/>
               <a:t>Click to edit Master text styles</a:t>
             </a:r>
+            <a:endParaRPr lang="en-US"/>
           </a:p>
           <a:p>
             <a:pPr lvl="1"/>
@@ -715,6 +629,7 @@
               <a:rPr lang="en-US"/>
               <a:t>Second level</a:t>
             </a:r>
+            <a:endParaRPr lang="en-US"/>
           </a:p>
           <a:p>
             <a:pPr lvl="2"/>
@@ -722,6 +637,7 @@
               <a:rPr lang="en-US"/>
               <a:t>Third level</a:t>
             </a:r>
+            <a:endParaRPr lang="en-US"/>
           </a:p>
           <a:p>
             <a:pPr lvl="3"/>
@@ -729,6 +645,7 @@
               <a:rPr lang="en-US"/>
               <a:t>Fourth level</a:t>
             </a:r>
+            <a:endParaRPr lang="en-US"/>
           </a:p>
           <a:p>
             <a:pPr lvl="4"/>
@@ -742,13 +659,7 @@
       </p:sp>
       <p:sp>
         <p:nvSpPr>
-          <p:cNvPr id="4" name="Date Placeholder 3">
-            <a:extLst>
-              <a:ext uri="{FF2B5EF4-FFF2-40B4-BE49-F238E27FC236}">
-                <a16:creationId xmlns:a16="http://schemas.microsoft.com/office/drawing/2014/main" id="{83F47211-6B2D-48C7-A61E-2D170F11898B}"/>
-              </a:ext>
-            </a:extLst>
-          </p:cNvPr>
+          <p:cNvPr id="4" name="Date Placeholder 3"/>
           <p:cNvSpPr>
             <a:spLocks noGrp="1"/>
           </p:cNvSpPr>
@@ -763,7 +674,6 @@
           <a:p>
             <a:fld id="{45416148-3C4D-4E03-A99B-A1D5D3DCFA13}" type="datetimeFigureOut">
               <a:rPr lang="en-IN" smtClean="0"/>
-              <a:t>19-04-2022</a:t>
             </a:fld>
             <a:endParaRPr lang="en-IN"/>
           </a:p>
@@ -771,13 +681,7 @@
       </p:sp>
       <p:sp>
         <p:nvSpPr>
-          <p:cNvPr id="5" name="Footer Placeholder 4">
-            <a:extLst>
-              <a:ext uri="{FF2B5EF4-FFF2-40B4-BE49-F238E27FC236}">
-                <a16:creationId xmlns:a16="http://schemas.microsoft.com/office/drawing/2014/main" id="{FFD77595-B77B-4301-BEB6-C96771080211}"/>
-              </a:ext>
-            </a:extLst>
-          </p:cNvPr>
+          <p:cNvPr id="5" name="Footer Placeholder 4"/>
           <p:cNvSpPr>
             <a:spLocks noGrp="1"/>
           </p:cNvSpPr>
@@ -796,13 +700,7 @@
       </p:sp>
       <p:sp>
         <p:nvSpPr>
-          <p:cNvPr id="6" name="Slide Number Placeholder 5">
-            <a:extLst>
-              <a:ext uri="{FF2B5EF4-FFF2-40B4-BE49-F238E27FC236}">
-                <a16:creationId xmlns:a16="http://schemas.microsoft.com/office/drawing/2014/main" id="{CA493C6C-3226-425B-8A47-BEFD6CD7F4BE}"/>
-              </a:ext>
-            </a:extLst>
-          </p:cNvPr>
+          <p:cNvPr id="6" name="Slide Number Placeholder 5"/>
           <p:cNvSpPr>
             <a:spLocks noGrp="1"/>
           </p:cNvSpPr>
@@ -817,18 +715,12 @@
           <a:p>
             <a:fld id="{9F389D3E-1DE8-403E-8666-8DEA5D9A2707}" type="slidenum">
               <a:rPr lang="en-IN" smtClean="0"/>
-              <a:t>‹#›</a:t>
             </a:fld>
             <a:endParaRPr lang="en-IN"/>
           </a:p>
         </p:txBody>
       </p:sp>
     </p:spTree>
-    <p:extLst>
-      <p:ext uri="{BB962C8B-B14F-4D97-AF65-F5344CB8AC3E}">
-        <p14:creationId xmlns:p14="http://schemas.microsoft.com/office/powerpoint/2010/main" val="560819519"/>
-      </p:ext>
-    </p:extLst>
   </p:cSld>
   <p:clrMapOvr>
     <a:masterClrMapping/>
@@ -855,13 +747,7 @@
       </p:grpSpPr>
       <p:sp>
         <p:nvSpPr>
-          <p:cNvPr id="2" name="Title 1">
-            <a:extLst>
-              <a:ext uri="{FF2B5EF4-FFF2-40B4-BE49-F238E27FC236}">
-                <a16:creationId xmlns:a16="http://schemas.microsoft.com/office/drawing/2014/main" id="{18BCEDD4-C5F0-4F97-B288-3B2EC361098A}"/>
-              </a:ext>
-            </a:extLst>
-          </p:cNvPr>
+          <p:cNvPr id="2" name="Title 1"/>
           <p:cNvSpPr>
             <a:spLocks noGrp="1"/>
           </p:cNvSpPr>
@@ -884,13 +770,7 @@
       </p:sp>
       <p:sp>
         <p:nvSpPr>
-          <p:cNvPr id="3" name="Content Placeholder 2">
-            <a:extLst>
-              <a:ext uri="{FF2B5EF4-FFF2-40B4-BE49-F238E27FC236}">
-                <a16:creationId xmlns:a16="http://schemas.microsoft.com/office/drawing/2014/main" id="{D60E247D-99D7-4F4F-8859-C344AE469701}"/>
-              </a:ext>
-            </a:extLst>
-          </p:cNvPr>
+          <p:cNvPr id="3" name="Content Placeholder 2"/>
           <p:cNvSpPr>
             <a:spLocks noGrp="1"/>
           </p:cNvSpPr>
@@ -908,6 +788,7 @@
               <a:rPr lang="en-US"/>
               <a:t>Click to edit Master text styles</a:t>
             </a:r>
+            <a:endParaRPr lang="en-US"/>
           </a:p>
           <a:p>
             <a:pPr lvl="1"/>
@@ -915,6 +796,7 @@
               <a:rPr lang="en-US"/>
               <a:t>Second level</a:t>
             </a:r>
+            <a:endParaRPr lang="en-US"/>
           </a:p>
           <a:p>
             <a:pPr lvl="2"/>
@@ -922,6 +804,7 @@
               <a:rPr lang="en-US"/>
               <a:t>Third level</a:t>
             </a:r>
+            <a:endParaRPr lang="en-US"/>
           </a:p>
           <a:p>
             <a:pPr lvl="3"/>
@@ -929,6 +812,7 @@
               <a:rPr lang="en-US"/>
               <a:t>Fourth level</a:t>
             </a:r>
+            <a:endParaRPr lang="en-US"/>
           </a:p>
           <a:p>
             <a:pPr lvl="4"/>
@@ -942,13 +826,7 @@
       </p:sp>
       <p:sp>
         <p:nvSpPr>
-          <p:cNvPr id="4" name="Date Placeholder 3">
-            <a:extLst>
-              <a:ext uri="{FF2B5EF4-FFF2-40B4-BE49-F238E27FC236}">
-                <a16:creationId xmlns:a16="http://schemas.microsoft.com/office/drawing/2014/main" id="{42944F48-0FC6-49A7-918A-31CB176690BE}"/>
-              </a:ext>
-            </a:extLst>
-          </p:cNvPr>
+          <p:cNvPr id="4" name="Date Placeholder 3"/>
           <p:cNvSpPr>
             <a:spLocks noGrp="1"/>
           </p:cNvSpPr>
@@ -963,7 +841,6 @@
           <a:p>
             <a:fld id="{45416148-3C4D-4E03-A99B-A1D5D3DCFA13}" type="datetimeFigureOut">
               <a:rPr lang="en-IN" smtClean="0"/>
-              <a:t>19-04-2022</a:t>
             </a:fld>
             <a:endParaRPr lang="en-IN"/>
           </a:p>
@@ -971,13 +848,7 @@
       </p:sp>
       <p:sp>
         <p:nvSpPr>
-          <p:cNvPr id="5" name="Footer Placeholder 4">
-            <a:extLst>
-              <a:ext uri="{FF2B5EF4-FFF2-40B4-BE49-F238E27FC236}">
-                <a16:creationId xmlns:a16="http://schemas.microsoft.com/office/drawing/2014/main" id="{D1F47C78-2DAC-4345-B97A-F85C0FA4AFA5}"/>
-              </a:ext>
-            </a:extLst>
-          </p:cNvPr>
+          <p:cNvPr id="5" name="Footer Placeholder 4"/>
           <p:cNvSpPr>
             <a:spLocks noGrp="1"/>
           </p:cNvSpPr>
@@ -996,13 +867,7 @@
       </p:sp>
       <p:sp>
         <p:nvSpPr>
-          <p:cNvPr id="6" name="Slide Number Placeholder 5">
-            <a:extLst>
-              <a:ext uri="{FF2B5EF4-FFF2-40B4-BE49-F238E27FC236}">
-                <a16:creationId xmlns:a16="http://schemas.microsoft.com/office/drawing/2014/main" id="{BBF15B7C-AB7F-4956-9B2D-4A97B0B9E28C}"/>
-              </a:ext>
-            </a:extLst>
-          </p:cNvPr>
+          <p:cNvPr id="6" name="Slide Number Placeholder 5"/>
           <p:cNvSpPr>
             <a:spLocks noGrp="1"/>
           </p:cNvSpPr>
@@ -1017,18 +882,12 @@
           <a:p>
             <a:fld id="{9F389D3E-1DE8-403E-8666-8DEA5D9A2707}" type="slidenum">
               <a:rPr lang="en-IN" smtClean="0"/>
-              <a:t>‹#›</a:t>
             </a:fld>
             <a:endParaRPr lang="en-IN"/>
           </a:p>
         </p:txBody>
       </p:sp>
     </p:spTree>
-    <p:extLst>
-      <p:ext uri="{BB962C8B-B14F-4D97-AF65-F5344CB8AC3E}">
-        <p14:creationId xmlns:p14="http://schemas.microsoft.com/office/powerpoint/2010/main" val="1066971600"/>
-      </p:ext>
-    </p:extLst>
   </p:cSld>
   <p:clrMapOvr>
     <a:masterClrMapping/>
@@ -1055,13 +914,7 @@
       </p:grpSpPr>
       <p:sp>
         <p:nvSpPr>
-          <p:cNvPr id="2" name="Title 1">
-            <a:extLst>
-              <a:ext uri="{FF2B5EF4-FFF2-40B4-BE49-F238E27FC236}">
-                <a16:creationId xmlns:a16="http://schemas.microsoft.com/office/drawing/2014/main" id="{A622CB31-38D2-4EA5-93C2-86E4949AC560}"/>
-              </a:ext>
-            </a:extLst>
-          </p:cNvPr>
+          <p:cNvPr id="2" name="Title 1"/>
           <p:cNvSpPr>
             <a:spLocks noGrp="1"/>
           </p:cNvSpPr>
@@ -1093,13 +946,7 @@
       </p:sp>
       <p:sp>
         <p:nvSpPr>
-          <p:cNvPr id="3" name="Text Placeholder 2">
-            <a:extLst>
-              <a:ext uri="{FF2B5EF4-FFF2-40B4-BE49-F238E27FC236}">
-                <a16:creationId xmlns:a16="http://schemas.microsoft.com/office/drawing/2014/main" id="{F22FBE5E-11C6-477C-9E2E-D6E3B9B34E83}"/>
-              </a:ext>
-            </a:extLst>
-          </p:cNvPr>
+          <p:cNvPr id="3" name="Text Placeholder 2"/>
           <p:cNvSpPr>
             <a:spLocks noGrp="1"/>
           </p:cNvSpPr>
@@ -1213,18 +1060,13 @@
               <a:rPr lang="en-US"/>
               <a:t>Click to edit Master text styles</a:t>
             </a:r>
-          </a:p>
-        </p:txBody>
-      </p:sp>
-      <p:sp>
-        <p:nvSpPr>
-          <p:cNvPr id="4" name="Date Placeholder 3">
-            <a:extLst>
-              <a:ext uri="{FF2B5EF4-FFF2-40B4-BE49-F238E27FC236}">
-                <a16:creationId xmlns:a16="http://schemas.microsoft.com/office/drawing/2014/main" id="{B026D88C-EF82-4208-9260-97F2F4A4EAC5}"/>
-              </a:ext>
-            </a:extLst>
-          </p:cNvPr>
+            <a:endParaRPr lang="en-US"/>
+          </a:p>
+        </p:txBody>
+      </p:sp>
+      <p:sp>
+        <p:nvSpPr>
+          <p:cNvPr id="4" name="Date Placeholder 3"/>
           <p:cNvSpPr>
             <a:spLocks noGrp="1"/>
           </p:cNvSpPr>
@@ -1239,7 +1081,6 @@
           <a:p>
             <a:fld id="{45416148-3C4D-4E03-A99B-A1D5D3DCFA13}" type="datetimeFigureOut">
               <a:rPr lang="en-IN" smtClean="0"/>
-              <a:t>19-04-2022</a:t>
             </a:fld>
             <a:endParaRPr lang="en-IN"/>
           </a:p>
@@ -1247,13 +1088,7 @@
       </p:sp>
       <p:sp>
         <p:nvSpPr>
-          <p:cNvPr id="5" name="Footer Placeholder 4">
-            <a:extLst>
-              <a:ext uri="{FF2B5EF4-FFF2-40B4-BE49-F238E27FC236}">
-                <a16:creationId xmlns:a16="http://schemas.microsoft.com/office/drawing/2014/main" id="{F9C12718-0954-419E-B820-CF5D5DF979A4}"/>
-              </a:ext>
-            </a:extLst>
-          </p:cNvPr>
+          <p:cNvPr id="5" name="Footer Placeholder 4"/>
           <p:cNvSpPr>
             <a:spLocks noGrp="1"/>
           </p:cNvSpPr>
@@ -1272,13 +1107,7 @@
       </p:sp>
       <p:sp>
         <p:nvSpPr>
-          <p:cNvPr id="6" name="Slide Number Placeholder 5">
-            <a:extLst>
-              <a:ext uri="{FF2B5EF4-FFF2-40B4-BE49-F238E27FC236}">
-                <a16:creationId xmlns:a16="http://schemas.microsoft.com/office/drawing/2014/main" id="{0F4699B0-B485-47BA-828F-74C8B3E6F38A}"/>
-              </a:ext>
-            </a:extLst>
-          </p:cNvPr>
+          <p:cNvPr id="6" name="Slide Number Placeholder 5"/>
           <p:cNvSpPr>
             <a:spLocks noGrp="1"/>
           </p:cNvSpPr>
@@ -1293,18 +1122,12 @@
           <a:p>
             <a:fld id="{9F389D3E-1DE8-403E-8666-8DEA5D9A2707}" type="slidenum">
               <a:rPr lang="en-IN" smtClean="0"/>
-              <a:t>‹#›</a:t>
             </a:fld>
             <a:endParaRPr lang="en-IN"/>
           </a:p>
         </p:txBody>
       </p:sp>
     </p:spTree>
-    <p:extLst>
-      <p:ext uri="{BB962C8B-B14F-4D97-AF65-F5344CB8AC3E}">
-        <p14:creationId xmlns:p14="http://schemas.microsoft.com/office/powerpoint/2010/main" val="4261678286"/>
-      </p:ext>
-    </p:extLst>
   </p:cSld>
   <p:clrMapOvr>
     <a:masterClrMapping/>
@@ -1331,13 +1154,7 @@
       </p:grpSpPr>
       <p:sp>
         <p:nvSpPr>
-          <p:cNvPr id="2" name="Title 1">
-            <a:extLst>
-              <a:ext uri="{FF2B5EF4-FFF2-40B4-BE49-F238E27FC236}">
-                <a16:creationId xmlns:a16="http://schemas.microsoft.com/office/drawing/2014/main" id="{5A08BF24-2D29-4AAE-8D13-8039BD055228}"/>
-              </a:ext>
-            </a:extLst>
-          </p:cNvPr>
+          <p:cNvPr id="2" name="Title 1"/>
           <p:cNvSpPr>
             <a:spLocks noGrp="1"/>
           </p:cNvSpPr>
@@ -1360,13 +1177,7 @@
       </p:sp>
       <p:sp>
         <p:nvSpPr>
-          <p:cNvPr id="3" name="Content Placeholder 2">
-            <a:extLst>
-              <a:ext uri="{FF2B5EF4-FFF2-40B4-BE49-F238E27FC236}">
-                <a16:creationId xmlns:a16="http://schemas.microsoft.com/office/drawing/2014/main" id="{9EC2F80A-D59D-48FF-9A5E-A4DB30D5627B}"/>
-              </a:ext>
-            </a:extLst>
-          </p:cNvPr>
+          <p:cNvPr id="3" name="Content Placeholder 2"/>
           <p:cNvSpPr>
             <a:spLocks noGrp="1"/>
           </p:cNvSpPr>
@@ -1389,6 +1200,7 @@
               <a:rPr lang="en-US"/>
               <a:t>Click to edit Master text styles</a:t>
             </a:r>
+            <a:endParaRPr lang="en-US"/>
           </a:p>
           <a:p>
             <a:pPr lvl="1"/>
@@ -1396,6 +1208,7 @@
               <a:rPr lang="en-US"/>
               <a:t>Second level</a:t>
             </a:r>
+            <a:endParaRPr lang="en-US"/>
           </a:p>
           <a:p>
             <a:pPr lvl="2"/>
@@ -1403,6 +1216,7 @@
               <a:rPr lang="en-US"/>
               <a:t>Third level</a:t>
             </a:r>
+            <a:endParaRPr lang="en-US"/>
           </a:p>
           <a:p>
             <a:pPr lvl="3"/>
@@ -1410,6 +1224,7 @@
               <a:rPr lang="en-US"/>
               <a:t>Fourth level</a:t>
             </a:r>
+            <a:endParaRPr lang="en-US"/>
           </a:p>
           <a:p>
             <a:pPr lvl="4"/>
@@ -1423,13 +1238,7 @@
       </p:sp>
       <p:sp>
         <p:nvSpPr>
-          <p:cNvPr id="4" name="Content Placeholder 3">
-            <a:extLst>
-              <a:ext uri="{FF2B5EF4-FFF2-40B4-BE49-F238E27FC236}">
-                <a16:creationId xmlns:a16="http://schemas.microsoft.com/office/drawing/2014/main" id="{2380017C-8451-4B11-B86E-11A678080DD7}"/>
-              </a:ext>
-            </a:extLst>
-          </p:cNvPr>
+          <p:cNvPr id="4" name="Content Placeholder 3"/>
           <p:cNvSpPr>
             <a:spLocks noGrp="1"/>
           </p:cNvSpPr>
@@ -1452,6 +1261,7 @@
               <a:rPr lang="en-US"/>
               <a:t>Click to edit Master text styles</a:t>
             </a:r>
+            <a:endParaRPr lang="en-US"/>
           </a:p>
           <a:p>
             <a:pPr lvl="1"/>
@@ -1459,6 +1269,7 @@
               <a:rPr lang="en-US"/>
               <a:t>Second level</a:t>
             </a:r>
+            <a:endParaRPr lang="en-US"/>
           </a:p>
           <a:p>
             <a:pPr lvl="2"/>
@@ -1466,6 +1277,7 @@
               <a:rPr lang="en-US"/>
               <a:t>Third level</a:t>
             </a:r>
+            <a:endParaRPr lang="en-US"/>
           </a:p>
           <a:p>
             <a:pPr lvl="3"/>
@@ -1473,6 +1285,7 @@
               <a:rPr lang="en-US"/>
               <a:t>Fourth level</a:t>
             </a:r>
+            <a:endParaRPr lang="en-US"/>
           </a:p>
           <a:p>
             <a:pPr lvl="4"/>
@@ -1486,13 +1299,7 @@
       </p:sp>
       <p:sp>
         <p:nvSpPr>
-          <p:cNvPr id="5" name="Date Placeholder 4">
-            <a:extLst>
-              <a:ext uri="{FF2B5EF4-FFF2-40B4-BE49-F238E27FC236}">
-                <a16:creationId xmlns:a16="http://schemas.microsoft.com/office/drawing/2014/main" id="{E659F13F-8A1D-4F94-A30E-829F76CED1B1}"/>
-              </a:ext>
-            </a:extLst>
-          </p:cNvPr>
+          <p:cNvPr id="5" name="Date Placeholder 4"/>
           <p:cNvSpPr>
             <a:spLocks noGrp="1"/>
           </p:cNvSpPr>
@@ -1507,7 +1314,6 @@
           <a:p>
             <a:fld id="{45416148-3C4D-4E03-A99B-A1D5D3DCFA13}" type="datetimeFigureOut">
               <a:rPr lang="en-IN" smtClean="0"/>
-              <a:t>19-04-2022</a:t>
             </a:fld>
             <a:endParaRPr lang="en-IN"/>
           </a:p>
@@ -1515,13 +1321,7 @@
       </p:sp>
       <p:sp>
         <p:nvSpPr>
-          <p:cNvPr id="6" name="Footer Placeholder 5">
-            <a:extLst>
-              <a:ext uri="{FF2B5EF4-FFF2-40B4-BE49-F238E27FC236}">
-                <a16:creationId xmlns:a16="http://schemas.microsoft.com/office/drawing/2014/main" id="{95AD3DF0-E73F-41ED-AE17-FC2C7321083D}"/>
-              </a:ext>
-            </a:extLst>
-          </p:cNvPr>
+          <p:cNvPr id="6" name="Footer Placeholder 5"/>
           <p:cNvSpPr>
             <a:spLocks noGrp="1"/>
           </p:cNvSpPr>
@@ -1540,13 +1340,7 @@
       </p:sp>
       <p:sp>
         <p:nvSpPr>
-          <p:cNvPr id="7" name="Slide Number Placeholder 6">
-            <a:extLst>
-              <a:ext uri="{FF2B5EF4-FFF2-40B4-BE49-F238E27FC236}">
-                <a16:creationId xmlns:a16="http://schemas.microsoft.com/office/drawing/2014/main" id="{609A3840-5504-40F0-82FE-5969D5F21921}"/>
-              </a:ext>
-            </a:extLst>
-          </p:cNvPr>
+          <p:cNvPr id="7" name="Slide Number Placeholder 6"/>
           <p:cNvSpPr>
             <a:spLocks noGrp="1"/>
           </p:cNvSpPr>
@@ -1561,18 +1355,12 @@
           <a:p>
             <a:fld id="{9F389D3E-1DE8-403E-8666-8DEA5D9A2707}" type="slidenum">
               <a:rPr lang="en-IN" smtClean="0"/>
-              <a:t>‹#›</a:t>
             </a:fld>
             <a:endParaRPr lang="en-IN"/>
           </a:p>
         </p:txBody>
       </p:sp>
     </p:spTree>
-    <p:extLst>
-      <p:ext uri="{BB962C8B-B14F-4D97-AF65-F5344CB8AC3E}">
-        <p14:creationId xmlns:p14="http://schemas.microsoft.com/office/powerpoint/2010/main" val="3258070192"/>
-      </p:ext>
-    </p:extLst>
   </p:cSld>
   <p:clrMapOvr>
     <a:masterClrMapping/>
@@ -1599,13 +1387,7 @@
       </p:grpSpPr>
       <p:sp>
         <p:nvSpPr>
-          <p:cNvPr id="2" name="Title 1">
-            <a:extLst>
-              <a:ext uri="{FF2B5EF4-FFF2-40B4-BE49-F238E27FC236}">
-                <a16:creationId xmlns:a16="http://schemas.microsoft.com/office/drawing/2014/main" id="{843DE2A7-D779-4455-A9BB-88C2400A5766}"/>
-              </a:ext>
-            </a:extLst>
-          </p:cNvPr>
+          <p:cNvPr id="2" name="Title 1"/>
           <p:cNvSpPr>
             <a:spLocks noGrp="1"/>
           </p:cNvSpPr>
@@ -1633,13 +1415,7 @@
       </p:sp>
       <p:sp>
         <p:nvSpPr>
-          <p:cNvPr id="3" name="Text Placeholder 2">
-            <a:extLst>
-              <a:ext uri="{FF2B5EF4-FFF2-40B4-BE49-F238E27FC236}">
-                <a16:creationId xmlns:a16="http://schemas.microsoft.com/office/drawing/2014/main" id="{64469F26-DCE3-4471-801A-39C12C9EB202}"/>
-              </a:ext>
-            </a:extLst>
-          </p:cNvPr>
+          <p:cNvPr id="3" name="Text Placeholder 2"/>
           <p:cNvSpPr>
             <a:spLocks noGrp="1"/>
           </p:cNvSpPr>
@@ -1699,18 +1475,13 @@
               <a:rPr lang="en-US"/>
               <a:t>Click to edit Master text styles</a:t>
             </a:r>
-          </a:p>
-        </p:txBody>
-      </p:sp>
-      <p:sp>
-        <p:nvSpPr>
-          <p:cNvPr id="4" name="Content Placeholder 3">
-            <a:extLst>
-              <a:ext uri="{FF2B5EF4-FFF2-40B4-BE49-F238E27FC236}">
-                <a16:creationId xmlns:a16="http://schemas.microsoft.com/office/drawing/2014/main" id="{2326BEC4-8202-49D8-A582-070430A8B8B3}"/>
-              </a:ext>
-            </a:extLst>
-          </p:cNvPr>
+            <a:endParaRPr lang="en-US"/>
+          </a:p>
+        </p:txBody>
+      </p:sp>
+      <p:sp>
+        <p:nvSpPr>
+          <p:cNvPr id="4" name="Content Placeholder 3"/>
           <p:cNvSpPr>
             <a:spLocks noGrp="1"/>
           </p:cNvSpPr>
@@ -1733,6 +1504,7 @@
               <a:rPr lang="en-US"/>
               <a:t>Click to edit Master text styles</a:t>
             </a:r>
+            <a:endParaRPr lang="en-US"/>
           </a:p>
           <a:p>
             <a:pPr lvl="1"/>
@@ -1740,6 +1512,7 @@
               <a:rPr lang="en-US"/>
               <a:t>Second level</a:t>
             </a:r>
+            <a:endParaRPr lang="en-US"/>
           </a:p>
           <a:p>
             <a:pPr lvl="2"/>
@@ -1747,6 +1520,7 @@
               <a:rPr lang="en-US"/>
               <a:t>Third level</a:t>
             </a:r>
+            <a:endParaRPr lang="en-US"/>
           </a:p>
           <a:p>
             <a:pPr lvl="3"/>
@@ -1754,6 +1528,7 @@
               <a:rPr lang="en-US"/>
               <a:t>Fourth level</a:t>
             </a:r>
+            <a:endParaRPr lang="en-US"/>
           </a:p>
           <a:p>
             <a:pPr lvl="4"/>
@@ -1767,13 +1542,7 @@
       </p:sp>
       <p:sp>
         <p:nvSpPr>
-          <p:cNvPr id="5" name="Text Placeholder 4">
-            <a:extLst>
-              <a:ext uri="{FF2B5EF4-FFF2-40B4-BE49-F238E27FC236}">
-                <a16:creationId xmlns:a16="http://schemas.microsoft.com/office/drawing/2014/main" id="{BB1A9A45-8E78-4C4C-811E-CB577CC91690}"/>
-              </a:ext>
-            </a:extLst>
-          </p:cNvPr>
+          <p:cNvPr id="5" name="Text Placeholder 4"/>
           <p:cNvSpPr>
             <a:spLocks noGrp="1"/>
           </p:cNvSpPr>
@@ -1833,18 +1602,13 @@
               <a:rPr lang="en-US"/>
               <a:t>Click to edit Master text styles</a:t>
             </a:r>
-          </a:p>
-        </p:txBody>
-      </p:sp>
-      <p:sp>
-        <p:nvSpPr>
-          <p:cNvPr id="6" name="Content Placeholder 5">
-            <a:extLst>
-              <a:ext uri="{FF2B5EF4-FFF2-40B4-BE49-F238E27FC236}">
-                <a16:creationId xmlns:a16="http://schemas.microsoft.com/office/drawing/2014/main" id="{944E70EA-1F5E-448E-AD5B-53818D355B33}"/>
-              </a:ext>
-            </a:extLst>
-          </p:cNvPr>
+            <a:endParaRPr lang="en-US"/>
+          </a:p>
+        </p:txBody>
+      </p:sp>
+      <p:sp>
+        <p:nvSpPr>
+          <p:cNvPr id="6" name="Content Placeholder 5"/>
           <p:cNvSpPr>
             <a:spLocks noGrp="1"/>
           </p:cNvSpPr>
@@ -1867,6 +1631,7 @@
               <a:rPr lang="en-US"/>
               <a:t>Click to edit Master text styles</a:t>
             </a:r>
+            <a:endParaRPr lang="en-US"/>
           </a:p>
           <a:p>
             <a:pPr lvl="1"/>
@@ -1874,6 +1639,7 @@
               <a:rPr lang="en-US"/>
               <a:t>Second level</a:t>
             </a:r>
+            <a:endParaRPr lang="en-US"/>
           </a:p>
           <a:p>
             <a:pPr lvl="2"/>
@@ -1881,6 +1647,7 @@
               <a:rPr lang="en-US"/>
               <a:t>Third level</a:t>
             </a:r>
+            <a:endParaRPr lang="en-US"/>
           </a:p>
           <a:p>
             <a:pPr lvl="3"/>
@@ -1888,6 +1655,7 @@
               <a:rPr lang="en-US"/>
               <a:t>Fourth level</a:t>
             </a:r>
+            <a:endParaRPr lang="en-US"/>
           </a:p>
           <a:p>
             <a:pPr lvl="4"/>
@@ -1901,13 +1669,7 @@
       </p:sp>
       <p:sp>
         <p:nvSpPr>
-          <p:cNvPr id="7" name="Date Placeholder 6">
-            <a:extLst>
-              <a:ext uri="{FF2B5EF4-FFF2-40B4-BE49-F238E27FC236}">
-                <a16:creationId xmlns:a16="http://schemas.microsoft.com/office/drawing/2014/main" id="{074CD14A-2B35-49FF-90B1-F0AADEE1946C}"/>
-              </a:ext>
-            </a:extLst>
-          </p:cNvPr>
+          <p:cNvPr id="7" name="Date Placeholder 6"/>
           <p:cNvSpPr>
             <a:spLocks noGrp="1"/>
           </p:cNvSpPr>
@@ -1922,7 +1684,6 @@
           <a:p>
             <a:fld id="{45416148-3C4D-4E03-A99B-A1D5D3DCFA13}" type="datetimeFigureOut">
               <a:rPr lang="en-IN" smtClean="0"/>
-              <a:t>19-04-2022</a:t>
             </a:fld>
             <a:endParaRPr lang="en-IN"/>
           </a:p>
@@ -1930,13 +1691,7 @@
       </p:sp>
       <p:sp>
         <p:nvSpPr>
-          <p:cNvPr id="8" name="Footer Placeholder 7">
-            <a:extLst>
-              <a:ext uri="{FF2B5EF4-FFF2-40B4-BE49-F238E27FC236}">
-                <a16:creationId xmlns:a16="http://schemas.microsoft.com/office/drawing/2014/main" id="{297C08FD-7849-4755-AAB1-3CEB61A905DF}"/>
-              </a:ext>
-            </a:extLst>
-          </p:cNvPr>
+          <p:cNvPr id="8" name="Footer Placeholder 7"/>
           <p:cNvSpPr>
             <a:spLocks noGrp="1"/>
           </p:cNvSpPr>
@@ -1955,13 +1710,7 @@
       </p:sp>
       <p:sp>
         <p:nvSpPr>
-          <p:cNvPr id="9" name="Slide Number Placeholder 8">
-            <a:extLst>
-              <a:ext uri="{FF2B5EF4-FFF2-40B4-BE49-F238E27FC236}">
-                <a16:creationId xmlns:a16="http://schemas.microsoft.com/office/drawing/2014/main" id="{E7AD839D-410F-4948-A058-BA54ED4A66D6}"/>
-              </a:ext>
-            </a:extLst>
-          </p:cNvPr>
+          <p:cNvPr id="9" name="Slide Number Placeholder 8"/>
           <p:cNvSpPr>
             <a:spLocks noGrp="1"/>
           </p:cNvSpPr>
@@ -1976,18 +1725,12 @@
           <a:p>
             <a:fld id="{9F389D3E-1DE8-403E-8666-8DEA5D9A2707}" type="slidenum">
               <a:rPr lang="en-IN" smtClean="0"/>
-              <a:t>‹#›</a:t>
             </a:fld>
             <a:endParaRPr lang="en-IN"/>
           </a:p>
         </p:txBody>
       </p:sp>
     </p:spTree>
-    <p:extLst>
-      <p:ext uri="{BB962C8B-B14F-4D97-AF65-F5344CB8AC3E}">
-        <p14:creationId xmlns:p14="http://schemas.microsoft.com/office/powerpoint/2010/main" val="1774618335"/>
-      </p:ext>
-    </p:extLst>
   </p:cSld>
   <p:clrMapOvr>
     <a:masterClrMapping/>
@@ -2014,13 +1757,7 @@
       </p:grpSpPr>
       <p:sp>
         <p:nvSpPr>
-          <p:cNvPr id="2" name="Title 1">
-            <a:extLst>
-              <a:ext uri="{FF2B5EF4-FFF2-40B4-BE49-F238E27FC236}">
-                <a16:creationId xmlns:a16="http://schemas.microsoft.com/office/drawing/2014/main" id="{955AC8EA-8E8D-4447-9622-B85C25244C41}"/>
-              </a:ext>
-            </a:extLst>
-          </p:cNvPr>
+          <p:cNvPr id="2" name="Title 1"/>
           <p:cNvSpPr>
             <a:spLocks noGrp="1"/>
           </p:cNvSpPr>
@@ -2043,13 +1780,7 @@
       </p:sp>
       <p:sp>
         <p:nvSpPr>
-          <p:cNvPr id="3" name="Date Placeholder 2">
-            <a:extLst>
-              <a:ext uri="{FF2B5EF4-FFF2-40B4-BE49-F238E27FC236}">
-                <a16:creationId xmlns:a16="http://schemas.microsoft.com/office/drawing/2014/main" id="{AA64C1A0-B1C8-44B9-99D9-4DC5070F7992}"/>
-              </a:ext>
-            </a:extLst>
-          </p:cNvPr>
+          <p:cNvPr id="3" name="Date Placeholder 2"/>
           <p:cNvSpPr>
             <a:spLocks noGrp="1"/>
           </p:cNvSpPr>
@@ -2064,7 +1795,6 @@
           <a:p>
             <a:fld id="{45416148-3C4D-4E03-A99B-A1D5D3DCFA13}" type="datetimeFigureOut">
               <a:rPr lang="en-IN" smtClean="0"/>
-              <a:t>19-04-2022</a:t>
             </a:fld>
             <a:endParaRPr lang="en-IN"/>
           </a:p>
@@ -2072,13 +1802,7 @@
       </p:sp>
       <p:sp>
         <p:nvSpPr>
-          <p:cNvPr id="4" name="Footer Placeholder 3">
-            <a:extLst>
-              <a:ext uri="{FF2B5EF4-FFF2-40B4-BE49-F238E27FC236}">
-                <a16:creationId xmlns:a16="http://schemas.microsoft.com/office/drawing/2014/main" id="{729788EF-DEF2-4AD1-B963-B9ABAE577139}"/>
-              </a:ext>
-            </a:extLst>
-          </p:cNvPr>
+          <p:cNvPr id="4" name="Footer Placeholder 3"/>
           <p:cNvSpPr>
             <a:spLocks noGrp="1"/>
           </p:cNvSpPr>
@@ -2097,13 +1821,7 @@
       </p:sp>
       <p:sp>
         <p:nvSpPr>
-          <p:cNvPr id="5" name="Slide Number Placeholder 4">
-            <a:extLst>
-              <a:ext uri="{FF2B5EF4-FFF2-40B4-BE49-F238E27FC236}">
-                <a16:creationId xmlns:a16="http://schemas.microsoft.com/office/drawing/2014/main" id="{013FEB67-138E-4D11-B13B-3DAAAD036337}"/>
-              </a:ext>
-            </a:extLst>
-          </p:cNvPr>
+          <p:cNvPr id="5" name="Slide Number Placeholder 4"/>
           <p:cNvSpPr>
             <a:spLocks noGrp="1"/>
           </p:cNvSpPr>
@@ -2118,18 +1836,12 @@
           <a:p>
             <a:fld id="{9F389D3E-1DE8-403E-8666-8DEA5D9A2707}" type="slidenum">
               <a:rPr lang="en-IN" smtClean="0"/>
-              <a:t>‹#›</a:t>
             </a:fld>
             <a:endParaRPr lang="en-IN"/>
           </a:p>
         </p:txBody>
       </p:sp>
     </p:spTree>
-    <p:extLst>
-      <p:ext uri="{BB962C8B-B14F-4D97-AF65-F5344CB8AC3E}">
-        <p14:creationId xmlns:p14="http://schemas.microsoft.com/office/powerpoint/2010/main" val="4191909920"/>
-      </p:ext>
-    </p:extLst>
   </p:cSld>
   <p:clrMapOvr>
     <a:masterClrMapping/>
@@ -2156,13 +1868,7 @@
       </p:grpSpPr>
       <p:sp>
         <p:nvSpPr>
-          <p:cNvPr id="2" name="Date Placeholder 1">
-            <a:extLst>
-              <a:ext uri="{FF2B5EF4-FFF2-40B4-BE49-F238E27FC236}">
-                <a16:creationId xmlns:a16="http://schemas.microsoft.com/office/drawing/2014/main" id="{841FCA4A-7F45-44F0-BA71-14D3C0CF3194}"/>
-              </a:ext>
-            </a:extLst>
-          </p:cNvPr>
+          <p:cNvPr id="2" name="Date Placeholder 1"/>
           <p:cNvSpPr>
             <a:spLocks noGrp="1"/>
           </p:cNvSpPr>
@@ -2177,7 +1883,6 @@
           <a:p>
             <a:fld id="{45416148-3C4D-4E03-A99B-A1D5D3DCFA13}" type="datetimeFigureOut">
               <a:rPr lang="en-IN" smtClean="0"/>
-              <a:t>19-04-2022</a:t>
             </a:fld>
             <a:endParaRPr lang="en-IN"/>
           </a:p>
@@ -2185,13 +1890,7 @@
       </p:sp>
       <p:sp>
         <p:nvSpPr>
-          <p:cNvPr id="3" name="Footer Placeholder 2">
-            <a:extLst>
-              <a:ext uri="{FF2B5EF4-FFF2-40B4-BE49-F238E27FC236}">
-                <a16:creationId xmlns:a16="http://schemas.microsoft.com/office/drawing/2014/main" id="{E4038F5B-E5E5-4177-9141-19D16CE7B368}"/>
-              </a:ext>
-            </a:extLst>
-          </p:cNvPr>
+          <p:cNvPr id="3" name="Footer Placeholder 2"/>
           <p:cNvSpPr>
             <a:spLocks noGrp="1"/>
           </p:cNvSpPr>
@@ -2210,13 +1909,7 @@
       </p:sp>
       <p:sp>
         <p:nvSpPr>
-          <p:cNvPr id="4" name="Slide Number Placeholder 3">
-            <a:extLst>
-              <a:ext uri="{FF2B5EF4-FFF2-40B4-BE49-F238E27FC236}">
-                <a16:creationId xmlns:a16="http://schemas.microsoft.com/office/drawing/2014/main" id="{0FD4071A-B541-4BDB-BD60-FBD9587B56D6}"/>
-              </a:ext>
-            </a:extLst>
-          </p:cNvPr>
+          <p:cNvPr id="4" name="Slide Number Placeholder 3"/>
           <p:cNvSpPr>
             <a:spLocks noGrp="1"/>
           </p:cNvSpPr>
@@ -2231,18 +1924,12 @@
           <a:p>
             <a:fld id="{9F389D3E-1DE8-403E-8666-8DEA5D9A2707}" type="slidenum">
               <a:rPr lang="en-IN" smtClean="0"/>
-              <a:t>‹#›</a:t>
             </a:fld>
             <a:endParaRPr lang="en-IN"/>
           </a:p>
         </p:txBody>
       </p:sp>
     </p:spTree>
-    <p:extLst>
-      <p:ext uri="{BB962C8B-B14F-4D97-AF65-F5344CB8AC3E}">
-        <p14:creationId xmlns:p14="http://schemas.microsoft.com/office/powerpoint/2010/main" val="3273790663"/>
-      </p:ext>
-    </p:extLst>
   </p:cSld>
   <p:clrMapOvr>
     <a:masterClrMapping/>
@@ -2269,13 +1956,7 @@
       </p:grpSpPr>
       <p:sp>
         <p:nvSpPr>
-          <p:cNvPr id="2" name="Title 1">
-            <a:extLst>
-              <a:ext uri="{FF2B5EF4-FFF2-40B4-BE49-F238E27FC236}">
-                <a16:creationId xmlns:a16="http://schemas.microsoft.com/office/drawing/2014/main" id="{3BA3B717-C72B-4E06-B44C-010BFE5975EA}"/>
-              </a:ext>
-            </a:extLst>
-          </p:cNvPr>
+          <p:cNvPr id="2" name="Title 1"/>
           <p:cNvSpPr>
             <a:spLocks noGrp="1"/>
           </p:cNvSpPr>
@@ -2307,13 +1988,7 @@
       </p:sp>
       <p:sp>
         <p:nvSpPr>
-          <p:cNvPr id="3" name="Content Placeholder 2">
-            <a:extLst>
-              <a:ext uri="{FF2B5EF4-FFF2-40B4-BE49-F238E27FC236}">
-                <a16:creationId xmlns:a16="http://schemas.microsoft.com/office/drawing/2014/main" id="{A7CE7CFB-E9CB-41A4-A32C-5DEF90E16AC7}"/>
-              </a:ext>
-            </a:extLst>
-          </p:cNvPr>
+          <p:cNvPr id="3" name="Content Placeholder 2"/>
           <p:cNvSpPr>
             <a:spLocks noGrp="1"/>
           </p:cNvSpPr>
@@ -2364,6 +2039,7 @@
               <a:rPr lang="en-US"/>
               <a:t>Click to edit Master text styles</a:t>
             </a:r>
+            <a:endParaRPr lang="en-US"/>
           </a:p>
           <a:p>
             <a:pPr lvl="1"/>
@@ -2371,6 +2047,7 @@
               <a:rPr lang="en-US"/>
               <a:t>Second level</a:t>
             </a:r>
+            <a:endParaRPr lang="en-US"/>
           </a:p>
           <a:p>
             <a:pPr lvl="2"/>
@@ -2378,6 +2055,7 @@
               <a:rPr lang="en-US"/>
               <a:t>Third level</a:t>
             </a:r>
+            <a:endParaRPr lang="en-US"/>
           </a:p>
           <a:p>
             <a:pPr lvl="3"/>
@@ -2385,6 +2063,7 @@
               <a:rPr lang="en-US"/>
               <a:t>Fourth level</a:t>
             </a:r>
+            <a:endParaRPr lang="en-US"/>
           </a:p>
           <a:p>
             <a:pPr lvl="4"/>
@@ -2398,13 +2077,7 @@
       </p:sp>
       <p:sp>
         <p:nvSpPr>
-          <p:cNvPr id="4" name="Text Placeholder 3">
-            <a:extLst>
-              <a:ext uri="{FF2B5EF4-FFF2-40B4-BE49-F238E27FC236}">
-                <a16:creationId xmlns:a16="http://schemas.microsoft.com/office/drawing/2014/main" id="{B99E2271-021E-4822-9E97-D49761F9FFFC}"/>
-              </a:ext>
-            </a:extLst>
-          </p:cNvPr>
+          <p:cNvPr id="4" name="Text Placeholder 3"/>
           <p:cNvSpPr>
             <a:spLocks noGrp="1"/>
           </p:cNvSpPr>
@@ -2464,18 +2137,13 @@
               <a:rPr lang="en-US"/>
               <a:t>Click to edit Master text styles</a:t>
             </a:r>
-          </a:p>
-        </p:txBody>
-      </p:sp>
-      <p:sp>
-        <p:nvSpPr>
-          <p:cNvPr id="5" name="Date Placeholder 4">
-            <a:extLst>
-              <a:ext uri="{FF2B5EF4-FFF2-40B4-BE49-F238E27FC236}">
-                <a16:creationId xmlns:a16="http://schemas.microsoft.com/office/drawing/2014/main" id="{5242F042-78F2-41D6-BF9A-B987F2F392E6}"/>
-              </a:ext>
-            </a:extLst>
-          </p:cNvPr>
+            <a:endParaRPr lang="en-US"/>
+          </a:p>
+        </p:txBody>
+      </p:sp>
+      <p:sp>
+        <p:nvSpPr>
+          <p:cNvPr id="5" name="Date Placeholder 4"/>
           <p:cNvSpPr>
             <a:spLocks noGrp="1"/>
           </p:cNvSpPr>
@@ -2490,7 +2158,6 @@
           <a:p>
             <a:fld id="{45416148-3C4D-4E03-A99B-A1D5D3DCFA13}" type="datetimeFigureOut">
               <a:rPr lang="en-IN" smtClean="0"/>
-              <a:t>19-04-2022</a:t>
             </a:fld>
             <a:endParaRPr lang="en-IN"/>
           </a:p>
@@ -2498,13 +2165,7 @@
       </p:sp>
       <p:sp>
         <p:nvSpPr>
-          <p:cNvPr id="6" name="Footer Placeholder 5">
-            <a:extLst>
-              <a:ext uri="{FF2B5EF4-FFF2-40B4-BE49-F238E27FC236}">
-                <a16:creationId xmlns:a16="http://schemas.microsoft.com/office/drawing/2014/main" id="{BC9AE591-1131-4DBB-AA66-C66971CE7668}"/>
-              </a:ext>
-            </a:extLst>
-          </p:cNvPr>
+          <p:cNvPr id="6" name="Footer Placeholder 5"/>
           <p:cNvSpPr>
             <a:spLocks noGrp="1"/>
           </p:cNvSpPr>
@@ -2523,13 +2184,7 @@
       </p:sp>
       <p:sp>
         <p:nvSpPr>
-          <p:cNvPr id="7" name="Slide Number Placeholder 6">
-            <a:extLst>
-              <a:ext uri="{FF2B5EF4-FFF2-40B4-BE49-F238E27FC236}">
-                <a16:creationId xmlns:a16="http://schemas.microsoft.com/office/drawing/2014/main" id="{A175AE00-D0AB-416B-8AFE-2C8A95C3B868}"/>
-              </a:ext>
-            </a:extLst>
-          </p:cNvPr>
+          <p:cNvPr id="7" name="Slide Number Placeholder 6"/>
           <p:cNvSpPr>
             <a:spLocks noGrp="1"/>
           </p:cNvSpPr>
@@ -2544,18 +2199,12 @@
           <a:p>
             <a:fld id="{9F389D3E-1DE8-403E-8666-8DEA5D9A2707}" type="slidenum">
               <a:rPr lang="en-IN" smtClean="0"/>
-              <a:t>‹#›</a:t>
             </a:fld>
             <a:endParaRPr lang="en-IN"/>
           </a:p>
         </p:txBody>
       </p:sp>
     </p:spTree>
-    <p:extLst>
-      <p:ext uri="{BB962C8B-B14F-4D97-AF65-F5344CB8AC3E}">
-        <p14:creationId xmlns:p14="http://schemas.microsoft.com/office/powerpoint/2010/main" val="12115487"/>
-      </p:ext>
-    </p:extLst>
   </p:cSld>
   <p:clrMapOvr>
     <a:masterClrMapping/>
@@ -2582,13 +2231,7 @@
       </p:grpSpPr>
       <p:sp>
         <p:nvSpPr>
-          <p:cNvPr id="2" name="Title 1">
-            <a:extLst>
-              <a:ext uri="{FF2B5EF4-FFF2-40B4-BE49-F238E27FC236}">
-                <a16:creationId xmlns:a16="http://schemas.microsoft.com/office/drawing/2014/main" id="{267EB896-7D7E-4155-8A51-E61AE3EC03C7}"/>
-              </a:ext>
-            </a:extLst>
-          </p:cNvPr>
+          <p:cNvPr id="2" name="Title 1"/>
           <p:cNvSpPr>
             <a:spLocks noGrp="1"/>
           </p:cNvSpPr>
@@ -2620,13 +2263,7 @@
       </p:sp>
       <p:sp>
         <p:nvSpPr>
-          <p:cNvPr id="3" name="Picture Placeholder 2">
-            <a:extLst>
-              <a:ext uri="{FF2B5EF4-FFF2-40B4-BE49-F238E27FC236}">
-                <a16:creationId xmlns:a16="http://schemas.microsoft.com/office/drawing/2014/main" id="{643E5143-98A5-4C8D-BF7B-BD03B4306589}"/>
-              </a:ext>
-            </a:extLst>
-          </p:cNvPr>
+          <p:cNvPr id="3" name="Picture Placeholder 2"/>
           <p:cNvSpPr>
             <a:spLocks noGrp="1"/>
           </p:cNvSpPr>
@@ -2687,13 +2324,7 @@
       </p:sp>
       <p:sp>
         <p:nvSpPr>
-          <p:cNvPr id="4" name="Text Placeholder 3">
-            <a:extLst>
-              <a:ext uri="{FF2B5EF4-FFF2-40B4-BE49-F238E27FC236}">
-                <a16:creationId xmlns:a16="http://schemas.microsoft.com/office/drawing/2014/main" id="{C89AD607-9A55-4A69-A63F-DBB8DA71D31A}"/>
-              </a:ext>
-            </a:extLst>
-          </p:cNvPr>
+          <p:cNvPr id="4" name="Text Placeholder 3"/>
           <p:cNvSpPr>
             <a:spLocks noGrp="1"/>
           </p:cNvSpPr>
@@ -2753,18 +2384,13 @@
               <a:rPr lang="en-US"/>
               <a:t>Click to edit Master text styles</a:t>
             </a:r>
-          </a:p>
-        </p:txBody>
-      </p:sp>
-      <p:sp>
-        <p:nvSpPr>
-          <p:cNvPr id="5" name="Date Placeholder 4">
-            <a:extLst>
-              <a:ext uri="{FF2B5EF4-FFF2-40B4-BE49-F238E27FC236}">
-                <a16:creationId xmlns:a16="http://schemas.microsoft.com/office/drawing/2014/main" id="{2F9D82F1-8132-4A7B-B71D-035867D694AA}"/>
-              </a:ext>
-            </a:extLst>
-          </p:cNvPr>
+            <a:endParaRPr lang="en-US"/>
+          </a:p>
+        </p:txBody>
+      </p:sp>
+      <p:sp>
+        <p:nvSpPr>
+          <p:cNvPr id="5" name="Date Placeholder 4"/>
           <p:cNvSpPr>
             <a:spLocks noGrp="1"/>
           </p:cNvSpPr>
@@ -2779,7 +2405,6 @@
           <a:p>
             <a:fld id="{45416148-3C4D-4E03-A99B-A1D5D3DCFA13}" type="datetimeFigureOut">
               <a:rPr lang="en-IN" smtClean="0"/>
-              <a:t>19-04-2022</a:t>
             </a:fld>
             <a:endParaRPr lang="en-IN"/>
           </a:p>
@@ -2787,13 +2412,7 @@
       </p:sp>
       <p:sp>
         <p:nvSpPr>
-          <p:cNvPr id="6" name="Footer Placeholder 5">
-            <a:extLst>
-              <a:ext uri="{FF2B5EF4-FFF2-40B4-BE49-F238E27FC236}">
-                <a16:creationId xmlns:a16="http://schemas.microsoft.com/office/drawing/2014/main" id="{3F707DB0-DE02-461F-87B3-C103027654F5}"/>
-              </a:ext>
-            </a:extLst>
-          </p:cNvPr>
+          <p:cNvPr id="6" name="Footer Placeholder 5"/>
           <p:cNvSpPr>
             <a:spLocks noGrp="1"/>
           </p:cNvSpPr>
@@ -2812,13 +2431,7 @@
       </p:sp>
       <p:sp>
         <p:nvSpPr>
-          <p:cNvPr id="7" name="Slide Number Placeholder 6">
-            <a:extLst>
-              <a:ext uri="{FF2B5EF4-FFF2-40B4-BE49-F238E27FC236}">
-                <a16:creationId xmlns:a16="http://schemas.microsoft.com/office/drawing/2014/main" id="{FB3A67EE-688D-4133-80EE-4D82D8EC7CF0}"/>
-              </a:ext>
-            </a:extLst>
-          </p:cNvPr>
+          <p:cNvPr id="7" name="Slide Number Placeholder 6"/>
           <p:cNvSpPr>
             <a:spLocks noGrp="1"/>
           </p:cNvSpPr>
@@ -2833,18 +2446,12 @@
           <a:p>
             <a:fld id="{9F389D3E-1DE8-403E-8666-8DEA5D9A2707}" type="slidenum">
               <a:rPr lang="en-IN" smtClean="0"/>
-              <a:t>‹#›</a:t>
             </a:fld>
             <a:endParaRPr lang="en-IN"/>
           </a:p>
         </p:txBody>
       </p:sp>
     </p:spTree>
-    <p:extLst>
-      <p:ext uri="{BB962C8B-B14F-4D97-AF65-F5344CB8AC3E}">
-        <p14:creationId xmlns:p14="http://schemas.microsoft.com/office/powerpoint/2010/main" val="757609278"/>
-      </p:ext>
-    </p:extLst>
   </p:cSld>
   <p:clrMapOvr>
     <a:masterClrMapping/>
@@ -2876,13 +2483,7 @@
       </p:grpSpPr>
       <p:sp>
         <p:nvSpPr>
-          <p:cNvPr id="2" name="Title Placeholder 1">
-            <a:extLst>
-              <a:ext uri="{FF2B5EF4-FFF2-40B4-BE49-F238E27FC236}">
-                <a16:creationId xmlns:a16="http://schemas.microsoft.com/office/drawing/2014/main" id="{40CA61EA-2F9E-4C84-899E-F59046E4CE71}"/>
-              </a:ext>
-            </a:extLst>
-          </p:cNvPr>
+          <p:cNvPr id="2" name="Title Placeholder 1"/>
           <p:cNvSpPr>
             <a:spLocks noGrp="1"/>
           </p:cNvSpPr>
@@ -2915,13 +2516,7 @@
       </p:sp>
       <p:sp>
         <p:nvSpPr>
-          <p:cNvPr id="3" name="Text Placeholder 2">
-            <a:extLst>
-              <a:ext uri="{FF2B5EF4-FFF2-40B4-BE49-F238E27FC236}">
-                <a16:creationId xmlns:a16="http://schemas.microsoft.com/office/drawing/2014/main" id="{52D1E52E-D7FA-4305-9A50-A3527130D02E}"/>
-              </a:ext>
-            </a:extLst>
-          </p:cNvPr>
+          <p:cNvPr id="3" name="Text Placeholder 2"/>
           <p:cNvSpPr>
             <a:spLocks noGrp="1"/>
           </p:cNvSpPr>
@@ -2949,6 +2544,7 @@
               <a:rPr lang="en-US"/>
               <a:t>Click to edit Master text styles</a:t>
             </a:r>
+            <a:endParaRPr lang="en-US"/>
           </a:p>
           <a:p>
             <a:pPr lvl="1"/>
@@ -2956,6 +2552,7 @@
               <a:rPr lang="en-US"/>
               <a:t>Second level</a:t>
             </a:r>
+            <a:endParaRPr lang="en-US"/>
           </a:p>
           <a:p>
             <a:pPr lvl="2"/>
@@ -2963,6 +2560,7 @@
               <a:rPr lang="en-US"/>
               <a:t>Third level</a:t>
             </a:r>
+            <a:endParaRPr lang="en-US"/>
           </a:p>
           <a:p>
             <a:pPr lvl="3"/>
@@ -2970,6 +2568,7 @@
               <a:rPr lang="en-US"/>
               <a:t>Fourth level</a:t>
             </a:r>
+            <a:endParaRPr lang="en-US"/>
           </a:p>
           <a:p>
             <a:pPr lvl="4"/>
@@ -2983,13 +2582,7 @@
       </p:sp>
       <p:sp>
         <p:nvSpPr>
-          <p:cNvPr id="4" name="Date Placeholder 3">
-            <a:extLst>
-              <a:ext uri="{FF2B5EF4-FFF2-40B4-BE49-F238E27FC236}">
-                <a16:creationId xmlns:a16="http://schemas.microsoft.com/office/drawing/2014/main" id="{28BEE6A5-31AE-4C75-9AFE-D878146E329B}"/>
-              </a:ext>
-            </a:extLst>
-          </p:cNvPr>
+          <p:cNvPr id="4" name="Date Placeholder 3"/>
           <p:cNvSpPr>
             <a:spLocks noGrp="1"/>
           </p:cNvSpPr>
@@ -3022,7 +2615,6 @@
           <a:p>
             <a:fld id="{45416148-3C4D-4E03-A99B-A1D5D3DCFA13}" type="datetimeFigureOut">
               <a:rPr lang="en-IN" smtClean="0"/>
-              <a:t>19-04-2022</a:t>
             </a:fld>
             <a:endParaRPr lang="en-IN"/>
           </a:p>
@@ -3030,13 +2622,7 @@
       </p:sp>
       <p:sp>
         <p:nvSpPr>
-          <p:cNvPr id="5" name="Footer Placeholder 4">
-            <a:extLst>
-              <a:ext uri="{FF2B5EF4-FFF2-40B4-BE49-F238E27FC236}">
-                <a16:creationId xmlns:a16="http://schemas.microsoft.com/office/drawing/2014/main" id="{F3D7F2E6-AD1D-49DA-AA7E-C01F17C81865}"/>
-              </a:ext>
-            </a:extLst>
-          </p:cNvPr>
+          <p:cNvPr id="5" name="Footer Placeholder 4"/>
           <p:cNvSpPr>
             <a:spLocks noGrp="1"/>
           </p:cNvSpPr>
@@ -3073,13 +2659,7 @@
       </p:sp>
       <p:sp>
         <p:nvSpPr>
-          <p:cNvPr id="6" name="Slide Number Placeholder 5">
-            <a:extLst>
-              <a:ext uri="{FF2B5EF4-FFF2-40B4-BE49-F238E27FC236}">
-                <a16:creationId xmlns:a16="http://schemas.microsoft.com/office/drawing/2014/main" id="{691277D2-608B-4A4D-B8E2-35B90C2485D3}"/>
-              </a:ext>
-            </a:extLst>
-          </p:cNvPr>
+          <p:cNvPr id="6" name="Slide Number Placeholder 5"/>
           <p:cNvSpPr>
             <a:spLocks noGrp="1"/>
           </p:cNvSpPr>
@@ -3112,18 +2692,12 @@
           <a:p>
             <a:fld id="{9F389D3E-1DE8-403E-8666-8DEA5D9A2707}" type="slidenum">
               <a:rPr lang="en-IN" smtClean="0"/>
-              <a:t>‹#›</a:t>
             </a:fld>
             <a:endParaRPr lang="en-IN"/>
           </a:p>
         </p:txBody>
       </p:sp>
     </p:spTree>
-    <p:extLst>
-      <p:ext uri="{BB962C8B-B14F-4D97-AF65-F5344CB8AC3E}">
-        <p14:creationId xmlns:p14="http://schemas.microsoft.com/office/powerpoint/2010/main" val="3820913585"/>
-      </p:ext>
-    </p:extLst>
   </p:cSld>
   <p:clrMap bg1="lt1" tx1="dk1" bg2="lt2" tx2="dk2" accent1="accent1" accent2="accent2" accent3="accent3" accent4="accent4" accent5="accent5" accent6="accent6" hlink="hlink" folHlink="folHlink"/>
   <p:sldLayoutIdLst>
@@ -3441,13 +3015,7 @@
       </p:grpSpPr>
       <p:sp>
         <p:nvSpPr>
-          <p:cNvPr id="2" name="Title 1">
-            <a:extLst>
-              <a:ext uri="{FF2B5EF4-FFF2-40B4-BE49-F238E27FC236}">
-                <a16:creationId xmlns:a16="http://schemas.microsoft.com/office/drawing/2014/main" id="{FA50A9E0-5A8E-473F-B36E-677CCC3E53A1}"/>
-              </a:ext>
-            </a:extLst>
-          </p:cNvPr>
+          <p:cNvPr id="2" name="Title 1"/>
           <p:cNvSpPr>
             <a:spLocks noGrp="1"/>
           </p:cNvSpPr>
@@ -3464,18 +3032,13 @@
               <a:rPr lang="en-IN" dirty="0"/>
               <a:t>JavaScript</a:t>
             </a:r>
-          </a:p>
-        </p:txBody>
-      </p:sp>
-      <p:sp>
-        <p:nvSpPr>
-          <p:cNvPr id="3" name="Subtitle 2">
-            <a:extLst>
-              <a:ext uri="{FF2B5EF4-FFF2-40B4-BE49-F238E27FC236}">
-                <a16:creationId xmlns:a16="http://schemas.microsoft.com/office/drawing/2014/main" id="{3E57D00C-5F41-4854-8E51-A742B7BF579B}"/>
-              </a:ext>
-            </a:extLst>
-          </p:cNvPr>
+            <a:endParaRPr lang="en-IN" dirty="0"/>
+          </a:p>
+        </p:txBody>
+      </p:sp>
+      <p:sp>
+        <p:nvSpPr>
+          <p:cNvPr id="3" name="Subtitle 2"/>
           <p:cNvSpPr>
             <a:spLocks noGrp="1"/>
           </p:cNvSpPr>
@@ -3492,15 +3055,11 @@
               <a:rPr lang="en-IN" dirty="0"/>
               <a:t>Dr. Sandeep Kumar Satapathy</a:t>
             </a:r>
+            <a:endParaRPr lang="en-IN" dirty="0"/>
           </a:p>
         </p:txBody>
       </p:sp>
     </p:spTree>
-    <p:extLst>
-      <p:ext uri="{BB962C8B-B14F-4D97-AF65-F5344CB8AC3E}">
-        <p14:creationId xmlns:p14="http://schemas.microsoft.com/office/powerpoint/2010/main" val="1494610477"/>
-      </p:ext>
-    </p:extLst>
   </p:cSld>
   <p:clrMapOvr>
     <a:masterClrMapping/>
@@ -3527,13 +3086,7 @@
       </p:grpSpPr>
       <p:sp>
         <p:nvSpPr>
-          <p:cNvPr id="2" name="Title 1">
-            <a:extLst>
-              <a:ext uri="{FF2B5EF4-FFF2-40B4-BE49-F238E27FC236}">
-                <a16:creationId xmlns:a16="http://schemas.microsoft.com/office/drawing/2014/main" id="{E18AFE5A-96FF-4F62-915A-BDD9B59C4BEE}"/>
-              </a:ext>
-            </a:extLst>
-          </p:cNvPr>
+          <p:cNvPr id="2" name="Title 1"/>
           <p:cNvSpPr>
             <a:spLocks noGrp="1"/>
           </p:cNvSpPr>
@@ -3550,25 +3103,20 @@
               <a:rPr lang="en-IN" dirty="0"/>
               <a:t>JavaScript Local Variables</a:t>
             </a:r>
+            <a:endParaRPr lang="en-IN" dirty="0"/>
           </a:p>
         </p:txBody>
       </p:sp>
       <p:pic>
         <p:nvPicPr>
-          <p:cNvPr id="5" name="Picture 4">
-            <a:extLst>
-              <a:ext uri="{FF2B5EF4-FFF2-40B4-BE49-F238E27FC236}">
-                <a16:creationId xmlns:a16="http://schemas.microsoft.com/office/drawing/2014/main" id="{0EF64885-CEC5-4FDB-A6DB-DC9F164796B6}"/>
-              </a:ext>
-            </a:extLst>
-          </p:cNvPr>
+          <p:cNvPr id="5" name="Picture 4"/>
           <p:cNvPicPr>
             <a:picLocks noChangeAspect="1"/>
           </p:cNvPicPr>
           <p:nvPr/>
         </p:nvPicPr>
         <p:blipFill>
-          <a:blip r:embed="rId2"/>
+          <a:blip r:embed="rId1"/>
           <a:stretch>
             <a:fillRect/>
           </a:stretch>
@@ -3584,11 +3132,6 @@
         </p:spPr>
       </p:pic>
     </p:spTree>
-    <p:extLst>
-      <p:ext uri="{BB962C8B-B14F-4D97-AF65-F5344CB8AC3E}">
-        <p14:creationId xmlns:p14="http://schemas.microsoft.com/office/powerpoint/2010/main" val="2378246783"/>
-      </p:ext>
-    </p:extLst>
   </p:cSld>
   <p:clrMapOvr>
     <a:masterClrMapping/>
@@ -3615,13 +3158,7 @@
       </p:grpSpPr>
       <p:sp>
         <p:nvSpPr>
-          <p:cNvPr id="2" name="Title 1">
-            <a:extLst>
-              <a:ext uri="{FF2B5EF4-FFF2-40B4-BE49-F238E27FC236}">
-                <a16:creationId xmlns:a16="http://schemas.microsoft.com/office/drawing/2014/main" id="{AC631CF5-9AC8-4617-AD44-1A86BA4A19A1}"/>
-              </a:ext>
-            </a:extLst>
-          </p:cNvPr>
+          <p:cNvPr id="2" name="Title 1"/>
           <p:cNvSpPr>
             <a:spLocks noGrp="1"/>
           </p:cNvSpPr>
@@ -3638,25 +3175,20 @@
               <a:rPr lang="en-IN" dirty="0"/>
               <a:t>JavaScript Global Variables</a:t>
             </a:r>
+            <a:endParaRPr lang="en-IN" dirty="0"/>
           </a:p>
         </p:txBody>
       </p:sp>
       <p:pic>
         <p:nvPicPr>
-          <p:cNvPr id="5" name="Picture 4">
-            <a:extLst>
-              <a:ext uri="{FF2B5EF4-FFF2-40B4-BE49-F238E27FC236}">
-                <a16:creationId xmlns:a16="http://schemas.microsoft.com/office/drawing/2014/main" id="{DC1C3160-4778-4575-9978-B610BDA29919}"/>
-              </a:ext>
-            </a:extLst>
-          </p:cNvPr>
+          <p:cNvPr id="5" name="Picture 4"/>
           <p:cNvPicPr>
             <a:picLocks noChangeAspect="1"/>
           </p:cNvPicPr>
           <p:nvPr/>
         </p:nvPicPr>
         <p:blipFill>
-          <a:blip r:embed="rId2"/>
+          <a:blip r:embed="rId1"/>
           <a:stretch>
             <a:fillRect/>
           </a:stretch>
@@ -3672,11 +3204,6 @@
         </p:spPr>
       </p:pic>
     </p:spTree>
-    <p:extLst>
-      <p:ext uri="{BB962C8B-B14F-4D97-AF65-F5344CB8AC3E}">
-        <p14:creationId xmlns:p14="http://schemas.microsoft.com/office/powerpoint/2010/main" val="2202577333"/>
-      </p:ext>
-    </p:extLst>
   </p:cSld>
   <p:clrMapOvr>
     <a:masterClrMapping/>
@@ -3703,13 +3230,7 @@
       </p:grpSpPr>
       <p:sp>
         <p:nvSpPr>
-          <p:cNvPr id="2" name="Title 1">
-            <a:extLst>
-              <a:ext uri="{FF2B5EF4-FFF2-40B4-BE49-F238E27FC236}">
-                <a16:creationId xmlns:a16="http://schemas.microsoft.com/office/drawing/2014/main" id="{890B0857-C5BC-4CF9-AED9-EF8F4780D2BE}"/>
-              </a:ext>
-            </a:extLst>
-          </p:cNvPr>
+          <p:cNvPr id="2" name="Title 1"/>
           <p:cNvSpPr>
             <a:spLocks noGrp="1"/>
           </p:cNvSpPr>
@@ -3732,13 +3253,7 @@
       </p:sp>
       <p:sp>
         <p:nvSpPr>
-          <p:cNvPr id="3" name="Content Placeholder 2">
-            <a:extLst>
-              <a:ext uri="{FF2B5EF4-FFF2-40B4-BE49-F238E27FC236}">
-                <a16:creationId xmlns:a16="http://schemas.microsoft.com/office/drawing/2014/main" id="{24549E8E-9DC6-4133-88C8-C367D0EC9A21}"/>
-              </a:ext>
-            </a:extLst>
-          </p:cNvPr>
+          <p:cNvPr id="3" name="Content Placeholder 2"/>
           <p:cNvSpPr>
             <a:spLocks noGrp="1"/>
           </p:cNvSpPr>
@@ -3758,6 +3273,7 @@
               <a:rPr lang="en-US" dirty="0"/>
               <a:t>JavaScript provides different data types to hold different types of values. There are two types of data types in JavaScript.</a:t>
             </a:r>
+            <a:endParaRPr lang="en-US" dirty="0"/>
           </a:p>
           <a:p>
             <a:pPr lvl="1" algn="just"/>
@@ -3765,6 +3281,7 @@
               <a:rPr lang="en-US" dirty="0"/>
               <a:t>Primitive data type</a:t>
             </a:r>
+            <a:endParaRPr lang="en-US" dirty="0"/>
           </a:p>
           <a:p>
             <a:pPr lvl="1" algn="just"/>
@@ -3772,6 +3289,7 @@
               <a:rPr lang="en-US" dirty="0"/>
               <a:t>Non-primitive (reference) data type</a:t>
             </a:r>
+            <a:endParaRPr lang="en-US" dirty="0"/>
           </a:p>
           <a:p>
             <a:pPr algn="just"/>
@@ -3779,6 +3297,7 @@
               <a:rPr lang="en-US" dirty="0"/>
               <a:t>JavaScript is a dynamic type language, means you don't need to specify type of the variable because it is dynamically used by JavaScript engine. </a:t>
             </a:r>
+            <a:endParaRPr lang="en-US" dirty="0"/>
           </a:p>
           <a:p>
             <a:pPr algn="just"/>
@@ -3786,6 +3305,7 @@
               <a:rPr lang="en-US" dirty="0"/>
               <a:t>You need to use var here to specify the data type. It can hold any type of values such as numbers, strings etc.</a:t>
             </a:r>
+            <a:endParaRPr lang="en-US" dirty="0"/>
           </a:p>
           <a:p>
             <a:pPr marL="0" indent="0" algn="just">
@@ -3841,6 +3361,13 @@
               </a:rPr>
               <a:t>;//holding number  </a:t>
             </a:r>
+            <a:endParaRPr lang="nb-NO" b="0" i="0" dirty="0">
+              <a:solidFill>
+                <a:srgbClr val="000000"/>
+              </a:solidFill>
+              <a:effectLst/>
+              <a:latin typeface="inter-regular"/>
+            </a:endParaRPr>
           </a:p>
           <a:p>
             <a:pPr marL="0" indent="0" algn="just">
@@ -3896,6 +3423,13 @@
               </a:rPr>
               <a:t>;//holding string </a:t>
             </a:r>
+            <a:endParaRPr lang="nb-NO" b="0" i="0" dirty="0">
+              <a:solidFill>
+                <a:srgbClr val="000000"/>
+              </a:solidFill>
+              <a:effectLst/>
+              <a:latin typeface="inter-regular"/>
+            </a:endParaRPr>
           </a:p>
           <a:p>
             <a:pPr algn="just"/>
@@ -3904,11 +3438,6 @@
         </p:txBody>
       </p:sp>
     </p:spTree>
-    <p:extLst>
-      <p:ext uri="{BB962C8B-B14F-4D97-AF65-F5344CB8AC3E}">
-        <p14:creationId xmlns:p14="http://schemas.microsoft.com/office/powerpoint/2010/main" val="1296103999"/>
-      </p:ext>
-    </p:extLst>
   </p:cSld>
   <p:clrMapOvr>
     <a:masterClrMapping/>
@@ -3935,13 +3464,7 @@
       </p:grpSpPr>
       <p:sp>
         <p:nvSpPr>
-          <p:cNvPr id="2" name="Title 1">
-            <a:extLst>
-              <a:ext uri="{FF2B5EF4-FFF2-40B4-BE49-F238E27FC236}">
-                <a16:creationId xmlns:a16="http://schemas.microsoft.com/office/drawing/2014/main" id="{03828BF8-567F-452F-B1E9-A27425AD7551}"/>
-              </a:ext>
-            </a:extLst>
-          </p:cNvPr>
+          <p:cNvPr id="2" name="Title 1"/>
           <p:cNvSpPr>
             <a:spLocks noGrp="1"/>
           </p:cNvSpPr>
@@ -3964,20 +3487,14 @@
       </p:sp>
       <p:pic>
         <p:nvPicPr>
-          <p:cNvPr id="5" name="Picture 4">
-            <a:extLst>
-              <a:ext uri="{FF2B5EF4-FFF2-40B4-BE49-F238E27FC236}">
-                <a16:creationId xmlns:a16="http://schemas.microsoft.com/office/drawing/2014/main" id="{E6B547CB-9DA1-432C-8A62-E4A035944A4A}"/>
-              </a:ext>
-            </a:extLst>
-          </p:cNvPr>
+          <p:cNvPr id="5" name="Picture 4"/>
           <p:cNvPicPr>
             <a:picLocks noChangeAspect="1"/>
           </p:cNvPicPr>
           <p:nvPr/>
         </p:nvPicPr>
         <p:blipFill>
-          <a:blip r:embed="rId2"/>
+          <a:blip r:embed="rId1"/>
           <a:stretch>
             <a:fillRect/>
           </a:stretch>
@@ -3993,11 +3510,6 @@
         </p:spPr>
       </p:pic>
     </p:spTree>
-    <p:extLst>
-      <p:ext uri="{BB962C8B-B14F-4D97-AF65-F5344CB8AC3E}">
-        <p14:creationId xmlns:p14="http://schemas.microsoft.com/office/powerpoint/2010/main" val="3351607809"/>
-      </p:ext>
-    </p:extLst>
   </p:cSld>
   <p:clrMapOvr>
     <a:masterClrMapping/>
@@ -4024,13 +3536,7 @@
       </p:grpSpPr>
       <p:sp>
         <p:nvSpPr>
-          <p:cNvPr id="2" name="Title 1">
-            <a:extLst>
-              <a:ext uri="{FF2B5EF4-FFF2-40B4-BE49-F238E27FC236}">
-                <a16:creationId xmlns:a16="http://schemas.microsoft.com/office/drawing/2014/main" id="{FDF556C0-B5A5-4E73-AB14-6D5DF7A10849}"/>
-              </a:ext>
-            </a:extLst>
-          </p:cNvPr>
+          <p:cNvPr id="2" name="Title 1"/>
           <p:cNvSpPr>
             <a:spLocks noGrp="1"/>
           </p:cNvSpPr>
@@ -4053,20 +3559,14 @@
       </p:sp>
       <p:pic>
         <p:nvPicPr>
-          <p:cNvPr id="7" name="Picture 6">
-            <a:extLst>
-              <a:ext uri="{FF2B5EF4-FFF2-40B4-BE49-F238E27FC236}">
-                <a16:creationId xmlns:a16="http://schemas.microsoft.com/office/drawing/2014/main" id="{9796854C-20DD-41A3-B29D-9B0AA475115D}"/>
-              </a:ext>
-            </a:extLst>
-          </p:cNvPr>
+          <p:cNvPr id="7" name="Picture 6"/>
           <p:cNvPicPr>
             <a:picLocks noChangeAspect="1"/>
           </p:cNvPicPr>
           <p:nvPr/>
         </p:nvPicPr>
         <p:blipFill>
-          <a:blip r:embed="rId2"/>
+          <a:blip r:embed="rId1"/>
           <a:stretch>
             <a:fillRect/>
           </a:stretch>
@@ -4082,11 +3582,6 @@
         </p:spPr>
       </p:pic>
     </p:spTree>
-    <p:extLst>
-      <p:ext uri="{BB962C8B-B14F-4D97-AF65-F5344CB8AC3E}">
-        <p14:creationId xmlns:p14="http://schemas.microsoft.com/office/powerpoint/2010/main" val="1053709997"/>
-      </p:ext>
-    </p:extLst>
   </p:cSld>
   <p:clrMapOvr>
     <a:masterClrMapping/>
@@ -4113,13 +3608,7 @@
       </p:grpSpPr>
       <p:sp>
         <p:nvSpPr>
-          <p:cNvPr id="2" name="Title 1">
-            <a:extLst>
-              <a:ext uri="{FF2B5EF4-FFF2-40B4-BE49-F238E27FC236}">
-                <a16:creationId xmlns:a16="http://schemas.microsoft.com/office/drawing/2014/main" id="{AD6D9FB6-4D6E-4E5E-BCF7-4FA3ECE65FB4}"/>
-              </a:ext>
-            </a:extLst>
-          </p:cNvPr>
+          <p:cNvPr id="2" name="Title 1"/>
           <p:cNvSpPr>
             <a:spLocks noGrp="1"/>
           </p:cNvSpPr>
@@ -4142,13 +3631,7 @@
       </p:sp>
       <p:sp>
         <p:nvSpPr>
-          <p:cNvPr id="3" name="Content Placeholder 2">
-            <a:extLst>
-              <a:ext uri="{FF2B5EF4-FFF2-40B4-BE49-F238E27FC236}">
-                <a16:creationId xmlns:a16="http://schemas.microsoft.com/office/drawing/2014/main" id="{D1189F50-82FB-41B8-A31E-F0076CB3E400}"/>
-              </a:ext>
-            </a:extLst>
-          </p:cNvPr>
+          <p:cNvPr id="3" name="Content Placeholder 2"/>
           <p:cNvSpPr>
             <a:spLocks noGrp="1"/>
           </p:cNvSpPr>
@@ -4167,6 +3650,7 @@
               <a:rPr lang="en-US" dirty="0"/>
               <a:t>JavaScript operators are symbols that are used to perform operations on operands. </a:t>
             </a:r>
+            <a:endParaRPr lang="en-US" dirty="0"/>
           </a:p>
           <a:p>
             <a:pPr marL="0" indent="0">
@@ -4176,12 +3660,14 @@
               <a:rPr lang="en-US" dirty="0"/>
               <a:t>	For example: var sum=10+20;  </a:t>
             </a:r>
+            <a:endParaRPr lang="en-US" dirty="0"/>
           </a:p>
           <a:p>
             <a:r>
               <a:rPr lang="en-US" dirty="0"/>
               <a:t>Here, + is the arithmetic operator and = is the assignment operator.</a:t>
             </a:r>
+            <a:endParaRPr lang="en-US" dirty="0"/>
           </a:p>
           <a:p>
             <a:endParaRPr lang="en-US" dirty="0"/>
@@ -4191,6 +3677,7 @@
               <a:rPr lang="en-US" dirty="0"/>
               <a:t>There are following types of operators in JavaScript.</a:t>
             </a:r>
+            <a:endParaRPr lang="en-US" dirty="0"/>
           </a:p>
           <a:p>
             <a:endParaRPr lang="en-US" dirty="0"/>
@@ -4201,6 +3688,7 @@
               <a:rPr lang="en-US" dirty="0"/>
               <a:t>Arithmetic Operators</a:t>
             </a:r>
+            <a:endParaRPr lang="en-US" dirty="0"/>
           </a:p>
           <a:p>
             <a:pPr lvl="1"/>
@@ -4208,6 +3696,7 @@
               <a:rPr lang="en-US" dirty="0"/>
               <a:t>Comparison (Relational) Operators</a:t>
             </a:r>
+            <a:endParaRPr lang="en-US" dirty="0"/>
           </a:p>
           <a:p>
             <a:pPr lvl="1"/>
@@ -4215,6 +3704,7 @@
               <a:rPr lang="en-US" dirty="0"/>
               <a:t>Bitwise Operators</a:t>
             </a:r>
+            <a:endParaRPr lang="en-US" dirty="0"/>
           </a:p>
           <a:p>
             <a:pPr lvl="1"/>
@@ -4222,6 +3712,7 @@
               <a:rPr lang="en-US" dirty="0"/>
               <a:t>Logical Operators</a:t>
             </a:r>
+            <a:endParaRPr lang="en-US" dirty="0"/>
           </a:p>
           <a:p>
             <a:pPr lvl="1"/>
@@ -4229,6 +3720,7 @@
               <a:rPr lang="en-US" dirty="0"/>
               <a:t>Assignment Operators</a:t>
             </a:r>
+            <a:endParaRPr lang="en-US" dirty="0"/>
           </a:p>
           <a:p>
             <a:pPr lvl="1"/>
@@ -4241,11 +3733,6 @@
         </p:txBody>
       </p:sp>
     </p:spTree>
-    <p:extLst>
-      <p:ext uri="{BB962C8B-B14F-4D97-AF65-F5344CB8AC3E}">
-        <p14:creationId xmlns:p14="http://schemas.microsoft.com/office/powerpoint/2010/main" val="33152794"/>
-      </p:ext>
-    </p:extLst>
   </p:cSld>
   <p:clrMapOvr>
     <a:masterClrMapping/>
@@ -4272,13 +3759,7 @@
       </p:grpSpPr>
       <p:sp>
         <p:nvSpPr>
-          <p:cNvPr id="2" name="Title 1">
-            <a:extLst>
-              <a:ext uri="{FF2B5EF4-FFF2-40B4-BE49-F238E27FC236}">
-                <a16:creationId xmlns:a16="http://schemas.microsoft.com/office/drawing/2014/main" id="{E5953E9F-8334-434A-A681-6D1BD1E72A4F}"/>
-              </a:ext>
-            </a:extLst>
-          </p:cNvPr>
+          <p:cNvPr id="2" name="Title 1"/>
           <p:cNvSpPr>
             <a:spLocks noGrp="1"/>
           </p:cNvSpPr>
@@ -4301,20 +3782,14 @@
       </p:sp>
       <p:pic>
         <p:nvPicPr>
-          <p:cNvPr id="5" name="Picture 4">
-            <a:extLst>
-              <a:ext uri="{FF2B5EF4-FFF2-40B4-BE49-F238E27FC236}">
-                <a16:creationId xmlns:a16="http://schemas.microsoft.com/office/drawing/2014/main" id="{041E90B2-6C25-4B39-9951-849FB06F70D1}"/>
-              </a:ext>
-            </a:extLst>
-          </p:cNvPr>
+          <p:cNvPr id="5" name="Picture 4"/>
           <p:cNvPicPr>
             <a:picLocks noChangeAspect="1"/>
           </p:cNvPicPr>
           <p:nvPr/>
         </p:nvPicPr>
         <p:blipFill>
-          <a:blip r:embed="rId2"/>
+          <a:blip r:embed="rId1"/>
           <a:stretch>
             <a:fillRect/>
           </a:stretch>
@@ -4330,11 +3805,6 @@
         </p:spPr>
       </p:pic>
     </p:spTree>
-    <p:extLst>
-      <p:ext uri="{BB962C8B-B14F-4D97-AF65-F5344CB8AC3E}">
-        <p14:creationId xmlns:p14="http://schemas.microsoft.com/office/powerpoint/2010/main" val="362048291"/>
-      </p:ext>
-    </p:extLst>
   </p:cSld>
   <p:clrMapOvr>
     <a:masterClrMapping/>
@@ -4361,13 +3831,7 @@
       </p:grpSpPr>
       <p:sp>
         <p:nvSpPr>
-          <p:cNvPr id="2" name="Title 1">
-            <a:extLst>
-              <a:ext uri="{FF2B5EF4-FFF2-40B4-BE49-F238E27FC236}">
-                <a16:creationId xmlns:a16="http://schemas.microsoft.com/office/drawing/2014/main" id="{CF73F78A-51F3-48F9-B47D-AEB75785A93C}"/>
-              </a:ext>
-            </a:extLst>
-          </p:cNvPr>
+          <p:cNvPr id="2" name="Title 1"/>
           <p:cNvSpPr>
             <a:spLocks noGrp="1"/>
           </p:cNvSpPr>
@@ -4390,13 +3854,7 @@
       </p:sp>
       <p:sp>
         <p:nvSpPr>
-          <p:cNvPr id="3" name="Content Placeholder 2">
-            <a:extLst>
-              <a:ext uri="{FF2B5EF4-FFF2-40B4-BE49-F238E27FC236}">
-                <a16:creationId xmlns:a16="http://schemas.microsoft.com/office/drawing/2014/main" id="{35C0A90B-413C-4142-90F6-AC5FC32F67E2}"/>
-              </a:ext>
-            </a:extLst>
-          </p:cNvPr>
+          <p:cNvPr id="3" name="Content Placeholder 2"/>
           <p:cNvSpPr>
             <a:spLocks noGrp="1"/>
           </p:cNvSpPr>
@@ -4415,6 +3873,7 @@
               <a:rPr lang="en-US" dirty="0"/>
               <a:t>The JavaScript if-else statement is used to execute the code whether condition is true or false. There are three forms of if statement in JavaScript.</a:t>
             </a:r>
+            <a:endParaRPr lang="en-US" dirty="0"/>
           </a:p>
           <a:p>
             <a:endParaRPr lang="en-US" dirty="0"/>
@@ -4425,6 +3884,7 @@
               <a:rPr lang="en-US" dirty="0"/>
               <a:t>If Statement</a:t>
             </a:r>
+            <a:endParaRPr lang="en-US" dirty="0"/>
           </a:p>
           <a:p>
             <a:pPr lvl="1"/>
@@ -4432,6 +3892,7 @@
               <a:rPr lang="en-US" dirty="0"/>
               <a:t>If else statement</a:t>
             </a:r>
+            <a:endParaRPr lang="en-US" dirty="0"/>
           </a:p>
           <a:p>
             <a:pPr lvl="1"/>
@@ -4439,6 +3900,7 @@
               <a:rPr lang="en-US" dirty="0"/>
               <a:t>if else if statement</a:t>
             </a:r>
+            <a:endParaRPr lang="en-US" dirty="0"/>
           </a:p>
           <a:p>
             <a:endParaRPr lang="en-US" dirty="0"/>
@@ -4448,12 +3910,14 @@
               <a:rPr lang="en-US" dirty="0"/>
               <a:t>JavaScript If statement</a:t>
             </a:r>
+            <a:endParaRPr lang="en-US" dirty="0"/>
           </a:p>
           <a:p>
             <a:r>
               <a:rPr lang="en-US" dirty="0"/>
               <a:t>It evaluates the content only if expression is true. The signature of JavaScript if statement is given below.</a:t>
             </a:r>
+            <a:endParaRPr lang="en-US" dirty="0"/>
           </a:p>
           <a:p>
             <a:endParaRPr lang="en-US" dirty="0"/>
@@ -4466,6 +3930,7 @@
               <a:rPr lang="en-US" dirty="0"/>
               <a:t>	if(expression){  </a:t>
             </a:r>
+            <a:endParaRPr lang="en-US" dirty="0"/>
           </a:p>
           <a:p>
             <a:pPr marL="0" indent="0">
@@ -4475,6 +3940,7 @@
               <a:rPr lang="en-US" dirty="0"/>
               <a:t>		//content to be evaluated  </a:t>
             </a:r>
+            <a:endParaRPr lang="en-US" dirty="0"/>
           </a:p>
           <a:p>
             <a:pPr marL="0" indent="0">
@@ -4489,11 +3955,6 @@
         </p:txBody>
       </p:sp>
     </p:spTree>
-    <p:extLst>
-      <p:ext uri="{BB962C8B-B14F-4D97-AF65-F5344CB8AC3E}">
-        <p14:creationId xmlns:p14="http://schemas.microsoft.com/office/powerpoint/2010/main" val="2782350870"/>
-      </p:ext>
-    </p:extLst>
   </p:cSld>
   <p:clrMapOvr>
     <a:masterClrMapping/>
@@ -4520,13 +3981,7 @@
       </p:grpSpPr>
       <p:sp>
         <p:nvSpPr>
-          <p:cNvPr id="2" name="Title 1">
-            <a:extLst>
-              <a:ext uri="{FF2B5EF4-FFF2-40B4-BE49-F238E27FC236}">
-                <a16:creationId xmlns:a16="http://schemas.microsoft.com/office/drawing/2014/main" id="{99A38BCE-E856-4710-8EB1-2DF58F534E42}"/>
-              </a:ext>
-            </a:extLst>
-          </p:cNvPr>
+          <p:cNvPr id="2" name="Title 1"/>
           <p:cNvSpPr>
             <a:spLocks noGrp="1"/>
           </p:cNvSpPr>
@@ -4549,20 +4004,14 @@
       </p:sp>
       <p:pic>
         <p:nvPicPr>
-          <p:cNvPr id="5" name="Picture 4">
-            <a:extLst>
-              <a:ext uri="{FF2B5EF4-FFF2-40B4-BE49-F238E27FC236}">
-                <a16:creationId xmlns:a16="http://schemas.microsoft.com/office/drawing/2014/main" id="{AAAB85C5-78AE-447F-BAC2-0085D7431CAC}"/>
-              </a:ext>
-            </a:extLst>
-          </p:cNvPr>
+          <p:cNvPr id="5" name="Picture 4"/>
           <p:cNvPicPr>
             <a:picLocks noChangeAspect="1"/>
           </p:cNvPicPr>
           <p:nvPr/>
         </p:nvPicPr>
         <p:blipFill>
-          <a:blip r:embed="rId2"/>
+          <a:blip r:embed="rId1"/>
           <a:stretch>
             <a:fillRect/>
           </a:stretch>
@@ -4578,11 +4027,6 @@
         </p:spPr>
       </p:pic>
     </p:spTree>
-    <p:extLst>
-      <p:ext uri="{BB962C8B-B14F-4D97-AF65-F5344CB8AC3E}">
-        <p14:creationId xmlns:p14="http://schemas.microsoft.com/office/powerpoint/2010/main" val="2170530472"/>
-      </p:ext>
-    </p:extLst>
   </p:cSld>
   <p:clrMapOvr>
     <a:masterClrMapping/>
@@ -4609,13 +4053,7 @@
       </p:grpSpPr>
       <p:sp>
         <p:nvSpPr>
-          <p:cNvPr id="2" name="Title 1">
-            <a:extLst>
-              <a:ext uri="{FF2B5EF4-FFF2-40B4-BE49-F238E27FC236}">
-                <a16:creationId xmlns:a16="http://schemas.microsoft.com/office/drawing/2014/main" id="{D0A1270B-938C-4E2E-AEC8-A7F5069F273B}"/>
-              </a:ext>
-            </a:extLst>
-          </p:cNvPr>
+          <p:cNvPr id="2" name="Title 1"/>
           <p:cNvSpPr>
             <a:spLocks noGrp="1"/>
           </p:cNvSpPr>
@@ -4638,13 +4076,7 @@
       </p:sp>
       <p:sp>
         <p:nvSpPr>
-          <p:cNvPr id="3" name="Content Placeholder 2">
-            <a:extLst>
-              <a:ext uri="{FF2B5EF4-FFF2-40B4-BE49-F238E27FC236}">
-                <a16:creationId xmlns:a16="http://schemas.microsoft.com/office/drawing/2014/main" id="{9C691752-0CE4-466C-B145-39EA0493355A}"/>
-              </a:ext>
-            </a:extLst>
-          </p:cNvPr>
+          <p:cNvPr id="3" name="Content Placeholder 2"/>
           <p:cNvSpPr>
             <a:spLocks noGrp="1"/>
           </p:cNvSpPr>
@@ -4663,6 +4095,7 @@
               <a:rPr lang="en-US" dirty="0"/>
               <a:t>It evaluates the content whether condition is true of false. The syntax of JavaScript if-else statement is given below.</a:t>
             </a:r>
+            <a:endParaRPr lang="en-US" dirty="0"/>
           </a:p>
           <a:p>
             <a:endParaRPr lang="en-US" dirty="0"/>
@@ -4675,6 +4108,7 @@
               <a:rPr lang="en-US" dirty="0"/>
               <a:t>	if(expression){  </a:t>
             </a:r>
+            <a:endParaRPr lang="en-US" dirty="0"/>
           </a:p>
           <a:p>
             <a:pPr marL="0" indent="0">
@@ -4684,6 +4118,7 @@
               <a:rPr lang="en-US" dirty="0"/>
               <a:t>		//content to be evaluated if condition is true  </a:t>
             </a:r>
+            <a:endParaRPr lang="en-US" dirty="0"/>
           </a:p>
           <a:p>
             <a:pPr marL="0" indent="0">
@@ -4693,6 +4128,7 @@
               <a:rPr lang="en-US" dirty="0"/>
               <a:t>	}  </a:t>
             </a:r>
+            <a:endParaRPr lang="en-US" dirty="0"/>
           </a:p>
           <a:p>
             <a:pPr marL="0" indent="0">
@@ -4702,6 +4138,7 @@
               <a:rPr lang="en-US" dirty="0"/>
               <a:t>	else{  </a:t>
             </a:r>
+            <a:endParaRPr lang="en-US" dirty="0"/>
           </a:p>
           <a:p>
             <a:pPr marL="0" indent="0">
@@ -4711,6 +4148,7 @@
               <a:rPr lang="en-US" dirty="0"/>
               <a:t>		//content to be evaluated if condition is false  </a:t>
             </a:r>
+            <a:endParaRPr lang="en-US" dirty="0"/>
           </a:p>
           <a:p>
             <a:pPr marL="0" indent="0">
@@ -4725,11 +4163,6 @@
         </p:txBody>
       </p:sp>
     </p:spTree>
-    <p:extLst>
-      <p:ext uri="{BB962C8B-B14F-4D97-AF65-F5344CB8AC3E}">
-        <p14:creationId xmlns:p14="http://schemas.microsoft.com/office/powerpoint/2010/main" val="2193533367"/>
-      </p:ext>
-    </p:extLst>
   </p:cSld>
   <p:clrMapOvr>
     <a:masterClrMapping/>
@@ -4756,13 +4189,7 @@
       </p:grpSpPr>
       <p:sp>
         <p:nvSpPr>
-          <p:cNvPr id="2" name="Title 1">
-            <a:extLst>
-              <a:ext uri="{FF2B5EF4-FFF2-40B4-BE49-F238E27FC236}">
-                <a16:creationId xmlns:a16="http://schemas.microsoft.com/office/drawing/2014/main" id="{67B508C0-A5D8-4D03-9AB0-1E972DF6926E}"/>
-              </a:ext>
-            </a:extLst>
-          </p:cNvPr>
+          <p:cNvPr id="2" name="Title 1"/>
           <p:cNvSpPr>
             <a:spLocks noGrp="1"/>
           </p:cNvSpPr>
@@ -4785,13 +4212,7 @@
       </p:sp>
       <p:sp>
         <p:nvSpPr>
-          <p:cNvPr id="3" name="Content Placeholder 2">
-            <a:extLst>
-              <a:ext uri="{FF2B5EF4-FFF2-40B4-BE49-F238E27FC236}">
-                <a16:creationId xmlns:a16="http://schemas.microsoft.com/office/drawing/2014/main" id="{95D08C34-DD55-4773-B839-31EAB8C68F42}"/>
-              </a:ext>
-            </a:extLst>
-          </p:cNvPr>
+          <p:cNvPr id="3" name="Content Placeholder 2"/>
           <p:cNvSpPr>
             <a:spLocks noGrp="1"/>
           </p:cNvSpPr>
@@ -4819,6 +4240,7 @@
               <a:rPr lang="en-US" dirty="0"/>
               <a:t>) is a light-weight object-oriented programming language which is used by several websites for scripting the webpages. </a:t>
             </a:r>
+            <a:endParaRPr lang="en-US" dirty="0"/>
           </a:p>
           <a:p>
             <a:pPr algn="just"/>
@@ -4826,6 +4248,7 @@
               <a:rPr lang="en-US" dirty="0"/>
               <a:t>It is an interpreted, full-fledged programming language that enables dynamic interactivity on websites when applied to an HTML document. </a:t>
             </a:r>
+            <a:endParaRPr lang="en-US" dirty="0"/>
           </a:p>
           <a:p>
             <a:pPr algn="just"/>
@@ -4833,6 +4256,7 @@
               <a:rPr lang="en-US" dirty="0"/>
               <a:t>It was introduced in the year 1995 for adding programs to the webpages in the Netscape Navigator browser. </a:t>
             </a:r>
+            <a:endParaRPr lang="en-US" dirty="0"/>
           </a:p>
           <a:p>
             <a:pPr algn="just"/>
@@ -4841,11 +4265,6 @@
         </p:txBody>
       </p:sp>
     </p:spTree>
-    <p:extLst>
-      <p:ext uri="{BB962C8B-B14F-4D97-AF65-F5344CB8AC3E}">
-        <p14:creationId xmlns:p14="http://schemas.microsoft.com/office/powerpoint/2010/main" val="1032092360"/>
-      </p:ext>
-    </p:extLst>
   </p:cSld>
   <p:clrMapOvr>
     <a:masterClrMapping/>
@@ -4872,13 +4291,7 @@
       </p:grpSpPr>
       <p:sp>
         <p:nvSpPr>
-          <p:cNvPr id="2" name="Title 1">
-            <a:extLst>
-              <a:ext uri="{FF2B5EF4-FFF2-40B4-BE49-F238E27FC236}">
-                <a16:creationId xmlns:a16="http://schemas.microsoft.com/office/drawing/2014/main" id="{1805B925-38A1-467E-BA5A-86F20DF5FF60}"/>
-              </a:ext>
-            </a:extLst>
-          </p:cNvPr>
+          <p:cNvPr id="2" name="Title 1"/>
           <p:cNvSpPr>
             <a:spLocks noGrp="1"/>
           </p:cNvSpPr>
@@ -4901,20 +4314,14 @@
       </p:sp>
       <p:pic>
         <p:nvPicPr>
-          <p:cNvPr id="5" name="Picture 4">
-            <a:extLst>
-              <a:ext uri="{FF2B5EF4-FFF2-40B4-BE49-F238E27FC236}">
-                <a16:creationId xmlns:a16="http://schemas.microsoft.com/office/drawing/2014/main" id="{1B26829A-1C90-43E9-8DAD-F6C37613CD28}"/>
-              </a:ext>
-            </a:extLst>
-          </p:cNvPr>
+          <p:cNvPr id="5" name="Picture 4"/>
           <p:cNvPicPr>
             <a:picLocks noChangeAspect="1"/>
           </p:cNvPicPr>
           <p:nvPr/>
         </p:nvPicPr>
         <p:blipFill>
-          <a:blip r:embed="rId2"/>
+          <a:blip r:embed="rId1"/>
           <a:stretch>
             <a:fillRect/>
           </a:stretch>
@@ -4930,11 +4337,6 @@
         </p:spPr>
       </p:pic>
     </p:spTree>
-    <p:extLst>
-      <p:ext uri="{BB962C8B-B14F-4D97-AF65-F5344CB8AC3E}">
-        <p14:creationId xmlns:p14="http://schemas.microsoft.com/office/powerpoint/2010/main" val="707689088"/>
-      </p:ext>
-    </p:extLst>
   </p:cSld>
   <p:clrMapOvr>
     <a:masterClrMapping/>
@@ -4961,13 +4363,7 @@
       </p:grpSpPr>
       <p:sp>
         <p:nvSpPr>
-          <p:cNvPr id="2" name="Title 1">
-            <a:extLst>
-              <a:ext uri="{FF2B5EF4-FFF2-40B4-BE49-F238E27FC236}">
-                <a16:creationId xmlns:a16="http://schemas.microsoft.com/office/drawing/2014/main" id="{03B963FF-71FC-4CC8-8CBD-27C53A7CF5AF}"/>
-              </a:ext>
-            </a:extLst>
-          </p:cNvPr>
+          <p:cNvPr id="2" name="Title 1"/>
           <p:cNvSpPr>
             <a:spLocks noGrp="1"/>
           </p:cNvSpPr>
@@ -4990,13 +4386,7 @@
       </p:sp>
       <p:sp>
         <p:nvSpPr>
-          <p:cNvPr id="3" name="Content Placeholder 2">
-            <a:extLst>
-              <a:ext uri="{FF2B5EF4-FFF2-40B4-BE49-F238E27FC236}">
-                <a16:creationId xmlns:a16="http://schemas.microsoft.com/office/drawing/2014/main" id="{D6FDFA56-6351-4EDA-BF44-3720C1380A7C}"/>
-              </a:ext>
-            </a:extLst>
-          </p:cNvPr>
+          <p:cNvPr id="3" name="Content Placeholder 2"/>
           <p:cNvSpPr>
             <a:spLocks noGrp="1"/>
           </p:cNvSpPr>
@@ -5020,6 +4410,7 @@
               <a:rPr lang="en-US" dirty="0"/>
               <a:t>It evaluates the content only if expression is true from several expressions. The signature of JavaScript if else if statement is given below.</a:t>
             </a:r>
+            <a:endParaRPr lang="en-US" dirty="0"/>
           </a:p>
           <a:p>
             <a:endParaRPr lang="en-US" dirty="0"/>
@@ -5032,6 +4423,7 @@
               <a:rPr lang="en-US" dirty="0"/>
               <a:t>	if(expression1){  </a:t>
             </a:r>
+            <a:endParaRPr lang="en-US" dirty="0"/>
           </a:p>
           <a:p>
             <a:pPr marL="0" indent="0">
@@ -5041,6 +4433,7 @@
               <a:rPr lang="en-US" dirty="0"/>
               <a:t>		//content to be evaluated if expression1 is true  </a:t>
             </a:r>
+            <a:endParaRPr lang="en-US" dirty="0"/>
           </a:p>
           <a:p>
             <a:pPr marL="0" indent="0">
@@ -5050,6 +4443,7 @@
               <a:rPr lang="en-US" dirty="0"/>
               <a:t>	}  </a:t>
             </a:r>
+            <a:endParaRPr lang="en-US" dirty="0"/>
           </a:p>
           <a:p>
             <a:pPr marL="0" indent="0">
@@ -5059,6 +4453,7 @@
               <a:rPr lang="en-US" dirty="0"/>
               <a:t>	else if(expression2){  </a:t>
             </a:r>
+            <a:endParaRPr lang="en-US" dirty="0"/>
           </a:p>
           <a:p>
             <a:pPr marL="0" indent="0">
@@ -5068,6 +4463,7 @@
               <a:rPr lang="en-US" dirty="0"/>
               <a:t>		//content to be evaluated if expression2 is true  </a:t>
             </a:r>
+            <a:endParaRPr lang="en-US" dirty="0"/>
           </a:p>
           <a:p>
             <a:pPr marL="0" indent="0">
@@ -5077,6 +4473,7 @@
               <a:rPr lang="en-US" dirty="0"/>
               <a:t>	}  </a:t>
             </a:r>
+            <a:endParaRPr lang="en-US" dirty="0"/>
           </a:p>
           <a:p>
             <a:pPr marL="0" indent="0">
@@ -5086,6 +4483,7 @@
               <a:rPr lang="en-US" dirty="0"/>
               <a:t>	else if(expression3){  </a:t>
             </a:r>
+            <a:endParaRPr lang="en-US" dirty="0"/>
           </a:p>
           <a:p>
             <a:pPr marL="0" indent="0">
@@ -5095,6 +4493,7 @@
               <a:rPr lang="en-US" dirty="0"/>
               <a:t>		//content to be evaluated if expression3 is true  </a:t>
             </a:r>
+            <a:endParaRPr lang="en-US" dirty="0"/>
           </a:p>
           <a:p>
             <a:pPr marL="0" indent="0">
@@ -5104,6 +4503,7 @@
               <a:rPr lang="en-US" dirty="0"/>
               <a:t>	}  </a:t>
             </a:r>
+            <a:endParaRPr lang="en-US" dirty="0"/>
           </a:p>
           <a:p>
             <a:pPr marL="0" indent="0">
@@ -5113,6 +4513,7 @@
               <a:rPr lang="en-US" dirty="0"/>
               <a:t>	else{  </a:t>
             </a:r>
+            <a:endParaRPr lang="en-US" dirty="0"/>
           </a:p>
           <a:p>
             <a:pPr marL="0" indent="0">
@@ -5122,6 +4523,7 @@
               <a:rPr lang="en-US" dirty="0"/>
               <a:t>	//content to be evaluated if no expression is true  </a:t>
             </a:r>
+            <a:endParaRPr lang="en-US" dirty="0"/>
           </a:p>
           <a:p>
             <a:pPr marL="0" indent="0">
@@ -5136,11 +4538,6 @@
         </p:txBody>
       </p:sp>
     </p:spTree>
-    <p:extLst>
-      <p:ext uri="{BB962C8B-B14F-4D97-AF65-F5344CB8AC3E}">
-        <p14:creationId xmlns:p14="http://schemas.microsoft.com/office/powerpoint/2010/main" val="3150216607"/>
-      </p:ext>
-    </p:extLst>
   </p:cSld>
   <p:clrMapOvr>
     <a:masterClrMapping/>
@@ -5167,13 +4564,7 @@
       </p:grpSpPr>
       <p:sp>
         <p:nvSpPr>
-          <p:cNvPr id="2" name="Title 1">
-            <a:extLst>
-              <a:ext uri="{FF2B5EF4-FFF2-40B4-BE49-F238E27FC236}">
-                <a16:creationId xmlns:a16="http://schemas.microsoft.com/office/drawing/2014/main" id="{15915B0A-9C16-407B-AF85-BF8E1819FC16}"/>
-              </a:ext>
-            </a:extLst>
-          </p:cNvPr>
+          <p:cNvPr id="2" name="Title 1"/>
           <p:cNvSpPr>
             <a:spLocks noGrp="1"/>
           </p:cNvSpPr>
@@ -5196,20 +4587,14 @@
       </p:sp>
       <p:pic>
         <p:nvPicPr>
-          <p:cNvPr id="5" name="Picture 4">
-            <a:extLst>
-              <a:ext uri="{FF2B5EF4-FFF2-40B4-BE49-F238E27FC236}">
-                <a16:creationId xmlns:a16="http://schemas.microsoft.com/office/drawing/2014/main" id="{5E24BF05-A822-4EB8-86CA-423C0CC13F2C}"/>
-              </a:ext>
-            </a:extLst>
-          </p:cNvPr>
+          <p:cNvPr id="5" name="Picture 4"/>
           <p:cNvPicPr>
             <a:picLocks noChangeAspect="1"/>
           </p:cNvPicPr>
           <p:nvPr/>
         </p:nvPicPr>
         <p:blipFill>
-          <a:blip r:embed="rId2"/>
+          <a:blip r:embed="rId1"/>
           <a:stretch>
             <a:fillRect/>
           </a:stretch>
@@ -5225,11 +4610,6 @@
         </p:spPr>
       </p:pic>
     </p:spTree>
-    <p:extLst>
-      <p:ext uri="{BB962C8B-B14F-4D97-AF65-F5344CB8AC3E}">
-        <p14:creationId xmlns:p14="http://schemas.microsoft.com/office/powerpoint/2010/main" val="2457452637"/>
-      </p:ext>
-    </p:extLst>
   </p:cSld>
   <p:clrMapOvr>
     <a:masterClrMapping/>
@@ -5256,13 +4636,7 @@
       </p:grpSpPr>
       <p:sp>
         <p:nvSpPr>
-          <p:cNvPr id="2" name="Title 1">
-            <a:extLst>
-              <a:ext uri="{FF2B5EF4-FFF2-40B4-BE49-F238E27FC236}">
-                <a16:creationId xmlns:a16="http://schemas.microsoft.com/office/drawing/2014/main" id="{FA74A35B-EE72-43A8-946E-FD3834907515}"/>
-              </a:ext>
-            </a:extLst>
-          </p:cNvPr>
+          <p:cNvPr id="2" name="Title 1"/>
           <p:cNvSpPr>
             <a:spLocks noGrp="1"/>
           </p:cNvSpPr>
@@ -5285,13 +4659,7 @@
       </p:sp>
       <p:sp>
         <p:nvSpPr>
-          <p:cNvPr id="3" name="Content Placeholder 2">
-            <a:extLst>
-              <a:ext uri="{FF2B5EF4-FFF2-40B4-BE49-F238E27FC236}">
-                <a16:creationId xmlns:a16="http://schemas.microsoft.com/office/drawing/2014/main" id="{E42D628E-FC27-4173-9B8C-05C7C95E0473}"/>
-              </a:ext>
-            </a:extLst>
-          </p:cNvPr>
+          <p:cNvPr id="3" name="Content Placeholder 2"/>
           <p:cNvSpPr>
             <a:spLocks noGrp="1"/>
           </p:cNvSpPr>
@@ -5311,6 +4679,7 @@
               <a:rPr lang="en-US" dirty="0"/>
               <a:t>The JavaScript switch statement is used to execute one code from multiple expressions. </a:t>
             </a:r>
+            <a:endParaRPr lang="en-US" dirty="0"/>
           </a:p>
           <a:p>
             <a:pPr algn="just"/>
@@ -5318,6 +4687,7 @@
               <a:rPr lang="en-US" dirty="0"/>
               <a:t>It is just like else if statement that we have learned in previous page.</a:t>
             </a:r>
+            <a:endParaRPr lang="en-US" dirty="0"/>
           </a:p>
           <a:p>
             <a:pPr algn="just"/>
@@ -5333,6 +4703,7 @@
               <a:rPr lang="en-US" dirty="0"/>
               <a:t> because it can be used with numbers, characters etc.</a:t>
             </a:r>
+            <a:endParaRPr lang="en-US" dirty="0"/>
           </a:p>
           <a:p>
             <a:pPr algn="just"/>
@@ -5344,6 +4715,7 @@
               <a:rPr lang="en-US" dirty="0"/>
               <a:t>The signature of JavaScript switch statement is given below.</a:t>
             </a:r>
+            <a:endParaRPr lang="en-US" dirty="0"/>
           </a:p>
           <a:p>
             <a:pPr algn="just"/>
@@ -5352,11 +4724,6 @@
         </p:txBody>
       </p:sp>
     </p:spTree>
-    <p:extLst>
-      <p:ext uri="{BB962C8B-B14F-4D97-AF65-F5344CB8AC3E}">
-        <p14:creationId xmlns:p14="http://schemas.microsoft.com/office/powerpoint/2010/main" val="3375646442"/>
-      </p:ext>
-    </p:extLst>
   </p:cSld>
   <p:clrMapOvr>
     <a:masterClrMapping/>
@@ -5383,13 +4750,7 @@
       </p:grpSpPr>
       <p:sp>
         <p:nvSpPr>
-          <p:cNvPr id="2" name="Title 1">
-            <a:extLst>
-              <a:ext uri="{FF2B5EF4-FFF2-40B4-BE49-F238E27FC236}">
-                <a16:creationId xmlns:a16="http://schemas.microsoft.com/office/drawing/2014/main" id="{0B44ECF4-F638-4216-A1D8-A0E966E05B12}"/>
-              </a:ext>
-            </a:extLst>
-          </p:cNvPr>
+          <p:cNvPr id="2" name="Title 1"/>
           <p:cNvSpPr>
             <a:spLocks noGrp="1"/>
           </p:cNvSpPr>
@@ -5412,13 +4773,7 @@
       </p:sp>
       <p:sp>
         <p:nvSpPr>
-          <p:cNvPr id="3" name="Content Placeholder 2">
-            <a:extLst>
-              <a:ext uri="{FF2B5EF4-FFF2-40B4-BE49-F238E27FC236}">
-                <a16:creationId xmlns:a16="http://schemas.microsoft.com/office/drawing/2014/main" id="{9C948467-C0E8-4400-98BE-D5AAD4547D06}"/>
-              </a:ext>
-            </a:extLst>
-          </p:cNvPr>
+          <p:cNvPr id="3" name="Content Placeholder 2"/>
           <p:cNvSpPr>
             <a:spLocks noGrp="1"/>
           </p:cNvSpPr>
@@ -5440,6 +4795,7 @@
               <a:rPr lang="en-US" dirty="0"/>
               <a:t>	switch(expression){  </a:t>
             </a:r>
+            <a:endParaRPr lang="en-US" dirty="0"/>
           </a:p>
           <a:p>
             <a:pPr marL="0" indent="0">
@@ -5449,6 +4805,7 @@
               <a:rPr lang="en-US" dirty="0"/>
               <a:t>		case value1:  </a:t>
             </a:r>
+            <a:endParaRPr lang="en-US" dirty="0"/>
           </a:p>
           <a:p>
             <a:pPr marL="0" indent="0">
@@ -5458,6 +4815,7 @@
               <a:rPr lang="en-US" dirty="0"/>
               <a:t>			code to be executed;  </a:t>
             </a:r>
+            <a:endParaRPr lang="en-US" dirty="0"/>
           </a:p>
           <a:p>
             <a:pPr marL="0" indent="0">
@@ -5467,6 +4825,7 @@
               <a:rPr lang="en-US" dirty="0"/>
               <a:t>			break;  </a:t>
             </a:r>
+            <a:endParaRPr lang="en-US" dirty="0"/>
           </a:p>
           <a:p>
             <a:pPr marL="0" indent="0">
@@ -5476,6 +4835,7 @@
               <a:rPr lang="en-US" dirty="0"/>
               <a:t>		case value2:  </a:t>
             </a:r>
+            <a:endParaRPr lang="en-US" dirty="0"/>
           </a:p>
           <a:p>
             <a:pPr marL="0" indent="0">
@@ -5485,6 +4845,7 @@
               <a:rPr lang="en-US" dirty="0"/>
               <a:t>			code to be executed;  </a:t>
             </a:r>
+            <a:endParaRPr lang="en-US" dirty="0"/>
           </a:p>
           <a:p>
             <a:pPr marL="0" indent="0">
@@ -5494,6 +4855,7 @@
               <a:rPr lang="en-US" dirty="0"/>
               <a:t>			break;  </a:t>
             </a:r>
+            <a:endParaRPr lang="en-US" dirty="0"/>
           </a:p>
           <a:p>
             <a:pPr marL="0" indent="0">
@@ -5503,6 +4865,7 @@
               <a:rPr lang="en-US" dirty="0"/>
               <a:t>		......  </a:t>
             </a:r>
+            <a:endParaRPr lang="en-US" dirty="0"/>
           </a:p>
           <a:p>
             <a:pPr marL="0" indent="0">
@@ -5512,6 +4875,7 @@
               <a:rPr lang="en-US" dirty="0"/>
               <a:t>		default:   </a:t>
             </a:r>
+            <a:endParaRPr lang="en-US" dirty="0"/>
           </a:p>
           <a:p>
             <a:pPr marL="0" indent="0">
@@ -5521,6 +4885,7 @@
               <a:rPr lang="en-US" dirty="0"/>
               <a:t>		code to be executed if above values are not matched;  </a:t>
             </a:r>
+            <a:endParaRPr lang="en-US" dirty="0"/>
           </a:p>
           <a:p>
             <a:pPr marL="0" indent="0">
@@ -5538,11 +4903,6 @@
         </p:txBody>
       </p:sp>
     </p:spTree>
-    <p:extLst>
-      <p:ext uri="{BB962C8B-B14F-4D97-AF65-F5344CB8AC3E}">
-        <p14:creationId xmlns:p14="http://schemas.microsoft.com/office/powerpoint/2010/main" val="1342827850"/>
-      </p:ext>
-    </p:extLst>
   </p:cSld>
   <p:clrMapOvr>
     <a:masterClrMapping/>
@@ -5569,13 +4929,7 @@
       </p:grpSpPr>
       <p:sp>
         <p:nvSpPr>
-          <p:cNvPr id="2" name="Title 1">
-            <a:extLst>
-              <a:ext uri="{FF2B5EF4-FFF2-40B4-BE49-F238E27FC236}">
-                <a16:creationId xmlns:a16="http://schemas.microsoft.com/office/drawing/2014/main" id="{73F0188D-4F48-4E56-9125-901AEE010DAA}"/>
-              </a:ext>
-            </a:extLst>
-          </p:cNvPr>
+          <p:cNvPr id="2" name="Title 1"/>
           <p:cNvSpPr>
             <a:spLocks noGrp="1"/>
           </p:cNvSpPr>
@@ -5598,20 +4952,14 @@
       </p:sp>
       <p:pic>
         <p:nvPicPr>
-          <p:cNvPr id="5" name="Picture 4">
-            <a:extLst>
-              <a:ext uri="{FF2B5EF4-FFF2-40B4-BE49-F238E27FC236}">
-                <a16:creationId xmlns:a16="http://schemas.microsoft.com/office/drawing/2014/main" id="{C5CF79FC-B1DF-4300-A2E5-F74643E59212}"/>
-              </a:ext>
-            </a:extLst>
-          </p:cNvPr>
+          <p:cNvPr id="5" name="Picture 4"/>
           <p:cNvPicPr>
             <a:picLocks noChangeAspect="1"/>
           </p:cNvPicPr>
           <p:nvPr/>
         </p:nvPicPr>
         <p:blipFill>
-          <a:blip r:embed="rId2"/>
+          <a:blip r:embed="rId1"/>
           <a:stretch>
             <a:fillRect/>
           </a:stretch>
@@ -5627,11 +4975,6 @@
         </p:spPr>
       </p:pic>
     </p:spTree>
-    <p:extLst>
-      <p:ext uri="{BB962C8B-B14F-4D97-AF65-F5344CB8AC3E}">
-        <p14:creationId xmlns:p14="http://schemas.microsoft.com/office/powerpoint/2010/main" val="3564292104"/>
-      </p:ext>
-    </p:extLst>
   </p:cSld>
   <p:clrMapOvr>
     <a:masterClrMapping/>
@@ -5658,13 +5001,7 @@
       </p:grpSpPr>
       <p:sp>
         <p:nvSpPr>
-          <p:cNvPr id="2" name="Title 1">
-            <a:extLst>
-              <a:ext uri="{FF2B5EF4-FFF2-40B4-BE49-F238E27FC236}">
-                <a16:creationId xmlns:a16="http://schemas.microsoft.com/office/drawing/2014/main" id="{AF14DCDE-0E35-4F36-A30D-98FF7F81F080}"/>
-              </a:ext>
-            </a:extLst>
-          </p:cNvPr>
+          <p:cNvPr id="2" name="Title 1"/>
           <p:cNvSpPr>
             <a:spLocks noGrp="1"/>
           </p:cNvSpPr>
@@ -5687,13 +5024,7 @@
       </p:sp>
       <p:sp>
         <p:nvSpPr>
-          <p:cNvPr id="3" name="Content Placeholder 2">
-            <a:extLst>
-              <a:ext uri="{FF2B5EF4-FFF2-40B4-BE49-F238E27FC236}">
-                <a16:creationId xmlns:a16="http://schemas.microsoft.com/office/drawing/2014/main" id="{732A4EFF-1769-49C9-9F5E-8FA3CFAFFAC5}"/>
-              </a:ext>
-            </a:extLst>
-          </p:cNvPr>
+          <p:cNvPr id="3" name="Content Placeholder 2"/>
           <p:cNvSpPr>
             <a:spLocks noGrp="1"/>
           </p:cNvSpPr>
@@ -5712,6 +5043,7 @@
               <a:rPr lang="en-US" dirty="0"/>
               <a:t>The JavaScript loops are used to iterate the piece of code using for, while, do while or for-in loops. It makes the code compact. It is mostly used in array.</a:t>
             </a:r>
+            <a:endParaRPr lang="en-US" dirty="0"/>
           </a:p>
           <a:p>
             <a:endParaRPr lang="en-US" dirty="0"/>
@@ -5721,6 +5053,7 @@
               <a:rPr lang="en-US" dirty="0"/>
               <a:t>There are four types of loops in JavaScript.</a:t>
             </a:r>
+            <a:endParaRPr lang="en-US" dirty="0"/>
           </a:p>
           <a:p>
             <a:endParaRPr lang="en-US" dirty="0"/>
@@ -5731,6 +5064,7 @@
               <a:rPr lang="en-US" dirty="0"/>
               <a:t>for loop</a:t>
             </a:r>
+            <a:endParaRPr lang="en-US" dirty="0"/>
           </a:p>
           <a:p>
             <a:pPr lvl="1"/>
@@ -5738,6 +5072,7 @@
               <a:rPr lang="en-US" dirty="0"/>
               <a:t>while loop</a:t>
             </a:r>
+            <a:endParaRPr lang="en-US" dirty="0"/>
           </a:p>
           <a:p>
             <a:pPr lvl="1"/>
@@ -5745,6 +5080,7 @@
               <a:rPr lang="en-US" dirty="0"/>
               <a:t>do-while loop</a:t>
             </a:r>
+            <a:endParaRPr lang="en-US" dirty="0"/>
           </a:p>
           <a:p>
             <a:pPr lvl="1"/>
@@ -5757,11 +5093,6 @@
         </p:txBody>
       </p:sp>
     </p:spTree>
-    <p:extLst>
-      <p:ext uri="{BB962C8B-B14F-4D97-AF65-F5344CB8AC3E}">
-        <p14:creationId xmlns:p14="http://schemas.microsoft.com/office/powerpoint/2010/main" val="3669456932"/>
-      </p:ext>
-    </p:extLst>
   </p:cSld>
   <p:clrMapOvr>
     <a:masterClrMapping/>
@@ -5788,13 +5119,7 @@
       </p:grpSpPr>
       <p:sp>
         <p:nvSpPr>
-          <p:cNvPr id="2" name="Title 1">
-            <a:extLst>
-              <a:ext uri="{FF2B5EF4-FFF2-40B4-BE49-F238E27FC236}">
-                <a16:creationId xmlns:a16="http://schemas.microsoft.com/office/drawing/2014/main" id="{70299BC5-6020-46E6-A5F8-61EA62602623}"/>
-              </a:ext>
-            </a:extLst>
-          </p:cNvPr>
+          <p:cNvPr id="2" name="Title 1"/>
           <p:cNvSpPr>
             <a:spLocks noGrp="1"/>
           </p:cNvSpPr>
@@ -5817,13 +5142,7 @@
       </p:sp>
       <p:sp>
         <p:nvSpPr>
-          <p:cNvPr id="3" name="Content Placeholder 2">
-            <a:extLst>
-              <a:ext uri="{FF2B5EF4-FFF2-40B4-BE49-F238E27FC236}">
-                <a16:creationId xmlns:a16="http://schemas.microsoft.com/office/drawing/2014/main" id="{939F1E65-8DD9-495F-AD40-C71D7C964A73}"/>
-              </a:ext>
-            </a:extLst>
-          </p:cNvPr>
+          <p:cNvPr id="3" name="Content Placeholder 2"/>
           <p:cNvSpPr>
             <a:spLocks noGrp="1"/>
           </p:cNvSpPr>
@@ -5840,12 +5159,14 @@
               <a:rPr lang="en-US" dirty="0"/>
               <a:t>The JavaScript for loop iterates the elements for the fixed number of times. </a:t>
             </a:r>
+            <a:endParaRPr lang="en-US" dirty="0"/>
           </a:p>
           <a:p>
             <a:r>
               <a:rPr lang="en-US" dirty="0"/>
               <a:t>It should be used if number of iteration is known. The syntax of for loop is given below.</a:t>
             </a:r>
+            <a:endParaRPr lang="en-US" dirty="0"/>
           </a:p>
           <a:p>
             <a:pPr marL="0" indent="0">
@@ -5855,6 +5176,7 @@
               <a:rPr lang="en-US" dirty="0"/>
               <a:t>	for (initialization; condition; increment)  </a:t>
             </a:r>
+            <a:endParaRPr lang="en-US" dirty="0"/>
           </a:p>
           <a:p>
             <a:pPr marL="0" indent="0">
@@ -5864,6 +5186,7 @@
               <a:rPr lang="en-US" dirty="0"/>
               <a:t>	{  </a:t>
             </a:r>
+            <a:endParaRPr lang="en-US" dirty="0"/>
           </a:p>
           <a:p>
             <a:pPr marL="0" indent="0">
@@ -5873,6 +5196,7 @@
               <a:rPr lang="en-US" dirty="0"/>
               <a:t>		code to be executed  </a:t>
             </a:r>
+            <a:endParaRPr lang="en-US" dirty="0"/>
           </a:p>
           <a:p>
             <a:pPr marL="0" indent="0">
@@ -5887,11 +5211,6 @@
         </p:txBody>
       </p:sp>
     </p:spTree>
-    <p:extLst>
-      <p:ext uri="{BB962C8B-B14F-4D97-AF65-F5344CB8AC3E}">
-        <p14:creationId xmlns:p14="http://schemas.microsoft.com/office/powerpoint/2010/main" val="1011765579"/>
-      </p:ext>
-    </p:extLst>
   </p:cSld>
   <p:clrMapOvr>
     <a:masterClrMapping/>
@@ -5918,13 +5237,7 @@
       </p:grpSpPr>
       <p:sp>
         <p:nvSpPr>
-          <p:cNvPr id="2" name="Title 1">
-            <a:extLst>
-              <a:ext uri="{FF2B5EF4-FFF2-40B4-BE49-F238E27FC236}">
-                <a16:creationId xmlns:a16="http://schemas.microsoft.com/office/drawing/2014/main" id="{027D50E5-5B6D-42A5-BE54-46B45216EEEC}"/>
-              </a:ext>
-            </a:extLst>
-          </p:cNvPr>
+          <p:cNvPr id="2" name="Title 1"/>
           <p:cNvSpPr>
             <a:spLocks noGrp="1"/>
           </p:cNvSpPr>
@@ -5947,20 +5260,14 @@
       </p:sp>
       <p:pic>
         <p:nvPicPr>
-          <p:cNvPr id="5" name="Picture 4">
-            <a:extLst>
-              <a:ext uri="{FF2B5EF4-FFF2-40B4-BE49-F238E27FC236}">
-                <a16:creationId xmlns:a16="http://schemas.microsoft.com/office/drawing/2014/main" id="{B52C037E-39BE-4E78-B791-759C2B42A842}"/>
-              </a:ext>
-            </a:extLst>
-          </p:cNvPr>
+          <p:cNvPr id="5" name="Picture 4"/>
           <p:cNvPicPr>
             <a:picLocks noChangeAspect="1"/>
           </p:cNvPicPr>
           <p:nvPr/>
         </p:nvPicPr>
         <p:blipFill>
-          <a:blip r:embed="rId2"/>
+          <a:blip r:embed="rId1"/>
           <a:stretch>
             <a:fillRect/>
           </a:stretch>
@@ -5976,11 +5283,6 @@
         </p:spPr>
       </p:pic>
     </p:spTree>
-    <p:extLst>
-      <p:ext uri="{BB962C8B-B14F-4D97-AF65-F5344CB8AC3E}">
-        <p14:creationId xmlns:p14="http://schemas.microsoft.com/office/powerpoint/2010/main" val="4118223709"/>
-      </p:ext>
-    </p:extLst>
   </p:cSld>
   <p:clrMapOvr>
     <a:masterClrMapping/>
@@ -6007,13 +5309,7 @@
       </p:grpSpPr>
       <p:sp>
         <p:nvSpPr>
-          <p:cNvPr id="2" name="Title 1">
-            <a:extLst>
-              <a:ext uri="{FF2B5EF4-FFF2-40B4-BE49-F238E27FC236}">
-                <a16:creationId xmlns:a16="http://schemas.microsoft.com/office/drawing/2014/main" id="{DAE44E1B-9FF1-48B9-AD8E-DF1A14F2C44A}"/>
-              </a:ext>
-            </a:extLst>
-          </p:cNvPr>
+          <p:cNvPr id="2" name="Title 1"/>
           <p:cNvSpPr>
             <a:spLocks noGrp="1"/>
           </p:cNvSpPr>
@@ -6036,13 +5332,7 @@
       </p:sp>
       <p:sp>
         <p:nvSpPr>
-          <p:cNvPr id="3" name="Content Placeholder 2">
-            <a:extLst>
-              <a:ext uri="{FF2B5EF4-FFF2-40B4-BE49-F238E27FC236}">
-                <a16:creationId xmlns:a16="http://schemas.microsoft.com/office/drawing/2014/main" id="{44AC65BE-B026-4969-9D87-6AFACE5BF77B}"/>
-              </a:ext>
-            </a:extLst>
-          </p:cNvPr>
+          <p:cNvPr id="3" name="Content Placeholder 2"/>
           <p:cNvSpPr>
             <a:spLocks noGrp="1"/>
           </p:cNvSpPr>
@@ -6059,12 +5349,14 @@
               <a:rPr lang="en-US" dirty="0"/>
               <a:t>The JavaScript while loop iterates the elements for the infinite number of times. </a:t>
             </a:r>
+            <a:endParaRPr lang="en-US" dirty="0"/>
           </a:p>
           <a:p>
             <a:r>
               <a:rPr lang="en-US" dirty="0"/>
               <a:t>It should be used if number of iteration is not known. The syntax of while loop is given below.</a:t>
             </a:r>
+            <a:endParaRPr lang="en-US" dirty="0"/>
           </a:p>
           <a:p>
             <a:endParaRPr lang="en-US" dirty="0"/>
@@ -6077,6 +5369,7 @@
               <a:rPr lang="en-US" dirty="0"/>
               <a:t>	while (condition)  </a:t>
             </a:r>
+            <a:endParaRPr lang="en-US" dirty="0"/>
           </a:p>
           <a:p>
             <a:pPr marL="0" indent="0">
@@ -6086,6 +5379,7 @@
               <a:rPr lang="en-US" dirty="0"/>
               <a:t>	{  </a:t>
             </a:r>
+            <a:endParaRPr lang="en-US" dirty="0"/>
           </a:p>
           <a:p>
             <a:pPr marL="0" indent="0">
@@ -6095,6 +5389,7 @@
               <a:rPr lang="en-US" dirty="0"/>
               <a:t>		code to be executed  </a:t>
             </a:r>
+            <a:endParaRPr lang="en-US" dirty="0"/>
           </a:p>
           <a:p>
             <a:pPr marL="0" indent="0">
@@ -6109,11 +5404,6 @@
         </p:txBody>
       </p:sp>
     </p:spTree>
-    <p:extLst>
-      <p:ext uri="{BB962C8B-B14F-4D97-AF65-F5344CB8AC3E}">
-        <p14:creationId xmlns:p14="http://schemas.microsoft.com/office/powerpoint/2010/main" val="328074869"/>
-      </p:ext>
-    </p:extLst>
   </p:cSld>
   <p:clrMapOvr>
     <a:masterClrMapping/>
@@ -6140,13 +5430,7 @@
       </p:grpSpPr>
       <p:sp>
         <p:nvSpPr>
-          <p:cNvPr id="2" name="Title 1">
-            <a:extLst>
-              <a:ext uri="{FF2B5EF4-FFF2-40B4-BE49-F238E27FC236}">
-                <a16:creationId xmlns:a16="http://schemas.microsoft.com/office/drawing/2014/main" id="{67B508C0-A5D8-4D03-9AB0-1E972DF6926E}"/>
-              </a:ext>
-            </a:extLst>
-          </p:cNvPr>
+          <p:cNvPr id="2" name="Title 1"/>
           <p:cNvSpPr>
             <a:spLocks noGrp="1"/>
           </p:cNvSpPr>
@@ -6169,13 +5453,7 @@
       </p:sp>
       <p:sp>
         <p:nvSpPr>
-          <p:cNvPr id="3" name="Content Placeholder 2">
-            <a:extLst>
-              <a:ext uri="{FF2B5EF4-FFF2-40B4-BE49-F238E27FC236}">
-                <a16:creationId xmlns:a16="http://schemas.microsoft.com/office/drawing/2014/main" id="{95D08C34-DD55-4773-B839-31EAB8C68F42}"/>
-              </a:ext>
-            </a:extLst>
-          </p:cNvPr>
+          <p:cNvPr id="3" name="Content Placeholder 2"/>
           <p:cNvSpPr>
             <a:spLocks noGrp="1"/>
           </p:cNvSpPr>
@@ -6195,6 +5473,7 @@
               <a:rPr lang="en-US" dirty="0"/>
               <a:t>Since then, it has been adopted by all other graphical web browsers. </a:t>
             </a:r>
+            <a:endParaRPr lang="en-US" dirty="0"/>
           </a:p>
           <a:p>
             <a:pPr algn="just"/>
@@ -6202,6 +5481,7 @@
               <a:rPr lang="en-US" dirty="0"/>
               <a:t>With JavaScript, users can build modern web applications to interact directly without reloading the page every time. </a:t>
             </a:r>
+            <a:endParaRPr lang="en-US" dirty="0"/>
           </a:p>
           <a:p>
             <a:pPr algn="just"/>
@@ -6217,6 +5497,7 @@
               <a:rPr lang="en-US" dirty="0"/>
               <a:t> to provide several forms of interactivity and simplicity.</a:t>
             </a:r>
+            <a:endParaRPr lang="en-US" dirty="0"/>
           </a:p>
           <a:p>
             <a:pPr algn="just"/>
@@ -6224,6 +5505,7 @@
               <a:rPr lang="en-US" dirty="0"/>
               <a:t>Although, JavaScript has no connectivity with Java programming language. The name was suggested and provided in the times when Java was gaining popularity in the market. </a:t>
             </a:r>
+            <a:endParaRPr lang="en-US" dirty="0"/>
           </a:p>
           <a:p>
             <a:pPr algn="just"/>
@@ -6231,6 +5513,7 @@
               <a:rPr lang="en-US" dirty="0"/>
               <a:t>In addition to web browsers, databases such as CouchDB and MongoDB uses JavaScript as their scripting and query language.</a:t>
             </a:r>
+            <a:endParaRPr lang="en-US" dirty="0"/>
           </a:p>
           <a:p>
             <a:pPr algn="just"/>
@@ -6239,11 +5522,6 @@
         </p:txBody>
       </p:sp>
     </p:spTree>
-    <p:extLst>
-      <p:ext uri="{BB962C8B-B14F-4D97-AF65-F5344CB8AC3E}">
-        <p14:creationId xmlns:p14="http://schemas.microsoft.com/office/powerpoint/2010/main" val="3363569086"/>
-      </p:ext>
-    </p:extLst>
   </p:cSld>
   <p:clrMapOvr>
     <a:masterClrMapping/>
@@ -6270,13 +5548,7 @@
       </p:grpSpPr>
       <p:sp>
         <p:nvSpPr>
-          <p:cNvPr id="2" name="Title 1">
-            <a:extLst>
-              <a:ext uri="{FF2B5EF4-FFF2-40B4-BE49-F238E27FC236}">
-                <a16:creationId xmlns:a16="http://schemas.microsoft.com/office/drawing/2014/main" id="{DEE5D532-449A-453F-B976-B8D801B9D021}"/>
-              </a:ext>
-            </a:extLst>
-          </p:cNvPr>
+          <p:cNvPr id="2" name="Title 1"/>
           <p:cNvSpPr>
             <a:spLocks noGrp="1"/>
           </p:cNvSpPr>
@@ -6299,20 +5571,14 @@
       </p:sp>
       <p:pic>
         <p:nvPicPr>
-          <p:cNvPr id="5" name="Picture 4">
-            <a:extLst>
-              <a:ext uri="{FF2B5EF4-FFF2-40B4-BE49-F238E27FC236}">
-                <a16:creationId xmlns:a16="http://schemas.microsoft.com/office/drawing/2014/main" id="{C7700111-4700-4AFD-9BB0-7973FBFAB6BD}"/>
-              </a:ext>
-            </a:extLst>
-          </p:cNvPr>
+          <p:cNvPr id="5" name="Picture 4"/>
           <p:cNvPicPr>
             <a:picLocks noChangeAspect="1"/>
           </p:cNvPicPr>
           <p:nvPr/>
         </p:nvPicPr>
         <p:blipFill>
-          <a:blip r:embed="rId2"/>
+          <a:blip r:embed="rId1"/>
           <a:stretch>
             <a:fillRect/>
           </a:stretch>
@@ -6328,11 +5594,6 @@
         </p:spPr>
       </p:pic>
     </p:spTree>
-    <p:extLst>
-      <p:ext uri="{BB962C8B-B14F-4D97-AF65-F5344CB8AC3E}">
-        <p14:creationId xmlns:p14="http://schemas.microsoft.com/office/powerpoint/2010/main" val="1590971070"/>
-      </p:ext>
-    </p:extLst>
   </p:cSld>
   <p:clrMapOvr>
     <a:masterClrMapping/>
@@ -6359,13 +5620,7 @@
       </p:grpSpPr>
       <p:sp>
         <p:nvSpPr>
-          <p:cNvPr id="2" name="Title 1">
-            <a:extLst>
-              <a:ext uri="{FF2B5EF4-FFF2-40B4-BE49-F238E27FC236}">
-                <a16:creationId xmlns:a16="http://schemas.microsoft.com/office/drawing/2014/main" id="{73C0E2DC-95FC-4A12-ACC0-673127787D0F}"/>
-              </a:ext>
-            </a:extLst>
-          </p:cNvPr>
+          <p:cNvPr id="2" name="Title 1"/>
           <p:cNvSpPr>
             <a:spLocks noGrp="1"/>
           </p:cNvSpPr>
@@ -6388,13 +5643,7 @@
       </p:sp>
       <p:sp>
         <p:nvSpPr>
-          <p:cNvPr id="3" name="Content Placeholder 2">
-            <a:extLst>
-              <a:ext uri="{FF2B5EF4-FFF2-40B4-BE49-F238E27FC236}">
-                <a16:creationId xmlns:a16="http://schemas.microsoft.com/office/drawing/2014/main" id="{9B682260-E016-42C4-BCEF-0B464B1CC01F}"/>
-              </a:ext>
-            </a:extLst>
-          </p:cNvPr>
+          <p:cNvPr id="3" name="Content Placeholder 2"/>
           <p:cNvSpPr>
             <a:spLocks noGrp="1"/>
           </p:cNvSpPr>
@@ -6413,6 +5662,7 @@
               <a:rPr lang="en-US" dirty="0"/>
               <a:t>JavaScript functions are used to perform operations. We can call JavaScript function many times to reuse the code.</a:t>
             </a:r>
+            <a:endParaRPr lang="en-US" dirty="0"/>
           </a:p>
           <a:p>
             <a:endParaRPr lang="en-US" dirty="0"/>
@@ -6422,6 +5672,7 @@
               <a:rPr lang="en-US" dirty="0"/>
               <a:t>There are mainly two advantages of JavaScript functions.</a:t>
             </a:r>
+            <a:endParaRPr lang="en-US" dirty="0"/>
           </a:p>
           <a:p>
             <a:endParaRPr lang="en-US" dirty="0"/>
@@ -6432,6 +5683,7 @@
               <a:rPr lang="en-US" dirty="0"/>
               <a:t>Code reusability: We can call a function several times so it save coding.</a:t>
             </a:r>
+            <a:endParaRPr lang="en-US" dirty="0"/>
           </a:p>
           <a:p>
             <a:pPr lvl="1"/>
@@ -6439,6 +5691,7 @@
               <a:rPr lang="en-US" dirty="0"/>
               <a:t>Less coding: It makes our program compact. We don’t need to write many lines of code each time to perform a common task.</a:t>
             </a:r>
+            <a:endParaRPr lang="en-US" dirty="0"/>
           </a:p>
           <a:p>
             <a:pPr marL="0" indent="0">
@@ -6454,6 +5707,7 @@
               <a:rPr lang="en-US" dirty="0"/>
               <a:t>The syntax of declaring function is given below.</a:t>
             </a:r>
+            <a:endParaRPr lang="en-US" dirty="0"/>
           </a:p>
           <a:p>
             <a:pPr marL="0" indent="0">
@@ -6479,6 +5733,7 @@
               <a:rPr lang="en-US" dirty="0"/>
               <a:t>]){  </a:t>
             </a:r>
+            <a:endParaRPr lang="en-US" dirty="0"/>
           </a:p>
           <a:p>
             <a:pPr marL="0" indent="0">
@@ -6488,6 +5743,7 @@
               <a:rPr lang="en-US" dirty="0"/>
               <a:t>		 //code to be executed  </a:t>
             </a:r>
+            <a:endParaRPr lang="en-US" dirty="0"/>
           </a:p>
           <a:p>
             <a:pPr marL="0" indent="0">
@@ -6502,11 +5758,6 @@
         </p:txBody>
       </p:sp>
     </p:spTree>
-    <p:extLst>
-      <p:ext uri="{BB962C8B-B14F-4D97-AF65-F5344CB8AC3E}">
-        <p14:creationId xmlns:p14="http://schemas.microsoft.com/office/powerpoint/2010/main" val="2653098175"/>
-      </p:ext>
-    </p:extLst>
   </p:cSld>
   <p:clrMapOvr>
     <a:masterClrMapping/>
@@ -6533,13 +5784,7 @@
       </p:grpSpPr>
       <p:sp>
         <p:nvSpPr>
-          <p:cNvPr id="2" name="Title 1">
-            <a:extLst>
-              <a:ext uri="{FF2B5EF4-FFF2-40B4-BE49-F238E27FC236}">
-                <a16:creationId xmlns:a16="http://schemas.microsoft.com/office/drawing/2014/main" id="{0D9F0523-A465-4C39-A2AF-3CA3DD8A8D47}"/>
-              </a:ext>
-            </a:extLst>
-          </p:cNvPr>
+          <p:cNvPr id="2" name="Title 1"/>
           <p:cNvSpPr>
             <a:spLocks noGrp="1"/>
           </p:cNvSpPr>
@@ -6556,25 +5801,20 @@
               <a:rPr lang="en-IN" dirty="0"/>
               <a:t>JavaScript Function Example</a:t>
             </a:r>
+            <a:endParaRPr lang="en-IN" dirty="0"/>
           </a:p>
         </p:txBody>
       </p:sp>
       <p:pic>
         <p:nvPicPr>
-          <p:cNvPr id="5" name="Picture 4">
-            <a:extLst>
-              <a:ext uri="{FF2B5EF4-FFF2-40B4-BE49-F238E27FC236}">
-                <a16:creationId xmlns:a16="http://schemas.microsoft.com/office/drawing/2014/main" id="{7FF20A6B-9612-452A-BD4F-DD1BEDB3AEC4}"/>
-              </a:ext>
-            </a:extLst>
-          </p:cNvPr>
+          <p:cNvPr id="5" name="Picture 4"/>
           <p:cNvPicPr>
             <a:picLocks noChangeAspect="1"/>
           </p:cNvPicPr>
           <p:nvPr/>
         </p:nvPicPr>
         <p:blipFill>
-          <a:blip r:embed="rId2"/>
+          <a:blip r:embed="rId1"/>
           <a:stretch>
             <a:fillRect/>
           </a:stretch>
@@ -6590,11 +5830,6 @@
         </p:spPr>
       </p:pic>
     </p:spTree>
-    <p:extLst>
-      <p:ext uri="{BB962C8B-B14F-4D97-AF65-F5344CB8AC3E}">
-        <p14:creationId xmlns:p14="http://schemas.microsoft.com/office/powerpoint/2010/main" val="3710724528"/>
-      </p:ext>
-    </p:extLst>
   </p:cSld>
   <p:clrMapOvr>
     <a:masterClrMapping/>
@@ -6621,13 +5856,7 @@
       </p:grpSpPr>
       <p:sp>
         <p:nvSpPr>
-          <p:cNvPr id="2" name="Title 1">
-            <a:extLst>
-              <a:ext uri="{FF2B5EF4-FFF2-40B4-BE49-F238E27FC236}">
-                <a16:creationId xmlns:a16="http://schemas.microsoft.com/office/drawing/2014/main" id="{DB80A7A6-39BC-4D77-A7A3-2785BC862C4E}"/>
-              </a:ext>
-            </a:extLst>
-          </p:cNvPr>
+          <p:cNvPr id="2" name="Title 1"/>
           <p:cNvSpPr>
             <a:spLocks noGrp="1"/>
           </p:cNvSpPr>
@@ -6644,25 +5873,20 @@
               <a:rPr lang="en-IN" dirty="0"/>
               <a:t>JavaScript Function Arguments</a:t>
             </a:r>
+            <a:endParaRPr lang="en-IN" dirty="0"/>
           </a:p>
         </p:txBody>
       </p:sp>
       <p:pic>
         <p:nvPicPr>
-          <p:cNvPr id="5" name="Picture 4">
-            <a:extLst>
-              <a:ext uri="{FF2B5EF4-FFF2-40B4-BE49-F238E27FC236}">
-                <a16:creationId xmlns:a16="http://schemas.microsoft.com/office/drawing/2014/main" id="{EDA133FE-AB3F-4106-AE07-33CAABAF924A}"/>
-              </a:ext>
-            </a:extLst>
-          </p:cNvPr>
+          <p:cNvPr id="5" name="Picture 4"/>
           <p:cNvPicPr>
             <a:picLocks noChangeAspect="1"/>
           </p:cNvPicPr>
           <p:nvPr/>
         </p:nvPicPr>
         <p:blipFill>
-          <a:blip r:embed="rId2"/>
+          <a:blip r:embed="rId1"/>
           <a:stretch>
             <a:fillRect/>
           </a:stretch>
@@ -6678,11 +5902,6 @@
         </p:spPr>
       </p:pic>
     </p:spTree>
-    <p:extLst>
-      <p:ext uri="{BB962C8B-B14F-4D97-AF65-F5344CB8AC3E}">
-        <p14:creationId xmlns:p14="http://schemas.microsoft.com/office/powerpoint/2010/main" val="1871081593"/>
-      </p:ext>
-    </p:extLst>
   </p:cSld>
   <p:clrMapOvr>
     <a:masterClrMapping/>
@@ -6709,13 +5928,7 @@
       </p:grpSpPr>
       <p:sp>
         <p:nvSpPr>
-          <p:cNvPr id="2" name="Title 1">
-            <a:extLst>
-              <a:ext uri="{FF2B5EF4-FFF2-40B4-BE49-F238E27FC236}">
-                <a16:creationId xmlns:a16="http://schemas.microsoft.com/office/drawing/2014/main" id="{3BBD8A75-30DC-4F2A-952E-89DD8E81C963}"/>
-              </a:ext>
-            </a:extLst>
-          </p:cNvPr>
+          <p:cNvPr id="2" name="Title 1"/>
           <p:cNvSpPr>
             <a:spLocks noGrp="1"/>
           </p:cNvSpPr>
@@ -6732,25 +5945,20 @@
               <a:rPr lang="en-IN" dirty="0"/>
               <a:t>Function with Return Value</a:t>
             </a:r>
+            <a:endParaRPr lang="en-IN" dirty="0"/>
           </a:p>
         </p:txBody>
       </p:sp>
       <p:pic>
         <p:nvPicPr>
-          <p:cNvPr id="5" name="Picture 4">
-            <a:extLst>
-              <a:ext uri="{FF2B5EF4-FFF2-40B4-BE49-F238E27FC236}">
-                <a16:creationId xmlns:a16="http://schemas.microsoft.com/office/drawing/2014/main" id="{508BF7CD-5C73-498A-8FE5-953152ED41DC}"/>
-              </a:ext>
-            </a:extLst>
-          </p:cNvPr>
+          <p:cNvPr id="5" name="Picture 4"/>
           <p:cNvPicPr>
             <a:picLocks noChangeAspect="1"/>
           </p:cNvPicPr>
           <p:nvPr/>
         </p:nvPicPr>
         <p:blipFill>
-          <a:blip r:embed="rId2"/>
+          <a:blip r:embed="rId1"/>
           <a:stretch>
             <a:fillRect/>
           </a:stretch>
@@ -6766,11 +5974,6 @@
         </p:spPr>
       </p:pic>
     </p:spTree>
-    <p:extLst>
-      <p:ext uri="{BB962C8B-B14F-4D97-AF65-F5344CB8AC3E}">
-        <p14:creationId xmlns:p14="http://schemas.microsoft.com/office/powerpoint/2010/main" val="598347466"/>
-      </p:ext>
-    </p:extLst>
   </p:cSld>
   <p:clrMapOvr>
     <a:masterClrMapping/>
@@ -6797,13 +6000,7 @@
       </p:grpSpPr>
       <p:sp>
         <p:nvSpPr>
-          <p:cNvPr id="2" name="Title 1">
-            <a:extLst>
-              <a:ext uri="{FF2B5EF4-FFF2-40B4-BE49-F238E27FC236}">
-                <a16:creationId xmlns:a16="http://schemas.microsoft.com/office/drawing/2014/main" id="{F3A590EB-88C4-4518-8EBA-BD330FCF3F02}"/>
-              </a:ext>
-            </a:extLst>
-          </p:cNvPr>
+          <p:cNvPr id="2" name="Title 1"/>
           <p:cNvSpPr>
             <a:spLocks noGrp="1"/>
           </p:cNvSpPr>
@@ -6826,13 +6023,7 @@
       </p:sp>
       <p:sp>
         <p:nvSpPr>
-          <p:cNvPr id="3" name="Content Placeholder 2">
-            <a:extLst>
-              <a:ext uri="{FF2B5EF4-FFF2-40B4-BE49-F238E27FC236}">
-                <a16:creationId xmlns:a16="http://schemas.microsoft.com/office/drawing/2014/main" id="{FC6E1B8F-F5FB-4839-9E61-3D856832A54E}"/>
-              </a:ext>
-            </a:extLst>
-          </p:cNvPr>
+          <p:cNvPr id="3" name="Content Placeholder 2"/>
           <p:cNvSpPr>
             <a:spLocks noGrp="1"/>
           </p:cNvSpPr>
@@ -6849,12 +6040,14 @@
               <a:rPr lang="en-US" dirty="0"/>
               <a:t>In JavaScript, the purpose of Function constructor is to create a new Function object. </a:t>
             </a:r>
+            <a:endParaRPr lang="en-US" dirty="0"/>
           </a:p>
           <a:p>
             <a:r>
               <a:rPr lang="en-US" dirty="0"/>
               <a:t>It executes the code globally. However, if we call the constructor directly, a function is created dynamically but in an unsecured way.</a:t>
             </a:r>
+            <a:endParaRPr lang="en-US" dirty="0"/>
           </a:p>
           <a:p>
             <a:endParaRPr lang="en-US" dirty="0"/>
@@ -6864,6 +6057,7 @@
               <a:rPr lang="en-US" dirty="0"/>
               <a:t>Syntax</a:t>
             </a:r>
+            <a:endParaRPr lang="en-US" dirty="0"/>
           </a:p>
           <a:p>
             <a:pPr marL="0" indent="0">
@@ -6894,11 +6088,6 @@
         </p:txBody>
       </p:sp>
     </p:spTree>
-    <p:extLst>
-      <p:ext uri="{BB962C8B-B14F-4D97-AF65-F5344CB8AC3E}">
-        <p14:creationId xmlns:p14="http://schemas.microsoft.com/office/powerpoint/2010/main" val="532358973"/>
-      </p:ext>
-    </p:extLst>
   </p:cSld>
   <p:clrMapOvr>
     <a:masterClrMapping/>
@@ -6925,13 +6114,7 @@
       </p:grpSpPr>
       <p:sp>
         <p:nvSpPr>
-          <p:cNvPr id="2" name="Title 1">
-            <a:extLst>
-              <a:ext uri="{FF2B5EF4-FFF2-40B4-BE49-F238E27FC236}">
-                <a16:creationId xmlns:a16="http://schemas.microsoft.com/office/drawing/2014/main" id="{2426D4B2-B9DE-45EC-8034-E9B2A1F1C7A4}"/>
-              </a:ext>
-            </a:extLst>
-          </p:cNvPr>
+          <p:cNvPr id="2" name="Title 1"/>
           <p:cNvSpPr>
             <a:spLocks noGrp="1"/>
           </p:cNvSpPr>
@@ -6954,13 +6137,7 @@
       </p:sp>
       <p:sp>
         <p:nvSpPr>
-          <p:cNvPr id="3" name="Content Placeholder 2">
-            <a:extLst>
-              <a:ext uri="{FF2B5EF4-FFF2-40B4-BE49-F238E27FC236}">
-                <a16:creationId xmlns:a16="http://schemas.microsoft.com/office/drawing/2014/main" id="{F807FA47-58E3-4032-9748-E303869CA3AA}"/>
-              </a:ext>
-            </a:extLst>
-          </p:cNvPr>
+          <p:cNvPr id="3" name="Content Placeholder 2"/>
           <p:cNvSpPr>
             <a:spLocks noGrp="1"/>
           </p:cNvSpPr>
@@ -6985,6 +6162,7 @@
               <a:rPr lang="en-US" dirty="0"/>
               <a:t> - It represents the argument used by function.</a:t>
             </a:r>
+            <a:endParaRPr lang="en-US" dirty="0"/>
           </a:p>
           <a:p>
             <a:endParaRPr lang="en-US" dirty="0"/>
@@ -7003,11 +6181,6 @@
         </p:txBody>
       </p:sp>
     </p:spTree>
-    <p:extLst>
-      <p:ext uri="{BB962C8B-B14F-4D97-AF65-F5344CB8AC3E}">
-        <p14:creationId xmlns:p14="http://schemas.microsoft.com/office/powerpoint/2010/main" val="2324003393"/>
-      </p:ext>
-    </p:extLst>
   </p:cSld>
   <p:clrMapOvr>
     <a:masterClrMapping/>
@@ -7034,13 +6207,7 @@
       </p:grpSpPr>
       <p:sp>
         <p:nvSpPr>
-          <p:cNvPr id="2" name="Title 1">
-            <a:extLst>
-              <a:ext uri="{FF2B5EF4-FFF2-40B4-BE49-F238E27FC236}">
-                <a16:creationId xmlns:a16="http://schemas.microsoft.com/office/drawing/2014/main" id="{D0122B5C-C183-4B6F-BABC-3F8623F9022F}"/>
-              </a:ext>
-            </a:extLst>
-          </p:cNvPr>
+          <p:cNvPr id="2" name="Title 1"/>
           <p:cNvSpPr>
             <a:spLocks noGrp="1"/>
           </p:cNvSpPr>
@@ -7057,25 +6224,20 @@
               <a:rPr lang="en-IN" dirty="0"/>
               <a:t>JavaScript Function Methods</a:t>
             </a:r>
+            <a:endParaRPr lang="en-IN" dirty="0"/>
           </a:p>
         </p:txBody>
       </p:sp>
       <p:pic>
         <p:nvPicPr>
-          <p:cNvPr id="5" name="Picture 4">
-            <a:extLst>
-              <a:ext uri="{FF2B5EF4-FFF2-40B4-BE49-F238E27FC236}">
-                <a16:creationId xmlns:a16="http://schemas.microsoft.com/office/drawing/2014/main" id="{F5E05164-E0F7-412A-A9C4-04B0D0060CEA}"/>
-              </a:ext>
-            </a:extLst>
-          </p:cNvPr>
+          <p:cNvPr id="5" name="Picture 4"/>
           <p:cNvPicPr>
             <a:picLocks noChangeAspect="1"/>
           </p:cNvPicPr>
           <p:nvPr/>
         </p:nvPicPr>
         <p:blipFill>
-          <a:blip r:embed="rId2"/>
+          <a:blip r:embed="rId1"/>
           <a:stretch>
             <a:fillRect/>
           </a:stretch>
@@ -7091,11 +6253,6 @@
         </p:spPr>
       </p:pic>
     </p:spTree>
-    <p:extLst>
-      <p:ext uri="{BB962C8B-B14F-4D97-AF65-F5344CB8AC3E}">
-        <p14:creationId xmlns:p14="http://schemas.microsoft.com/office/powerpoint/2010/main" val="1972399562"/>
-      </p:ext>
-    </p:extLst>
   </p:cSld>
   <p:clrMapOvr>
     <a:masterClrMapping/>
@@ -7122,13 +6279,7 @@
       </p:grpSpPr>
       <p:sp>
         <p:nvSpPr>
-          <p:cNvPr id="2" name="Title 1">
-            <a:extLst>
-              <a:ext uri="{FF2B5EF4-FFF2-40B4-BE49-F238E27FC236}">
-                <a16:creationId xmlns:a16="http://schemas.microsoft.com/office/drawing/2014/main" id="{0E190A3B-F81B-4C25-9D5A-61CFE02DB96E}"/>
-              </a:ext>
-            </a:extLst>
-          </p:cNvPr>
+          <p:cNvPr id="2" name="Title 1"/>
           <p:cNvSpPr>
             <a:spLocks noGrp="1"/>
           </p:cNvSpPr>
@@ -7145,25 +6296,20 @@
               <a:rPr lang="en-IN" dirty="0"/>
               <a:t>JavaScript Function Object Examples</a:t>
             </a:r>
+            <a:endParaRPr lang="en-IN" dirty="0"/>
           </a:p>
         </p:txBody>
       </p:sp>
       <p:pic>
         <p:nvPicPr>
-          <p:cNvPr id="5" name="Picture 4">
-            <a:extLst>
-              <a:ext uri="{FF2B5EF4-FFF2-40B4-BE49-F238E27FC236}">
-                <a16:creationId xmlns:a16="http://schemas.microsoft.com/office/drawing/2014/main" id="{1B07D7FB-8912-40BC-830F-4E54FB5B3DB1}"/>
-              </a:ext>
-            </a:extLst>
-          </p:cNvPr>
+          <p:cNvPr id="5" name="Picture 4"/>
           <p:cNvPicPr>
             <a:picLocks noChangeAspect="1"/>
           </p:cNvPicPr>
           <p:nvPr/>
         </p:nvPicPr>
         <p:blipFill>
-          <a:blip r:embed="rId2"/>
+          <a:blip r:embed="rId1"/>
           <a:stretch>
             <a:fillRect/>
           </a:stretch>
@@ -7180,20 +6326,14 @@
       </p:pic>
       <p:pic>
         <p:nvPicPr>
-          <p:cNvPr id="7" name="Picture 6">
-            <a:extLst>
-              <a:ext uri="{FF2B5EF4-FFF2-40B4-BE49-F238E27FC236}">
-                <a16:creationId xmlns:a16="http://schemas.microsoft.com/office/drawing/2014/main" id="{F0917D05-D2EE-47BB-ACA1-F6A1DC681CF2}"/>
-              </a:ext>
-            </a:extLst>
-          </p:cNvPr>
+          <p:cNvPr id="7" name="Picture 6"/>
           <p:cNvPicPr>
             <a:picLocks noChangeAspect="1"/>
           </p:cNvPicPr>
           <p:nvPr/>
         </p:nvPicPr>
         <p:blipFill>
-          <a:blip r:embed="rId3"/>
+          <a:blip r:embed="rId2"/>
           <a:stretch>
             <a:fillRect/>
           </a:stretch>
@@ -7209,11 +6349,6 @@
         </p:spPr>
       </p:pic>
     </p:spTree>
-    <p:extLst>
-      <p:ext uri="{BB962C8B-B14F-4D97-AF65-F5344CB8AC3E}">
-        <p14:creationId xmlns:p14="http://schemas.microsoft.com/office/powerpoint/2010/main" val="1838962327"/>
-      </p:ext>
-    </p:extLst>
   </p:cSld>
   <p:clrMapOvr>
     <a:masterClrMapping/>
@@ -7240,13 +6375,7 @@
       </p:grpSpPr>
       <p:sp>
         <p:nvSpPr>
-          <p:cNvPr id="2" name="Title 1">
-            <a:extLst>
-              <a:ext uri="{FF2B5EF4-FFF2-40B4-BE49-F238E27FC236}">
-                <a16:creationId xmlns:a16="http://schemas.microsoft.com/office/drawing/2014/main" id="{5B2E4CE1-925F-4019-AE76-990B9703201C}"/>
-              </a:ext>
-            </a:extLst>
-          </p:cNvPr>
+          <p:cNvPr id="2" name="Title 1"/>
           <p:cNvSpPr>
             <a:spLocks noGrp="1"/>
           </p:cNvSpPr>
@@ -7269,13 +6398,7 @@
       </p:sp>
       <p:sp>
         <p:nvSpPr>
-          <p:cNvPr id="3" name="Content Placeholder 2">
-            <a:extLst>
-              <a:ext uri="{FF2B5EF4-FFF2-40B4-BE49-F238E27FC236}">
-                <a16:creationId xmlns:a16="http://schemas.microsoft.com/office/drawing/2014/main" id="{EC7A9475-E656-4D38-91A1-0D5962979610}"/>
-              </a:ext>
-            </a:extLst>
-          </p:cNvPr>
+          <p:cNvPr id="3" name="Content Placeholder 2"/>
           <p:cNvSpPr>
             <a:spLocks noGrp="1"/>
           </p:cNvSpPr>
@@ -7294,6 +6417,7 @@
               <a:rPr lang="en-US" dirty="0"/>
               <a:t>A JavaScript object is an entity having state and behavior (properties and method). For example: car, pen, bike, chair, glass, keyboard, monitor etc.</a:t>
             </a:r>
+            <a:endParaRPr lang="en-US" dirty="0"/>
           </a:p>
           <a:p>
             <a:endParaRPr lang="en-US" dirty="0"/>
@@ -7303,6 +6427,7 @@
               <a:rPr lang="en-US" dirty="0"/>
               <a:t>JavaScript is an object-based language. Everything is an object in JavaScript.</a:t>
             </a:r>
+            <a:endParaRPr lang="en-US" dirty="0"/>
           </a:p>
           <a:p>
             <a:endParaRPr lang="en-US" dirty="0"/>
@@ -7312,6 +6437,7 @@
               <a:rPr lang="en-US" dirty="0"/>
               <a:t>JavaScript is template based not class based. Here, we don't create class to get the object. But, we direct create objects.</a:t>
             </a:r>
+            <a:endParaRPr lang="en-US" dirty="0"/>
           </a:p>
           <a:p>
             <a:endParaRPr lang="en-US" dirty="0"/>
@@ -7322,11 +6448,6 @@
         </p:txBody>
       </p:sp>
     </p:spTree>
-    <p:extLst>
-      <p:ext uri="{BB962C8B-B14F-4D97-AF65-F5344CB8AC3E}">
-        <p14:creationId xmlns:p14="http://schemas.microsoft.com/office/powerpoint/2010/main" val="4092756482"/>
-      </p:ext>
-    </p:extLst>
   </p:cSld>
   <p:clrMapOvr>
     <a:masterClrMapping/>
@@ -7353,13 +6474,7 @@
       </p:grpSpPr>
       <p:sp>
         <p:nvSpPr>
-          <p:cNvPr id="2" name="Title 1">
-            <a:extLst>
-              <a:ext uri="{FF2B5EF4-FFF2-40B4-BE49-F238E27FC236}">
-                <a16:creationId xmlns:a16="http://schemas.microsoft.com/office/drawing/2014/main" id="{C6559EC1-5609-4B1E-954A-CE7311354733}"/>
-              </a:ext>
-            </a:extLst>
-          </p:cNvPr>
+          <p:cNvPr id="2" name="Title 1"/>
           <p:cNvSpPr>
             <a:spLocks noGrp="1"/>
           </p:cNvSpPr>
@@ -7385,13 +6500,7 @@
       </p:sp>
       <p:sp>
         <p:nvSpPr>
-          <p:cNvPr id="3" name="Content Placeholder 2">
-            <a:extLst>
-              <a:ext uri="{FF2B5EF4-FFF2-40B4-BE49-F238E27FC236}">
-                <a16:creationId xmlns:a16="http://schemas.microsoft.com/office/drawing/2014/main" id="{C91943AF-73CD-4C85-AC70-0FC7A31F62AE}"/>
-              </a:ext>
-            </a:extLst>
-          </p:cNvPr>
+          <p:cNvPr id="3" name="Content Placeholder 2"/>
           <p:cNvSpPr>
             <a:spLocks noGrp="1"/>
           </p:cNvSpPr>
@@ -7411,6 +6520,7 @@
               <a:rPr lang="en-US" dirty="0"/>
               <a:t>All popular web browsers support JavaScript as they provide built-in execution environments.</a:t>
             </a:r>
+            <a:endParaRPr lang="en-US" dirty="0"/>
           </a:p>
           <a:p>
             <a:pPr algn="just"/>
@@ -7418,6 +6528,7 @@
               <a:rPr lang="en-US" dirty="0"/>
               <a:t>JavaScript follows the syntax and structure of the C programming language. Thus, it is a structured programming language.</a:t>
             </a:r>
+            <a:endParaRPr lang="en-US" dirty="0"/>
           </a:p>
           <a:p>
             <a:pPr algn="just"/>
@@ -7425,6 +6536,7 @@
               <a:rPr lang="en-US" dirty="0"/>
               <a:t>JavaScript is a weakly typed language, where certain types are implicitly cast (depending on the operation).</a:t>
             </a:r>
+            <a:endParaRPr lang="en-US" dirty="0"/>
           </a:p>
           <a:p>
             <a:pPr algn="just"/>
@@ -7432,6 +6544,7 @@
               <a:rPr lang="en-US" dirty="0"/>
               <a:t>JavaScript is an object-oriented programming language that uses prototypes rather than using classes for inheritance.</a:t>
             </a:r>
+            <a:endParaRPr lang="en-US" dirty="0"/>
           </a:p>
           <a:p>
             <a:pPr algn="just"/>
@@ -7440,11 +6553,6 @@
         </p:txBody>
       </p:sp>
     </p:spTree>
-    <p:extLst>
-      <p:ext uri="{BB962C8B-B14F-4D97-AF65-F5344CB8AC3E}">
-        <p14:creationId xmlns:p14="http://schemas.microsoft.com/office/powerpoint/2010/main" val="3243407962"/>
-      </p:ext>
-    </p:extLst>
   </p:cSld>
   <p:clrMapOvr>
     <a:masterClrMapping/>
@@ -7471,13 +6579,7 @@
       </p:grpSpPr>
       <p:sp>
         <p:nvSpPr>
-          <p:cNvPr id="2" name="Title 1">
-            <a:extLst>
-              <a:ext uri="{FF2B5EF4-FFF2-40B4-BE49-F238E27FC236}">
-                <a16:creationId xmlns:a16="http://schemas.microsoft.com/office/drawing/2014/main" id="{FBD26AEF-685E-48C0-B27B-37004CFA6C79}"/>
-              </a:ext>
-            </a:extLst>
-          </p:cNvPr>
+          <p:cNvPr id="2" name="Title 1"/>
           <p:cNvSpPr>
             <a:spLocks noGrp="1"/>
           </p:cNvSpPr>
@@ -7500,13 +6602,7 @@
       </p:sp>
       <p:sp>
         <p:nvSpPr>
-          <p:cNvPr id="3" name="Content Placeholder 2">
-            <a:extLst>
-              <a:ext uri="{FF2B5EF4-FFF2-40B4-BE49-F238E27FC236}">
-                <a16:creationId xmlns:a16="http://schemas.microsoft.com/office/drawing/2014/main" id="{0635E580-885C-49A6-A88C-4C53D1F6C13F}"/>
-              </a:ext>
-            </a:extLst>
-          </p:cNvPr>
+          <p:cNvPr id="3" name="Content Placeholder 2"/>
           <p:cNvSpPr>
             <a:spLocks noGrp="1"/>
           </p:cNvSpPr>
@@ -7523,6 +6619,7 @@
               <a:rPr lang="en-US" dirty="0"/>
               <a:t>There are 3 ways to create objects.</a:t>
             </a:r>
+            <a:endParaRPr lang="en-US" dirty="0"/>
           </a:p>
           <a:p>
             <a:endParaRPr lang="en-US" dirty="0"/>
@@ -7533,6 +6630,7 @@
               <a:rPr lang="en-US" dirty="0"/>
               <a:t>By object literal</a:t>
             </a:r>
+            <a:endParaRPr lang="en-US" dirty="0"/>
           </a:p>
           <a:p>
             <a:pPr lvl="1"/>
@@ -7540,6 +6638,7 @@
               <a:rPr lang="en-US" dirty="0"/>
               <a:t>By creating instance of Object directly (using new keyword)</a:t>
             </a:r>
+            <a:endParaRPr lang="en-US" dirty="0"/>
           </a:p>
           <a:p>
             <a:pPr lvl="1"/>
@@ -7547,6 +6646,7 @@
               <a:rPr lang="en-US" dirty="0"/>
               <a:t>By using an object constructor (using new keyword)</a:t>
             </a:r>
+            <a:endParaRPr lang="en-US" dirty="0"/>
           </a:p>
           <a:p>
             <a:endParaRPr lang="en-IN" dirty="0"/>
@@ -7554,11 +6654,6 @@
         </p:txBody>
       </p:sp>
     </p:spTree>
-    <p:extLst>
-      <p:ext uri="{BB962C8B-B14F-4D97-AF65-F5344CB8AC3E}">
-        <p14:creationId xmlns:p14="http://schemas.microsoft.com/office/powerpoint/2010/main" val="3428817607"/>
-      </p:ext>
-    </p:extLst>
   </p:cSld>
   <p:clrMapOvr>
     <a:masterClrMapping/>
@@ -7585,13 +6680,7 @@
       </p:grpSpPr>
       <p:sp>
         <p:nvSpPr>
-          <p:cNvPr id="2" name="Title 1">
-            <a:extLst>
-              <a:ext uri="{FF2B5EF4-FFF2-40B4-BE49-F238E27FC236}">
-                <a16:creationId xmlns:a16="http://schemas.microsoft.com/office/drawing/2014/main" id="{1A4BFD81-CD28-4682-BD80-B2A24D64A86B}"/>
-              </a:ext>
-            </a:extLst>
-          </p:cNvPr>
+          <p:cNvPr id="2" name="Title 1"/>
           <p:cNvSpPr>
             <a:spLocks noGrp="1"/>
           </p:cNvSpPr>
@@ -7614,13 +6703,7 @@
       </p:sp>
       <p:sp>
         <p:nvSpPr>
-          <p:cNvPr id="3" name="Content Placeholder 2">
-            <a:extLst>
-              <a:ext uri="{FF2B5EF4-FFF2-40B4-BE49-F238E27FC236}">
-                <a16:creationId xmlns:a16="http://schemas.microsoft.com/office/drawing/2014/main" id="{6E3934B0-0258-4317-A553-EA8949921CA6}"/>
-              </a:ext>
-            </a:extLst>
-          </p:cNvPr>
+          <p:cNvPr id="3" name="Content Placeholder 2"/>
           <p:cNvSpPr>
             <a:spLocks noGrp="1"/>
           </p:cNvSpPr>
@@ -7640,6 +6723,7 @@
               <a:rPr lang="en-US" dirty="0"/>
               <a:t>The syntax of creating object using object literal is given below:</a:t>
             </a:r>
+            <a:endParaRPr lang="en-US" dirty="0"/>
           </a:p>
           <a:p>
             <a:endParaRPr lang="en-US" dirty="0"/>
@@ -7660,12 +6744,14 @@
               <a:rPr lang="en-US" dirty="0"/>
               <a:t>}  </a:t>
             </a:r>
+            <a:endParaRPr lang="en-US" dirty="0"/>
           </a:p>
           <a:p>
             <a:r>
               <a:rPr lang="en-US" dirty="0"/>
               <a:t>As you can see, property and value is separated by : (colon).</a:t>
             </a:r>
+            <a:endParaRPr lang="en-US" dirty="0"/>
           </a:p>
           <a:p>
             <a:r>
@@ -7678,20 +6764,14 @@
       </p:sp>
       <p:pic>
         <p:nvPicPr>
-          <p:cNvPr id="5" name="Picture 4">
-            <a:extLst>
-              <a:ext uri="{FF2B5EF4-FFF2-40B4-BE49-F238E27FC236}">
-                <a16:creationId xmlns:a16="http://schemas.microsoft.com/office/drawing/2014/main" id="{E6AD298F-770C-4A3F-9B12-B0BD53FFD1BC}"/>
-              </a:ext>
-            </a:extLst>
-          </p:cNvPr>
+          <p:cNvPr id="5" name="Picture 4"/>
           <p:cNvPicPr>
             <a:picLocks noChangeAspect="1"/>
           </p:cNvPicPr>
           <p:nvPr/>
         </p:nvPicPr>
         <p:blipFill>
-          <a:blip r:embed="rId2"/>
+          <a:blip r:embed="rId1"/>
           <a:stretch>
             <a:fillRect/>
           </a:stretch>
@@ -7707,11 +6787,6 @@
         </p:spPr>
       </p:pic>
     </p:spTree>
-    <p:extLst>
-      <p:ext uri="{BB962C8B-B14F-4D97-AF65-F5344CB8AC3E}">
-        <p14:creationId xmlns:p14="http://schemas.microsoft.com/office/powerpoint/2010/main" val="1688393935"/>
-      </p:ext>
-    </p:extLst>
   </p:cSld>
   <p:clrMapOvr>
     <a:masterClrMapping/>
@@ -7738,13 +6813,7 @@
       </p:grpSpPr>
       <p:sp>
         <p:nvSpPr>
-          <p:cNvPr id="2" name="Title 1">
-            <a:extLst>
-              <a:ext uri="{FF2B5EF4-FFF2-40B4-BE49-F238E27FC236}">
-                <a16:creationId xmlns:a16="http://schemas.microsoft.com/office/drawing/2014/main" id="{87A341B4-8C75-489F-A180-C92681467CBA}"/>
-              </a:ext>
-            </a:extLst>
-          </p:cNvPr>
+          <p:cNvPr id="2" name="Title 1"/>
           <p:cNvSpPr>
             <a:spLocks noGrp="1"/>
           </p:cNvSpPr>
@@ -7767,13 +6836,7 @@
       </p:sp>
       <p:sp>
         <p:nvSpPr>
-          <p:cNvPr id="3" name="Content Placeholder 2">
-            <a:extLst>
-              <a:ext uri="{FF2B5EF4-FFF2-40B4-BE49-F238E27FC236}">
-                <a16:creationId xmlns:a16="http://schemas.microsoft.com/office/drawing/2014/main" id="{9681E0DE-4476-4CDC-AF06-DB520A98EB40}"/>
-              </a:ext>
-            </a:extLst>
-          </p:cNvPr>
+          <p:cNvPr id="3" name="Content Placeholder 2"/>
           <p:cNvSpPr>
             <a:spLocks noGrp="1"/>
           </p:cNvSpPr>
@@ -7793,6 +6856,7 @@
               <a:rPr lang="en-US" dirty="0"/>
               <a:t>The syntax of creating object directly is given below:</a:t>
             </a:r>
+            <a:endParaRPr lang="en-US" dirty="0"/>
           </a:p>
           <a:p>
             <a:r>
@@ -7807,6 +6871,7 @@
               <a:rPr lang="en-US" dirty="0"/>
               <a:t>=new Object();  </a:t>
             </a:r>
+            <a:endParaRPr lang="en-US" dirty="0"/>
           </a:p>
           <a:p>
             <a:pPr lvl="1"/>
@@ -7814,6 +6879,7 @@
               <a:rPr lang="en-US" dirty="0"/>
               <a:t>Here, new keyword is used to create object.</a:t>
             </a:r>
+            <a:endParaRPr lang="en-US" dirty="0"/>
           </a:p>
           <a:p>
             <a:r>
@@ -7826,20 +6892,14 @@
       </p:sp>
       <p:pic>
         <p:nvPicPr>
-          <p:cNvPr id="5" name="Picture 4">
-            <a:extLst>
-              <a:ext uri="{FF2B5EF4-FFF2-40B4-BE49-F238E27FC236}">
-                <a16:creationId xmlns:a16="http://schemas.microsoft.com/office/drawing/2014/main" id="{E27854AE-33A4-4197-AD72-52B3CC82A65E}"/>
-              </a:ext>
-            </a:extLst>
-          </p:cNvPr>
+          <p:cNvPr id="5" name="Picture 4"/>
           <p:cNvPicPr>
             <a:picLocks noChangeAspect="1"/>
           </p:cNvPicPr>
           <p:nvPr/>
         </p:nvPicPr>
         <p:blipFill>
-          <a:blip r:embed="rId2"/>
+          <a:blip r:embed="rId1"/>
           <a:stretch>
             <a:fillRect/>
           </a:stretch>
@@ -7855,11 +6915,6 @@
         </p:spPr>
       </p:pic>
     </p:spTree>
-    <p:extLst>
-      <p:ext uri="{BB962C8B-B14F-4D97-AF65-F5344CB8AC3E}">
-        <p14:creationId xmlns:p14="http://schemas.microsoft.com/office/powerpoint/2010/main" val="3467868845"/>
-      </p:ext>
-    </p:extLst>
   </p:cSld>
   <p:clrMapOvr>
     <a:masterClrMapping/>
@@ -7886,13 +6941,7 @@
       </p:grpSpPr>
       <p:sp>
         <p:nvSpPr>
-          <p:cNvPr id="2" name="Title 1">
-            <a:extLst>
-              <a:ext uri="{FF2B5EF4-FFF2-40B4-BE49-F238E27FC236}">
-                <a16:creationId xmlns:a16="http://schemas.microsoft.com/office/drawing/2014/main" id="{943F12EC-D360-495F-B75E-C56941FF3854}"/>
-              </a:ext>
-            </a:extLst>
-          </p:cNvPr>
+          <p:cNvPr id="2" name="Title 1"/>
           <p:cNvSpPr>
             <a:spLocks noGrp="1"/>
           </p:cNvSpPr>
@@ -7915,13 +6964,7 @@
       </p:sp>
       <p:sp>
         <p:nvSpPr>
-          <p:cNvPr id="3" name="Content Placeholder 2">
-            <a:extLst>
-              <a:ext uri="{FF2B5EF4-FFF2-40B4-BE49-F238E27FC236}">
-                <a16:creationId xmlns:a16="http://schemas.microsoft.com/office/drawing/2014/main" id="{6779FEF5-4015-41CF-849B-930834506CAE}"/>
-              </a:ext>
-            </a:extLst>
-          </p:cNvPr>
+          <p:cNvPr id="3" name="Content Placeholder 2"/>
           <p:cNvSpPr>
             <a:spLocks noGrp="1"/>
           </p:cNvSpPr>
@@ -7938,12 +6981,14 @@
               <a:rPr lang="en-US" dirty="0"/>
               <a:t>Here, you need to create function with arguments. Each argument value can be assigned in the current object by using this keyword.</a:t>
             </a:r>
+            <a:endParaRPr lang="en-US" dirty="0"/>
           </a:p>
           <a:p>
             <a:r>
               <a:rPr lang="en-US" dirty="0"/>
               <a:t>The this keyword refers to the current object.</a:t>
             </a:r>
+            <a:endParaRPr lang="en-US" dirty="0"/>
           </a:p>
           <a:p>
             <a:r>
@@ -7956,20 +7001,14 @@
       </p:sp>
       <p:pic>
         <p:nvPicPr>
-          <p:cNvPr id="5" name="Picture 4">
-            <a:extLst>
-              <a:ext uri="{FF2B5EF4-FFF2-40B4-BE49-F238E27FC236}">
-                <a16:creationId xmlns:a16="http://schemas.microsoft.com/office/drawing/2014/main" id="{F9A91F08-41E7-41ED-A9F9-7252EAA9776D}"/>
-              </a:ext>
-            </a:extLst>
-          </p:cNvPr>
+          <p:cNvPr id="5" name="Picture 4"/>
           <p:cNvPicPr>
             <a:picLocks noChangeAspect="1"/>
           </p:cNvPicPr>
           <p:nvPr/>
         </p:nvPicPr>
         <p:blipFill>
-          <a:blip r:embed="rId2"/>
+          <a:blip r:embed="rId1"/>
           <a:stretch>
             <a:fillRect/>
           </a:stretch>
@@ -7985,11 +7024,6 @@
         </p:spPr>
       </p:pic>
     </p:spTree>
-    <p:extLst>
-      <p:ext uri="{BB962C8B-B14F-4D97-AF65-F5344CB8AC3E}">
-        <p14:creationId xmlns:p14="http://schemas.microsoft.com/office/powerpoint/2010/main" val="3308188889"/>
-      </p:ext>
-    </p:extLst>
   </p:cSld>
   <p:clrMapOvr>
     <a:masterClrMapping/>
@@ -8016,13 +7050,7 @@
       </p:grpSpPr>
       <p:sp>
         <p:nvSpPr>
-          <p:cNvPr id="2" name="Title 1">
-            <a:extLst>
-              <a:ext uri="{FF2B5EF4-FFF2-40B4-BE49-F238E27FC236}">
-                <a16:creationId xmlns:a16="http://schemas.microsoft.com/office/drawing/2014/main" id="{D18A42B9-E15C-42B1-BE47-7BF061925187}"/>
-              </a:ext>
-            </a:extLst>
-          </p:cNvPr>
+          <p:cNvPr id="2" name="Title 1"/>
           <p:cNvSpPr>
             <a:spLocks noGrp="1"/>
           </p:cNvSpPr>
@@ -8045,13 +7073,7 @@
       </p:sp>
       <p:sp>
         <p:nvSpPr>
-          <p:cNvPr id="3" name="Content Placeholder 2">
-            <a:extLst>
-              <a:ext uri="{FF2B5EF4-FFF2-40B4-BE49-F238E27FC236}">
-                <a16:creationId xmlns:a16="http://schemas.microsoft.com/office/drawing/2014/main" id="{1CBBE62F-762B-402E-8630-7D4F59835535}"/>
-              </a:ext>
-            </a:extLst>
-          </p:cNvPr>
+          <p:cNvPr id="3" name="Content Placeholder 2"/>
           <p:cNvSpPr>
             <a:spLocks noGrp="1"/>
           </p:cNvSpPr>
@@ -8070,6 +7092,7 @@
               <a:rPr lang="en-US" dirty="0"/>
               <a:t>JavaScript array is an object that represents a collection of similar type of elements.</a:t>
             </a:r>
+            <a:endParaRPr lang="en-US" dirty="0"/>
           </a:p>
           <a:p>
             <a:endParaRPr lang="en-US" dirty="0"/>
@@ -8079,6 +7102,7 @@
               <a:rPr lang="en-US" dirty="0"/>
               <a:t>There are 3 ways to construct array in JavaScript</a:t>
             </a:r>
+            <a:endParaRPr lang="en-US" dirty="0"/>
           </a:p>
           <a:p>
             <a:endParaRPr lang="en-US" dirty="0"/>
@@ -8089,6 +7113,7 @@
               <a:rPr lang="en-US" dirty="0"/>
               <a:t>By array literal</a:t>
             </a:r>
+            <a:endParaRPr lang="en-US" dirty="0"/>
           </a:p>
           <a:p>
             <a:pPr lvl="1"/>
@@ -8096,6 +7121,7 @@
               <a:rPr lang="en-US" dirty="0"/>
               <a:t>By creating instance of Array directly (using new keyword)</a:t>
             </a:r>
+            <a:endParaRPr lang="en-US" dirty="0"/>
           </a:p>
           <a:p>
             <a:pPr lvl="1"/>
@@ -8108,11 +7134,6 @@
         </p:txBody>
       </p:sp>
     </p:spTree>
-    <p:extLst>
-      <p:ext uri="{BB962C8B-B14F-4D97-AF65-F5344CB8AC3E}">
-        <p14:creationId xmlns:p14="http://schemas.microsoft.com/office/powerpoint/2010/main" val="2523337551"/>
-      </p:ext>
-    </p:extLst>
   </p:cSld>
   <p:clrMapOvr>
     <a:masterClrMapping/>
@@ -8139,13 +7160,7 @@
       </p:grpSpPr>
       <p:sp>
         <p:nvSpPr>
-          <p:cNvPr id="2" name="Title 1">
-            <a:extLst>
-              <a:ext uri="{FF2B5EF4-FFF2-40B4-BE49-F238E27FC236}">
-                <a16:creationId xmlns:a16="http://schemas.microsoft.com/office/drawing/2014/main" id="{90BCB913-6980-45F7-A3CD-DB995AB4BA06}"/>
-              </a:ext>
-            </a:extLst>
-          </p:cNvPr>
+          <p:cNvPr id="2" name="Title 1"/>
           <p:cNvSpPr>
             <a:spLocks noGrp="1"/>
           </p:cNvSpPr>
@@ -8168,13 +7183,7 @@
       </p:sp>
       <p:sp>
         <p:nvSpPr>
-          <p:cNvPr id="3" name="Content Placeholder 2">
-            <a:extLst>
-              <a:ext uri="{FF2B5EF4-FFF2-40B4-BE49-F238E27FC236}">
-                <a16:creationId xmlns:a16="http://schemas.microsoft.com/office/drawing/2014/main" id="{BE45F6FE-433C-465E-9E7C-87CFC5BE03E9}"/>
-              </a:ext>
-            </a:extLst>
-          </p:cNvPr>
+          <p:cNvPr id="3" name="Content Placeholder 2"/>
           <p:cNvSpPr>
             <a:spLocks noGrp="1"/>
           </p:cNvSpPr>
@@ -8194,6 +7203,7 @@
               <a:rPr lang="en-US" dirty="0"/>
               <a:t>The syntax of creating array using array literal is given below:</a:t>
             </a:r>
+            <a:endParaRPr lang="en-US" dirty="0"/>
           </a:p>
           <a:p>
             <a:r>
@@ -8216,12 +7226,14 @@
               <a:rPr lang="en-US" dirty="0"/>
               <a:t>];  </a:t>
             </a:r>
+            <a:endParaRPr lang="en-US" dirty="0"/>
           </a:p>
           <a:p>
             <a:r>
               <a:rPr lang="en-US" dirty="0"/>
               <a:t>As you can see, values are contained inside [ ] and separated by , (comma).</a:t>
             </a:r>
+            <a:endParaRPr lang="en-US" dirty="0"/>
           </a:p>
           <a:p>
             <a:r>
@@ -8234,20 +7246,14 @@
       </p:sp>
       <p:pic>
         <p:nvPicPr>
-          <p:cNvPr id="5" name="Picture 4">
-            <a:extLst>
-              <a:ext uri="{FF2B5EF4-FFF2-40B4-BE49-F238E27FC236}">
-                <a16:creationId xmlns:a16="http://schemas.microsoft.com/office/drawing/2014/main" id="{12F83DDE-3770-45F3-8B0D-498E61A5FB6E}"/>
-              </a:ext>
-            </a:extLst>
-          </p:cNvPr>
+          <p:cNvPr id="5" name="Picture 4"/>
           <p:cNvPicPr>
             <a:picLocks noChangeAspect="1"/>
           </p:cNvPicPr>
           <p:nvPr/>
         </p:nvPicPr>
         <p:blipFill>
-          <a:blip r:embed="rId2"/>
+          <a:blip r:embed="rId1"/>
           <a:stretch>
             <a:fillRect/>
           </a:stretch>
@@ -8263,11 +7269,6 @@
         </p:spPr>
       </p:pic>
     </p:spTree>
-    <p:extLst>
-      <p:ext uri="{BB962C8B-B14F-4D97-AF65-F5344CB8AC3E}">
-        <p14:creationId xmlns:p14="http://schemas.microsoft.com/office/powerpoint/2010/main" val="357856940"/>
-      </p:ext>
-    </p:extLst>
   </p:cSld>
   <p:clrMapOvr>
     <a:masterClrMapping/>
@@ -8294,13 +7295,7 @@
       </p:grpSpPr>
       <p:sp>
         <p:nvSpPr>
-          <p:cNvPr id="2" name="Title 1">
-            <a:extLst>
-              <a:ext uri="{FF2B5EF4-FFF2-40B4-BE49-F238E27FC236}">
-                <a16:creationId xmlns:a16="http://schemas.microsoft.com/office/drawing/2014/main" id="{7A1A156D-8F96-4498-A247-3090B185F263}"/>
-              </a:ext>
-            </a:extLst>
-          </p:cNvPr>
+          <p:cNvPr id="2" name="Title 1"/>
           <p:cNvSpPr>
             <a:spLocks noGrp="1"/>
           </p:cNvSpPr>
@@ -8323,13 +7318,7 @@
       </p:sp>
       <p:sp>
         <p:nvSpPr>
-          <p:cNvPr id="3" name="Content Placeholder 2">
-            <a:extLst>
-              <a:ext uri="{FF2B5EF4-FFF2-40B4-BE49-F238E27FC236}">
-                <a16:creationId xmlns:a16="http://schemas.microsoft.com/office/drawing/2014/main" id="{E9193870-8386-4E36-A044-3AD5B8D05814}"/>
-              </a:ext>
-            </a:extLst>
-          </p:cNvPr>
+          <p:cNvPr id="3" name="Content Placeholder 2"/>
           <p:cNvSpPr>
             <a:spLocks noGrp="1"/>
           </p:cNvSpPr>
@@ -8349,6 +7338,7 @@
               <a:rPr lang="en-US" dirty="0"/>
               <a:t>The syntax of creating array directly is given below:</a:t>
             </a:r>
+            <a:endParaRPr lang="en-US" dirty="0"/>
           </a:p>
           <a:p>
             <a:r>
@@ -8363,18 +7353,21 @@
               <a:rPr lang="en-US" dirty="0"/>
               <a:t>=new Array();  </a:t>
             </a:r>
+            <a:endParaRPr lang="en-US" dirty="0"/>
           </a:p>
           <a:p>
             <a:r>
               <a:rPr lang="en-US" dirty="0"/>
               <a:t>Here, new keyword is used to create instance of array.</a:t>
             </a:r>
+            <a:endParaRPr lang="en-US" dirty="0"/>
           </a:p>
           <a:p>
             <a:r>
               <a:rPr lang="en-US" dirty="0"/>
               <a:t>Let's see the example of creating array directly.</a:t>
             </a:r>
+            <a:endParaRPr lang="en-US" dirty="0"/>
           </a:p>
           <a:p>
             <a:endParaRPr lang="en-US" dirty="0"/>
@@ -8386,20 +7379,14 @@
       </p:sp>
       <p:pic>
         <p:nvPicPr>
-          <p:cNvPr id="5" name="Picture 4">
-            <a:extLst>
-              <a:ext uri="{FF2B5EF4-FFF2-40B4-BE49-F238E27FC236}">
-                <a16:creationId xmlns:a16="http://schemas.microsoft.com/office/drawing/2014/main" id="{505BF17F-9797-4765-BE12-E7FC4BB55151}"/>
-              </a:ext>
-            </a:extLst>
-          </p:cNvPr>
+          <p:cNvPr id="5" name="Picture 4"/>
           <p:cNvPicPr>
             <a:picLocks noChangeAspect="1"/>
           </p:cNvPicPr>
           <p:nvPr/>
         </p:nvPicPr>
         <p:blipFill>
-          <a:blip r:embed="rId2"/>
+          <a:blip r:embed="rId1"/>
           <a:stretch>
             <a:fillRect/>
           </a:stretch>
@@ -8415,11 +7402,6 @@
         </p:spPr>
       </p:pic>
     </p:spTree>
-    <p:extLst>
-      <p:ext uri="{BB962C8B-B14F-4D97-AF65-F5344CB8AC3E}">
-        <p14:creationId xmlns:p14="http://schemas.microsoft.com/office/powerpoint/2010/main" val="1396669219"/>
-      </p:ext>
-    </p:extLst>
   </p:cSld>
   <p:clrMapOvr>
     <a:masterClrMapping/>
@@ -8446,13 +7428,7 @@
       </p:grpSpPr>
       <p:sp>
         <p:nvSpPr>
-          <p:cNvPr id="2" name="Title 1">
-            <a:extLst>
-              <a:ext uri="{FF2B5EF4-FFF2-40B4-BE49-F238E27FC236}">
-                <a16:creationId xmlns:a16="http://schemas.microsoft.com/office/drawing/2014/main" id="{91B25255-1633-4991-8952-A1217AA5C377}"/>
-              </a:ext>
-            </a:extLst>
-          </p:cNvPr>
+          <p:cNvPr id="2" name="Title 1"/>
           <p:cNvSpPr>
             <a:spLocks noGrp="1"/>
           </p:cNvSpPr>
@@ -8475,13 +7451,7 @@
       </p:sp>
       <p:sp>
         <p:nvSpPr>
-          <p:cNvPr id="3" name="Content Placeholder 2">
-            <a:extLst>
-              <a:ext uri="{FF2B5EF4-FFF2-40B4-BE49-F238E27FC236}">
-                <a16:creationId xmlns:a16="http://schemas.microsoft.com/office/drawing/2014/main" id="{16C5A08C-B163-4507-81DF-705BFE4EDED7}"/>
-              </a:ext>
-            </a:extLst>
-          </p:cNvPr>
+          <p:cNvPr id="3" name="Content Placeholder 2"/>
           <p:cNvSpPr>
             <a:spLocks noGrp="1"/>
           </p:cNvSpPr>
@@ -8498,6 +7468,7 @@
               <a:rPr lang="en-US" dirty="0"/>
               <a:t>Here, you need to create instance of array by passing arguments in constructor so that we don't have to provide value explicitly.</a:t>
             </a:r>
+            <a:endParaRPr lang="en-US" dirty="0"/>
           </a:p>
           <a:p>
             <a:r>
@@ -8510,20 +7481,14 @@
       </p:sp>
       <p:pic>
         <p:nvPicPr>
-          <p:cNvPr id="5" name="Picture 4">
-            <a:extLst>
-              <a:ext uri="{FF2B5EF4-FFF2-40B4-BE49-F238E27FC236}">
-                <a16:creationId xmlns:a16="http://schemas.microsoft.com/office/drawing/2014/main" id="{B17B757E-A140-4589-95E0-E8DBE1C069D7}"/>
-              </a:ext>
-            </a:extLst>
-          </p:cNvPr>
+          <p:cNvPr id="5" name="Picture 4"/>
           <p:cNvPicPr>
             <a:picLocks noChangeAspect="1"/>
           </p:cNvPicPr>
           <p:nvPr/>
         </p:nvPicPr>
         <p:blipFill>
-          <a:blip r:embed="rId2"/>
+          <a:blip r:embed="rId1"/>
           <a:stretch>
             <a:fillRect/>
           </a:stretch>
@@ -8539,11 +7504,6 @@
         </p:spPr>
       </p:pic>
     </p:spTree>
-    <p:extLst>
-      <p:ext uri="{BB962C8B-B14F-4D97-AF65-F5344CB8AC3E}">
-        <p14:creationId xmlns:p14="http://schemas.microsoft.com/office/powerpoint/2010/main" val="1822270271"/>
-      </p:ext>
-    </p:extLst>
   </p:cSld>
   <p:clrMapOvr>
     <a:masterClrMapping/>
@@ -8570,13 +7530,7 @@
       </p:grpSpPr>
       <p:sp>
         <p:nvSpPr>
-          <p:cNvPr id="2" name="Title 1">
-            <a:extLst>
-              <a:ext uri="{FF2B5EF4-FFF2-40B4-BE49-F238E27FC236}">
-                <a16:creationId xmlns:a16="http://schemas.microsoft.com/office/drawing/2014/main" id="{96FFBA86-FC71-44D0-8468-9D571DFC1E1D}"/>
-              </a:ext>
-            </a:extLst>
-          </p:cNvPr>
+          <p:cNvPr id="2" name="Title 1"/>
           <p:cNvSpPr>
             <a:spLocks noGrp="1"/>
           </p:cNvSpPr>
@@ -8599,13 +7553,7 @@
       </p:sp>
       <p:sp>
         <p:nvSpPr>
-          <p:cNvPr id="3" name="Content Placeholder 2">
-            <a:extLst>
-              <a:ext uri="{FF2B5EF4-FFF2-40B4-BE49-F238E27FC236}">
-                <a16:creationId xmlns:a16="http://schemas.microsoft.com/office/drawing/2014/main" id="{DD9AF32C-3D50-448B-BC71-65DA509C917A}"/>
-              </a:ext>
-            </a:extLst>
-          </p:cNvPr>
+          <p:cNvPr id="3" name="Content Placeholder 2"/>
           <p:cNvSpPr>
             <a:spLocks noGrp="1"/>
           </p:cNvSpPr>
@@ -8622,6 +7570,7 @@
               <a:rPr lang="en-US" dirty="0"/>
               <a:t>The JavaScript string is an object that represents a sequence of characters.</a:t>
             </a:r>
+            <a:endParaRPr lang="en-US" dirty="0"/>
           </a:p>
           <a:p>
             <a:endParaRPr lang="en-US" dirty="0"/>
@@ -8631,6 +7580,7 @@
               <a:rPr lang="en-US" dirty="0"/>
               <a:t>There are 2 ways to create string in JavaScript</a:t>
             </a:r>
+            <a:endParaRPr lang="en-US" dirty="0"/>
           </a:p>
           <a:p>
             <a:pPr lvl="1"/>
@@ -8638,6 +7588,7 @@
               <a:rPr lang="en-US" dirty="0"/>
               <a:t>By string literal</a:t>
             </a:r>
+            <a:endParaRPr lang="en-US" dirty="0"/>
           </a:p>
           <a:p>
             <a:pPr lvl="1"/>
@@ -8645,6 +7596,7 @@
               <a:rPr lang="en-US" dirty="0"/>
               <a:t>By string object (using new keyword)</a:t>
             </a:r>
+            <a:endParaRPr lang="en-US" dirty="0"/>
           </a:p>
           <a:p>
             <a:endParaRPr lang="en-IN" dirty="0"/>
@@ -8652,11 +7604,6 @@
         </p:txBody>
       </p:sp>
     </p:spTree>
-    <p:extLst>
-      <p:ext uri="{BB962C8B-B14F-4D97-AF65-F5344CB8AC3E}">
-        <p14:creationId xmlns:p14="http://schemas.microsoft.com/office/powerpoint/2010/main" val="1127609913"/>
-      </p:ext>
-    </p:extLst>
   </p:cSld>
   <p:clrMapOvr>
     <a:masterClrMapping/>
@@ -8683,13 +7630,7 @@
       </p:grpSpPr>
       <p:sp>
         <p:nvSpPr>
-          <p:cNvPr id="2" name="Title 1">
-            <a:extLst>
-              <a:ext uri="{FF2B5EF4-FFF2-40B4-BE49-F238E27FC236}">
-                <a16:creationId xmlns:a16="http://schemas.microsoft.com/office/drawing/2014/main" id="{B330D3F3-47BF-44EC-B1AA-C18A9780FFEF}"/>
-              </a:ext>
-            </a:extLst>
-          </p:cNvPr>
+          <p:cNvPr id="2" name="Title 1"/>
           <p:cNvSpPr>
             <a:spLocks noGrp="1"/>
           </p:cNvSpPr>
@@ -8712,13 +7653,7 @@
       </p:sp>
       <p:sp>
         <p:nvSpPr>
-          <p:cNvPr id="3" name="Content Placeholder 2">
-            <a:extLst>
-              <a:ext uri="{FF2B5EF4-FFF2-40B4-BE49-F238E27FC236}">
-                <a16:creationId xmlns:a16="http://schemas.microsoft.com/office/drawing/2014/main" id="{5F001662-1D8F-4F0E-AC1C-1A7F62978532}"/>
-              </a:ext>
-            </a:extLst>
-          </p:cNvPr>
+          <p:cNvPr id="3" name="Content Placeholder 2"/>
           <p:cNvSpPr>
             <a:spLocks noGrp="1"/>
           </p:cNvSpPr>
@@ -8737,6 +7672,7 @@
               <a:rPr lang="en-US" dirty="0"/>
               <a:t>The string literal is created using double quotes. The syntax of creating string using string literal is given below:</a:t>
             </a:r>
+            <a:endParaRPr lang="en-US" dirty="0"/>
           </a:p>
           <a:p>
             <a:endParaRPr lang="en-US" dirty="0"/>
@@ -8757,6 +7693,7 @@
               <a:rPr lang="en-US" dirty="0"/>
               <a:t>="string value";  </a:t>
             </a:r>
+            <a:endParaRPr lang="en-US" dirty="0"/>
           </a:p>
           <a:p>
             <a:pPr marL="0" indent="0">
@@ -8766,6 +7703,7 @@
               <a:rPr lang="en-US" dirty="0"/>
               <a:t>Let's see the simple example of creating string literal.</a:t>
             </a:r>
+            <a:endParaRPr lang="en-US" dirty="0"/>
           </a:p>
           <a:p>
             <a:endParaRPr lang="en-US" dirty="0"/>
@@ -8778,6 +7716,7 @@
               <a:rPr lang="en-US" dirty="0"/>
               <a:t>	&lt;script&gt;  </a:t>
             </a:r>
+            <a:endParaRPr lang="en-US" dirty="0"/>
           </a:p>
           <a:p>
             <a:pPr marL="0" indent="0">
@@ -8787,6 +7726,7 @@
               <a:rPr lang="en-US" dirty="0"/>
               <a:t>	var str="This is string literal";  </a:t>
             </a:r>
+            <a:endParaRPr lang="en-US" dirty="0"/>
           </a:p>
           <a:p>
             <a:pPr marL="0" indent="0">
@@ -8804,6 +7744,7 @@
               <a:rPr lang="en-US" dirty="0"/>
               <a:t>(str);  </a:t>
             </a:r>
+            <a:endParaRPr lang="en-US" dirty="0"/>
           </a:p>
           <a:p>
             <a:pPr marL="0" indent="0">
@@ -8818,11 +7759,6 @@
         </p:txBody>
       </p:sp>
     </p:spTree>
-    <p:extLst>
-      <p:ext uri="{BB962C8B-B14F-4D97-AF65-F5344CB8AC3E}">
-        <p14:creationId xmlns:p14="http://schemas.microsoft.com/office/powerpoint/2010/main" val="3989712796"/>
-      </p:ext>
-    </p:extLst>
   </p:cSld>
   <p:clrMapOvr>
     <a:masterClrMapping/>
@@ -8849,13 +7785,7 @@
       </p:grpSpPr>
       <p:sp>
         <p:nvSpPr>
-          <p:cNvPr id="2" name="Title 1">
-            <a:extLst>
-              <a:ext uri="{FF2B5EF4-FFF2-40B4-BE49-F238E27FC236}">
-                <a16:creationId xmlns:a16="http://schemas.microsoft.com/office/drawing/2014/main" id="{C6559EC1-5609-4B1E-954A-CE7311354733}"/>
-              </a:ext>
-            </a:extLst>
-          </p:cNvPr>
+          <p:cNvPr id="2" name="Title 1"/>
           <p:cNvSpPr>
             <a:spLocks noGrp="1"/>
           </p:cNvSpPr>
@@ -8881,13 +7811,7 @@
       </p:sp>
       <p:sp>
         <p:nvSpPr>
-          <p:cNvPr id="3" name="Content Placeholder 2">
-            <a:extLst>
-              <a:ext uri="{FF2B5EF4-FFF2-40B4-BE49-F238E27FC236}">
-                <a16:creationId xmlns:a16="http://schemas.microsoft.com/office/drawing/2014/main" id="{C91943AF-73CD-4C85-AC70-0FC7A31F62AE}"/>
-              </a:ext>
-            </a:extLst>
-          </p:cNvPr>
+          <p:cNvPr id="3" name="Content Placeholder 2"/>
           <p:cNvSpPr>
             <a:spLocks noGrp="1"/>
           </p:cNvSpPr>
@@ -8907,6 +7831,7 @@
               <a:rPr lang="en-US" dirty="0"/>
               <a:t>It is a light-weighted and interpreted language.</a:t>
             </a:r>
+            <a:endParaRPr lang="en-US" dirty="0"/>
           </a:p>
           <a:p>
             <a:pPr algn="just"/>
@@ -8914,6 +7839,7 @@
               <a:rPr lang="en-US" dirty="0"/>
               <a:t>It is a case-sensitive language.</a:t>
             </a:r>
+            <a:endParaRPr lang="en-US" dirty="0"/>
           </a:p>
           <a:p>
             <a:pPr algn="just"/>
@@ -8921,6 +7847,7 @@
               <a:rPr lang="en-US" dirty="0"/>
               <a:t>JavaScript is supportable in several operating systems including, Windows, macOS, etc.</a:t>
             </a:r>
+            <a:endParaRPr lang="en-US" dirty="0"/>
           </a:p>
           <a:p>
             <a:pPr algn="just"/>
@@ -8937,11 +7864,6 @@
         </p:txBody>
       </p:sp>
     </p:spTree>
-    <p:extLst>
-      <p:ext uri="{BB962C8B-B14F-4D97-AF65-F5344CB8AC3E}">
-        <p14:creationId xmlns:p14="http://schemas.microsoft.com/office/powerpoint/2010/main" val="2711985029"/>
-      </p:ext>
-    </p:extLst>
   </p:cSld>
   <p:clrMapOvr>
     <a:masterClrMapping/>
@@ -8968,13 +7890,7 @@
       </p:grpSpPr>
       <p:sp>
         <p:nvSpPr>
-          <p:cNvPr id="2" name="Title 1">
-            <a:extLst>
-              <a:ext uri="{FF2B5EF4-FFF2-40B4-BE49-F238E27FC236}">
-                <a16:creationId xmlns:a16="http://schemas.microsoft.com/office/drawing/2014/main" id="{EADE4740-B7F6-4C03-9E97-F7A3C0425507}"/>
-              </a:ext>
-            </a:extLst>
-          </p:cNvPr>
+          <p:cNvPr id="2" name="Title 1"/>
           <p:cNvSpPr>
             <a:spLocks noGrp="1"/>
           </p:cNvSpPr>
@@ -8997,13 +7913,7 @@
       </p:sp>
       <p:sp>
         <p:nvSpPr>
-          <p:cNvPr id="3" name="Content Placeholder 2">
-            <a:extLst>
-              <a:ext uri="{FF2B5EF4-FFF2-40B4-BE49-F238E27FC236}">
-                <a16:creationId xmlns:a16="http://schemas.microsoft.com/office/drawing/2014/main" id="{739581C8-1C8D-4F98-8167-85FFD24EF7E4}"/>
-              </a:ext>
-            </a:extLst>
-          </p:cNvPr>
+          <p:cNvPr id="3" name="Content Placeholder 2"/>
           <p:cNvSpPr>
             <a:spLocks noGrp="1"/>
           </p:cNvSpPr>
@@ -9022,6 +7932,7 @@
               <a:rPr lang="en-US" dirty="0"/>
               <a:t>The syntax of creating string object using new keyword is given below:</a:t>
             </a:r>
+            <a:endParaRPr lang="en-US" dirty="0"/>
           </a:p>
           <a:p>
             <a:endParaRPr lang="en-US" dirty="0"/>
@@ -9042,12 +7953,14 @@
               <a:rPr lang="en-US" dirty="0"/>
               <a:t>=new String("string literal");  </a:t>
             </a:r>
+            <a:endParaRPr lang="en-US" dirty="0"/>
           </a:p>
           <a:p>
             <a:r>
               <a:rPr lang="en-US" dirty="0"/>
               <a:t>Here, new keyword is used to create instance of string.</a:t>
             </a:r>
+            <a:endParaRPr lang="en-US" dirty="0"/>
           </a:p>
           <a:p>
             <a:endParaRPr lang="en-US" dirty="0"/>
@@ -9057,6 +7970,7 @@
               <a:rPr lang="en-US" dirty="0"/>
               <a:t>Let's see the example of creating string in JavaScript by new keyword.</a:t>
             </a:r>
+            <a:endParaRPr lang="en-US" dirty="0"/>
           </a:p>
           <a:p>
             <a:endParaRPr lang="en-US" dirty="0"/>
@@ -9069,6 +7983,7 @@
               <a:rPr lang="en-US" dirty="0"/>
               <a:t>	&lt;script&gt;  </a:t>
             </a:r>
+            <a:endParaRPr lang="en-US" dirty="0"/>
           </a:p>
           <a:p>
             <a:pPr marL="0" indent="0">
@@ -9094,6 +8009,7 @@
               <a:rPr lang="en-US" dirty="0"/>
               <a:t> string");  </a:t>
             </a:r>
+            <a:endParaRPr lang="en-US" dirty="0"/>
           </a:p>
           <a:p>
             <a:pPr marL="0" indent="0">
@@ -9119,6 +8035,7 @@
               <a:rPr lang="en-US" dirty="0"/>
               <a:t>);  </a:t>
             </a:r>
+            <a:endParaRPr lang="en-US" dirty="0"/>
           </a:p>
           <a:p>
             <a:pPr marL="0" indent="0">
@@ -9133,11 +8050,6 @@
         </p:txBody>
       </p:sp>
     </p:spTree>
-    <p:extLst>
-      <p:ext uri="{BB962C8B-B14F-4D97-AF65-F5344CB8AC3E}">
-        <p14:creationId xmlns:p14="http://schemas.microsoft.com/office/powerpoint/2010/main" val="3285104886"/>
-      </p:ext>
-    </p:extLst>
   </p:cSld>
   <p:clrMapOvr>
     <a:masterClrMapping/>
@@ -9172,26 +8084,11 @@
       </p:grpSpPr>
       <p:sp>
         <p:nvSpPr>
-          <p:cNvPr id="10" name="Down Arrow 7">
-            <a:extLst>
-              <a:ext uri="{FF2B5EF4-FFF2-40B4-BE49-F238E27FC236}">
-                <a16:creationId xmlns:a16="http://schemas.microsoft.com/office/drawing/2014/main" id="{D4771268-CB57-404A-9271-370EB28F6090}"/>
-              </a:ext>
-              <a:ext uri="{C183D7F6-B498-43B3-948B-1728B52AA6E4}">
-                <adec:decorative xmlns:adec="http://schemas.microsoft.com/office/drawing/2017/decorative" val="1"/>
-              </a:ext>
-            </a:extLst>
-          </p:cNvPr>
+          <p:cNvPr id="10" name="Down Arrow 7"/>
           <p:cNvSpPr>
             <a:spLocks noGrp="1" noRot="1" noChangeAspect="1" noMove="1" noResize="1" noEditPoints="1" noAdjustHandles="1" noChangeArrowheads="1" noChangeShapeType="1" noTextEdit="1"/>
           </p:cNvSpPr>
-          <p:nvPr>
-            <p:extLst>
-              <p:ext uri="{386F3935-93C4-4BCD-93E2-E3B085C9AB24}">
-                <p16:designElem xmlns:p16="http://schemas.microsoft.com/office/powerpoint/2015/main" val="1"/>
-              </p:ext>
-            </p:extLst>
-          </p:nvPr>
+          <p:nvPr/>
         </p:nvSpPr>
         <p:spPr>
           <a:xfrm rot="16200000">
@@ -9238,13 +8135,7 @@
       </p:sp>
       <p:sp>
         <p:nvSpPr>
-          <p:cNvPr id="2" name="Title 1">
-            <a:extLst>
-              <a:ext uri="{FF2B5EF4-FFF2-40B4-BE49-F238E27FC236}">
-                <a16:creationId xmlns:a16="http://schemas.microsoft.com/office/drawing/2014/main" id="{B41E5E86-2942-42AA-98D0-AF3D7526865D}"/>
-              </a:ext>
-            </a:extLst>
-          </p:cNvPr>
+          <p:cNvPr id="2" name="Title 1"/>
           <p:cNvSpPr>
             <a:spLocks noGrp="1"/>
           </p:cNvSpPr>
@@ -9277,25 +8168,27 @@
               </a:rPr>
               <a:t>JavaScript String Methods</a:t>
             </a:r>
+            <a:endParaRPr lang="en-US" sz="3600" kern="1200">
+              <a:solidFill>
+                <a:srgbClr val="FFFFFF"/>
+              </a:solidFill>
+              <a:latin typeface="+mj-lt"/>
+              <a:ea typeface="+mj-ea"/>
+              <a:cs typeface="+mj-cs"/>
+            </a:endParaRPr>
           </a:p>
         </p:txBody>
       </p:sp>
       <p:pic>
         <p:nvPicPr>
-          <p:cNvPr id="5" name="Picture 4">
-            <a:extLst>
-              <a:ext uri="{FF2B5EF4-FFF2-40B4-BE49-F238E27FC236}">
-                <a16:creationId xmlns:a16="http://schemas.microsoft.com/office/drawing/2014/main" id="{DF245E06-8EFA-4571-852D-CF3E0E943C3A}"/>
-              </a:ext>
-            </a:extLst>
-          </p:cNvPr>
+          <p:cNvPr id="5" name="Picture 4"/>
           <p:cNvPicPr>
             <a:picLocks noChangeAspect="1"/>
           </p:cNvPicPr>
           <p:nvPr/>
         </p:nvPicPr>
         <p:blipFill>
-          <a:blip r:embed="rId2"/>
+          <a:blip r:embed="rId1"/>
           <a:stretch>
             <a:fillRect/>
           </a:stretch>
@@ -9311,11 +8204,6 @@
         </p:spPr>
       </p:pic>
     </p:spTree>
-    <p:extLst>
-      <p:ext uri="{BB962C8B-B14F-4D97-AF65-F5344CB8AC3E}">
-        <p14:creationId xmlns:p14="http://schemas.microsoft.com/office/powerpoint/2010/main" val="3084236162"/>
-      </p:ext>
-    </p:extLst>
   </p:cSld>
   <p:clrMapOvr>
     <a:masterClrMapping/>
@@ -9342,13 +8230,7 @@
       </p:grpSpPr>
       <p:sp>
         <p:nvSpPr>
-          <p:cNvPr id="2" name="Title 1">
-            <a:extLst>
-              <a:ext uri="{FF2B5EF4-FFF2-40B4-BE49-F238E27FC236}">
-                <a16:creationId xmlns:a16="http://schemas.microsoft.com/office/drawing/2014/main" id="{DA485EA7-CF19-4AEA-B4D8-1D01545C17C2}"/>
-              </a:ext>
-            </a:extLst>
-          </p:cNvPr>
+          <p:cNvPr id="2" name="Title 1"/>
           <p:cNvSpPr>
             <a:spLocks noGrp="1"/>
           </p:cNvSpPr>
@@ -9371,13 +8253,7 @@
       </p:sp>
       <p:sp>
         <p:nvSpPr>
-          <p:cNvPr id="3" name="Content Placeholder 2">
-            <a:extLst>
-              <a:ext uri="{FF2B5EF4-FFF2-40B4-BE49-F238E27FC236}">
-                <a16:creationId xmlns:a16="http://schemas.microsoft.com/office/drawing/2014/main" id="{93479A19-6B64-40B5-8E71-4934BF89227A}"/>
-              </a:ext>
-            </a:extLst>
-          </p:cNvPr>
+          <p:cNvPr id="3" name="Content Placeholder 2"/>
           <p:cNvSpPr>
             <a:spLocks noGrp="1"/>
           </p:cNvSpPr>
@@ -9396,6 +8272,7 @@
               <a:rPr lang="en-US" dirty="0"/>
               <a:t>The JavaScript date object can be used to get year, month and day. You can display a timer on the webpage by the help of JavaScript date object.</a:t>
             </a:r>
+            <a:endParaRPr lang="en-US" dirty="0"/>
           </a:p>
           <a:p>
             <a:endParaRPr lang="en-US" dirty="0"/>
@@ -9405,6 +8282,7 @@
               <a:rPr lang="en-US" dirty="0"/>
               <a:t>You can use different Date constructors to create date object. It provides methods to get and set day, month, year, hour, minute and seconds.</a:t>
             </a:r>
+            <a:endParaRPr lang="en-US" dirty="0"/>
           </a:p>
           <a:p>
             <a:endParaRPr lang="en-US" dirty="0"/>
@@ -9412,11 +8290,6 @@
         </p:txBody>
       </p:sp>
     </p:spTree>
-    <p:extLst>
-      <p:ext uri="{BB962C8B-B14F-4D97-AF65-F5344CB8AC3E}">
-        <p14:creationId xmlns:p14="http://schemas.microsoft.com/office/powerpoint/2010/main" val="4101119854"/>
-      </p:ext>
-    </p:extLst>
   </p:cSld>
   <p:clrMapOvr>
     <a:masterClrMapping/>
@@ -9443,13 +8316,7 @@
       </p:grpSpPr>
       <p:sp>
         <p:nvSpPr>
-          <p:cNvPr id="2" name="Title 1">
-            <a:extLst>
-              <a:ext uri="{FF2B5EF4-FFF2-40B4-BE49-F238E27FC236}">
-                <a16:creationId xmlns:a16="http://schemas.microsoft.com/office/drawing/2014/main" id="{8CFB4AEF-3B86-4545-BFE9-147689A380C7}"/>
-              </a:ext>
-            </a:extLst>
-          </p:cNvPr>
+          <p:cNvPr id="2" name="Title 1"/>
           <p:cNvSpPr>
             <a:spLocks noGrp="1"/>
           </p:cNvSpPr>
@@ -9476,13 +8343,7 @@
       </p:sp>
       <p:sp>
         <p:nvSpPr>
-          <p:cNvPr id="3" name="Content Placeholder 2">
-            <a:extLst>
-              <a:ext uri="{FF2B5EF4-FFF2-40B4-BE49-F238E27FC236}">
-                <a16:creationId xmlns:a16="http://schemas.microsoft.com/office/drawing/2014/main" id="{34BC52C6-56F7-45D4-97C3-8C31807F6CBB}"/>
-              </a:ext>
-            </a:extLst>
-          </p:cNvPr>
+          <p:cNvPr id="3" name="Content Placeholder 2"/>
           <p:cNvSpPr>
             <a:spLocks noGrp="1"/>
           </p:cNvSpPr>
@@ -9499,6 +8360,7 @@
               <a:rPr lang="en-US" dirty="0"/>
               <a:t>You can use 4 variant of Date constructor to create date object.</a:t>
             </a:r>
+            <a:endParaRPr lang="en-US" dirty="0"/>
           </a:p>
           <a:p>
             <a:endParaRPr lang="en-US" dirty="0"/>
@@ -9509,6 +8371,7 @@
               <a:rPr lang="en-US" dirty="0"/>
               <a:t>Date()</a:t>
             </a:r>
+            <a:endParaRPr lang="en-US" dirty="0"/>
           </a:p>
           <a:p>
             <a:pPr lvl="1"/>
@@ -9516,6 +8379,7 @@
               <a:rPr lang="en-US" dirty="0"/>
               <a:t>Date(milliseconds)</a:t>
             </a:r>
+            <a:endParaRPr lang="en-US" dirty="0"/>
           </a:p>
           <a:p>
             <a:pPr lvl="1"/>
@@ -9531,6 +8395,7 @@
               <a:rPr lang="en-US" dirty="0"/>
               <a:t>)</a:t>
             </a:r>
+            <a:endParaRPr lang="en-US" dirty="0"/>
           </a:p>
           <a:p>
             <a:pPr lvl="1"/>
@@ -9546,11 +8411,6 @@
         </p:txBody>
       </p:sp>
     </p:spTree>
-    <p:extLst>
-      <p:ext uri="{BB962C8B-B14F-4D97-AF65-F5344CB8AC3E}">
-        <p14:creationId xmlns:p14="http://schemas.microsoft.com/office/powerpoint/2010/main" val="3956678599"/>
-      </p:ext>
-    </p:extLst>
   </p:cSld>
   <p:clrMapOvr>
     <a:masterClrMapping/>
@@ -9585,26 +8445,11 @@
       </p:grpSpPr>
       <p:sp>
         <p:nvSpPr>
-          <p:cNvPr id="10" name="Rectangle 9">
-            <a:extLst>
-              <a:ext uri="{FF2B5EF4-FFF2-40B4-BE49-F238E27FC236}">
-                <a16:creationId xmlns:a16="http://schemas.microsoft.com/office/drawing/2014/main" id="{6753252F-4873-4F63-801D-CC719279A7D5}"/>
-              </a:ext>
-              <a:ext uri="{C183D7F6-B498-43B3-948B-1728B52AA6E4}">
-                <adec:decorative xmlns:adec="http://schemas.microsoft.com/office/drawing/2017/decorative" val="1"/>
-              </a:ext>
-            </a:extLst>
-          </p:cNvPr>
+          <p:cNvPr id="10" name="Rectangle 9"/>
           <p:cNvSpPr>
             <a:spLocks noGrp="1" noRot="1" noChangeAspect="1" noMove="1" noResize="1" noEditPoints="1" noAdjustHandles="1" noChangeArrowheads="1" noChangeShapeType="1" noTextEdit="1"/>
           </p:cNvSpPr>
-          <p:nvPr>
-            <p:extLst>
-              <p:ext uri="{386F3935-93C4-4BCD-93E2-E3B085C9AB24}">
-                <p16:designElem xmlns:p16="http://schemas.microsoft.com/office/powerpoint/2015/main" val="1"/>
-              </p:ext>
-            </p:extLst>
-          </p:nvPr>
+          <p:nvPr/>
         </p:nvSpPr>
         <p:spPr>
           <a:xfrm>
@@ -9648,26 +8493,11 @@
       </p:sp>
       <p:sp>
         <p:nvSpPr>
-          <p:cNvPr id="12" name="Rectangle 11">
-            <a:extLst>
-              <a:ext uri="{FF2B5EF4-FFF2-40B4-BE49-F238E27FC236}">
-                <a16:creationId xmlns:a16="http://schemas.microsoft.com/office/drawing/2014/main" id="{047C8CCB-F95D-4249-92DD-651249D3535A}"/>
-              </a:ext>
-              <a:ext uri="{C183D7F6-B498-43B3-948B-1728B52AA6E4}">
-                <adec:decorative xmlns:adec="http://schemas.microsoft.com/office/drawing/2017/decorative" val="1"/>
-              </a:ext>
-            </a:extLst>
-          </p:cNvPr>
+          <p:cNvPr id="12" name="Rectangle 11"/>
           <p:cNvSpPr>
             <a:spLocks noGrp="1" noRot="1" noChangeAspect="1" noMove="1" noResize="1" noEditPoints="1" noAdjustHandles="1" noChangeArrowheads="1" noChangeShapeType="1" noTextEdit="1"/>
           </p:cNvSpPr>
-          <p:nvPr>
-            <p:extLst>
-              <p:ext uri="{386F3935-93C4-4BCD-93E2-E3B085C9AB24}">
-                <p16:designElem xmlns:p16="http://schemas.microsoft.com/office/powerpoint/2015/main" val="1"/>
-              </p:ext>
-            </p:extLst>
-          </p:nvPr>
+          <p:nvPr/>
         </p:nvSpPr>
         <p:spPr>
           <a:xfrm>
@@ -9711,13 +8541,7 @@
       </p:sp>
       <p:sp>
         <p:nvSpPr>
-          <p:cNvPr id="2" name="Title 1">
-            <a:extLst>
-              <a:ext uri="{FF2B5EF4-FFF2-40B4-BE49-F238E27FC236}">
-                <a16:creationId xmlns:a16="http://schemas.microsoft.com/office/drawing/2014/main" id="{D667DA37-EE19-4FE6-ACC3-9EFAE8D49D85}"/>
-              </a:ext>
-            </a:extLst>
-          </p:cNvPr>
+          <p:cNvPr id="2" name="Title 1"/>
           <p:cNvSpPr>
             <a:spLocks noGrp="1"/>
           </p:cNvSpPr>
@@ -9760,25 +8584,27 @@
               </a:rPr>
               <a:t>JavaScript Date Methods</a:t>
             </a:r>
+            <a:endParaRPr lang="en-US" sz="2600" kern="1200">
+              <a:solidFill>
+                <a:srgbClr val="FFFFFF"/>
+              </a:solidFill>
+              <a:latin typeface="+mj-lt"/>
+              <a:ea typeface="+mj-ea"/>
+              <a:cs typeface="+mj-cs"/>
+            </a:endParaRPr>
           </a:p>
         </p:txBody>
       </p:sp>
       <p:pic>
         <p:nvPicPr>
-          <p:cNvPr id="5" name="Picture 4">
-            <a:extLst>
-              <a:ext uri="{FF2B5EF4-FFF2-40B4-BE49-F238E27FC236}">
-                <a16:creationId xmlns:a16="http://schemas.microsoft.com/office/drawing/2014/main" id="{E7C09014-E104-42CF-ADDA-93B6D7B148A5}"/>
-              </a:ext>
-            </a:extLst>
-          </p:cNvPr>
+          <p:cNvPr id="5" name="Picture 4"/>
           <p:cNvPicPr>
             <a:picLocks noChangeAspect="1"/>
           </p:cNvPicPr>
           <p:nvPr/>
         </p:nvPicPr>
         <p:blipFill>
-          <a:blip r:embed="rId2"/>
+          <a:blip r:embed="rId1"/>
           <a:stretch>
             <a:fillRect/>
           </a:stretch>
@@ -9794,11 +8620,6 @@
         </p:spPr>
       </p:pic>
     </p:spTree>
-    <p:extLst>
-      <p:ext uri="{BB962C8B-B14F-4D97-AF65-F5344CB8AC3E}">
-        <p14:creationId xmlns:p14="http://schemas.microsoft.com/office/powerpoint/2010/main" val="1019529753"/>
-      </p:ext>
-    </p:extLst>
   </p:cSld>
   <p:clrMapOvr>
     <a:masterClrMapping/>
@@ -9825,13 +8646,7 @@
       </p:grpSpPr>
       <p:sp>
         <p:nvSpPr>
-          <p:cNvPr id="2" name="Title 1">
-            <a:extLst>
-              <a:ext uri="{FF2B5EF4-FFF2-40B4-BE49-F238E27FC236}">
-                <a16:creationId xmlns:a16="http://schemas.microsoft.com/office/drawing/2014/main" id="{BCB36247-6986-4D51-B1E0-F6529EB68EDB}"/>
-              </a:ext>
-            </a:extLst>
-          </p:cNvPr>
+          <p:cNvPr id="2" name="Title 1"/>
           <p:cNvSpPr>
             <a:spLocks noGrp="1"/>
           </p:cNvSpPr>
@@ -9848,18 +8663,13 @@
               <a:rPr lang="en-IN" dirty="0"/>
               <a:t>JavaScript Date Example</a:t>
             </a:r>
-          </a:p>
-        </p:txBody>
-      </p:sp>
-      <p:sp>
-        <p:nvSpPr>
-          <p:cNvPr id="3" name="Content Placeholder 2">
-            <a:extLst>
-              <a:ext uri="{FF2B5EF4-FFF2-40B4-BE49-F238E27FC236}">
-                <a16:creationId xmlns:a16="http://schemas.microsoft.com/office/drawing/2014/main" id="{96BBD962-BB4A-4225-9F68-E686417B809C}"/>
-              </a:ext>
-            </a:extLst>
-          </p:cNvPr>
+            <a:endParaRPr lang="en-IN" dirty="0"/>
+          </a:p>
+        </p:txBody>
+      </p:sp>
+      <p:sp>
+        <p:nvSpPr>
+          <p:cNvPr id="3" name="Content Placeholder 2"/>
           <p:cNvSpPr>
             <a:spLocks noGrp="1"/>
           </p:cNvSpPr>
@@ -9876,6 +8686,7 @@
               <a:rPr lang="en-US" dirty="0"/>
               <a:t>Let's see the simple example to print date object. It prints date and time both.</a:t>
             </a:r>
+            <a:endParaRPr lang="en-US" dirty="0"/>
           </a:p>
           <a:p>
             <a:endParaRPr lang="en-US" dirty="0"/>
@@ -9892,6 +8703,7 @@
               <a:rPr lang="en-US" i="1" dirty="0"/>
               <a:t>Current Date and Time: &lt;span id="txt"&gt;&lt;/span&gt;  </a:t>
             </a:r>
+            <a:endParaRPr lang="en-US" i="1" dirty="0"/>
           </a:p>
           <a:p>
             <a:pPr marL="0" indent="0">
@@ -9901,6 +8713,7 @@
               <a:rPr lang="en-US" i="1" dirty="0"/>
               <a:t>	&lt;script&gt;  </a:t>
             </a:r>
+            <a:endParaRPr lang="en-US" i="1" dirty="0"/>
           </a:p>
           <a:p>
             <a:pPr marL="0" indent="0">
@@ -9910,6 +8723,7 @@
               <a:rPr lang="en-US" i="1" dirty="0"/>
               <a:t>	var today=new Date();  </a:t>
             </a:r>
+            <a:endParaRPr lang="en-US" i="1" dirty="0"/>
           </a:p>
           <a:p>
             <a:pPr marL="0" indent="0">
@@ -9935,6 +8749,7 @@
               <a:rPr lang="en-US" i="1" dirty="0"/>
               <a:t>=today;  </a:t>
             </a:r>
+            <a:endParaRPr lang="en-US" i="1" dirty="0"/>
           </a:p>
           <a:p>
             <a:pPr marL="0" indent="0">
@@ -9949,11 +8764,6 @@
         </p:txBody>
       </p:sp>
     </p:spTree>
-    <p:extLst>
-      <p:ext uri="{BB962C8B-B14F-4D97-AF65-F5344CB8AC3E}">
-        <p14:creationId xmlns:p14="http://schemas.microsoft.com/office/powerpoint/2010/main" val="2241018393"/>
-      </p:ext>
-    </p:extLst>
   </p:cSld>
   <p:clrMapOvr>
     <a:masterClrMapping/>
@@ -9980,13 +8790,7 @@
       </p:grpSpPr>
       <p:sp>
         <p:nvSpPr>
-          <p:cNvPr id="2" name="Title 1">
-            <a:extLst>
-              <a:ext uri="{FF2B5EF4-FFF2-40B4-BE49-F238E27FC236}">
-                <a16:creationId xmlns:a16="http://schemas.microsoft.com/office/drawing/2014/main" id="{9F380934-FF28-4706-8FE6-F96E1F73DB95}"/>
-              </a:ext>
-            </a:extLst>
-          </p:cNvPr>
+          <p:cNvPr id="2" name="Title 1"/>
           <p:cNvSpPr>
             <a:spLocks noGrp="1"/>
           </p:cNvSpPr>
@@ -10003,18 +8807,13 @@
               <a:rPr lang="en-IN" dirty="0"/>
               <a:t>JavaScript Date Example</a:t>
             </a:r>
-          </a:p>
-        </p:txBody>
-      </p:sp>
-      <p:sp>
-        <p:nvSpPr>
-          <p:cNvPr id="3" name="Content Placeholder 2">
-            <a:extLst>
-              <a:ext uri="{FF2B5EF4-FFF2-40B4-BE49-F238E27FC236}">
-                <a16:creationId xmlns:a16="http://schemas.microsoft.com/office/drawing/2014/main" id="{3132FFD1-3806-489F-93CC-82B5527DB13A}"/>
-              </a:ext>
-            </a:extLst>
-          </p:cNvPr>
+            <a:endParaRPr lang="en-IN" dirty="0"/>
+          </a:p>
+        </p:txBody>
+      </p:sp>
+      <p:sp>
+        <p:nvSpPr>
+          <p:cNvPr id="3" name="Content Placeholder 2"/>
           <p:cNvSpPr>
             <a:spLocks noGrp="1"/>
           </p:cNvSpPr>
@@ -10033,6 +8832,7 @@
               <a:rPr lang="en-US" dirty="0"/>
               <a:t>Let's see another code to print date/month/year.</a:t>
             </a:r>
+            <a:endParaRPr lang="en-US" dirty="0"/>
           </a:p>
           <a:p>
             <a:endParaRPr lang="en-US" dirty="0"/>
@@ -10049,6 +8849,7 @@
               <a:rPr lang="en-US" i="1" dirty="0"/>
               <a:t>&lt;script&gt;  </a:t>
             </a:r>
+            <a:endParaRPr lang="en-US" i="1" dirty="0"/>
           </a:p>
           <a:p>
             <a:pPr marL="0" indent="0">
@@ -10058,6 +8859,7 @@
               <a:rPr lang="en-US" i="1" dirty="0"/>
               <a:t>	var date=new Date();  </a:t>
             </a:r>
+            <a:endParaRPr lang="en-US" i="1" dirty="0"/>
           </a:p>
           <a:p>
             <a:pPr marL="0" indent="0">
@@ -10075,6 +8877,7 @@
               <a:rPr lang="en-US" i="1" dirty="0"/>
               <a:t>();  </a:t>
             </a:r>
+            <a:endParaRPr lang="en-US" i="1" dirty="0"/>
           </a:p>
           <a:p>
             <a:pPr marL="0" indent="0">
@@ -10092,6 +8895,7 @@
               <a:rPr lang="en-US" i="1" dirty="0"/>
               <a:t>()+1;  </a:t>
             </a:r>
+            <a:endParaRPr lang="en-US" i="1" dirty="0"/>
           </a:p>
           <a:p>
             <a:pPr marL="0" indent="0">
@@ -10109,6 +8913,7 @@
               <a:rPr lang="en-US" i="1" dirty="0"/>
               <a:t>();  </a:t>
             </a:r>
+            <a:endParaRPr lang="en-US" i="1" dirty="0"/>
           </a:p>
           <a:p>
             <a:pPr marL="0" indent="0">
@@ -10134,6 +8939,7 @@
               <a:rPr lang="en-US" i="1" dirty="0"/>
               <a:t>&gt;Date is: "+day+"/"+month+"/"+year);  </a:t>
             </a:r>
+            <a:endParaRPr lang="en-US" i="1" dirty="0"/>
           </a:p>
           <a:p>
             <a:pPr marL="0" indent="0">
@@ -10143,6 +8949,7 @@
               <a:rPr lang="en-US" i="1" dirty="0"/>
               <a:t>	&lt;/script&gt;  </a:t>
             </a:r>
+            <a:endParaRPr lang="en-US" i="1" dirty="0"/>
           </a:p>
           <a:p>
             <a:pPr marL="0" indent="0">
@@ -10152,6 +8959,7 @@
               <a:rPr lang="en-US" dirty="0"/>
               <a:t>Output:</a:t>
             </a:r>
+            <a:endParaRPr lang="en-US" dirty="0"/>
           </a:p>
           <a:p>
             <a:endParaRPr lang="en-US" dirty="0"/>
@@ -10169,11 +8977,6 @@
         </p:txBody>
       </p:sp>
     </p:spTree>
-    <p:extLst>
-      <p:ext uri="{BB962C8B-B14F-4D97-AF65-F5344CB8AC3E}">
-        <p14:creationId xmlns:p14="http://schemas.microsoft.com/office/powerpoint/2010/main" val="3149444004"/>
-      </p:ext>
-    </p:extLst>
   </p:cSld>
   <p:clrMapOvr>
     <a:masterClrMapping/>
@@ -10200,13 +9003,7 @@
       </p:grpSpPr>
       <p:sp>
         <p:nvSpPr>
-          <p:cNvPr id="2" name="Title 1">
-            <a:extLst>
-              <a:ext uri="{FF2B5EF4-FFF2-40B4-BE49-F238E27FC236}">
-                <a16:creationId xmlns:a16="http://schemas.microsoft.com/office/drawing/2014/main" id="{4EB24A1E-AF37-4004-B7B7-521D875106F0}"/>
-              </a:ext>
-            </a:extLst>
-          </p:cNvPr>
+          <p:cNvPr id="2" name="Title 1"/>
           <p:cNvSpPr>
             <a:spLocks noGrp="1"/>
           </p:cNvSpPr>
@@ -10223,18 +9020,13 @@
               <a:rPr lang="en-IN" dirty="0"/>
               <a:t>JavaScript Current Time Example</a:t>
             </a:r>
-          </a:p>
-        </p:txBody>
-      </p:sp>
-      <p:sp>
-        <p:nvSpPr>
-          <p:cNvPr id="3" name="Content Placeholder 2">
-            <a:extLst>
-              <a:ext uri="{FF2B5EF4-FFF2-40B4-BE49-F238E27FC236}">
-                <a16:creationId xmlns:a16="http://schemas.microsoft.com/office/drawing/2014/main" id="{DA84696D-F77F-4408-BD47-22F828E89C7F}"/>
-              </a:ext>
-            </a:extLst>
-          </p:cNvPr>
+            <a:endParaRPr lang="en-IN" dirty="0"/>
+          </a:p>
+        </p:txBody>
+      </p:sp>
+      <p:sp>
+        <p:nvSpPr>
+          <p:cNvPr id="3" name="Content Placeholder 2"/>
           <p:cNvSpPr>
             <a:spLocks noGrp="1"/>
           </p:cNvSpPr>
@@ -10253,6 +9045,7 @@
               <a:rPr lang="en-IN" dirty="0"/>
               <a:t>Let's see the simple example to print current time of system.</a:t>
             </a:r>
+            <a:endParaRPr lang="en-IN" dirty="0"/>
           </a:p>
           <a:p>
             <a:endParaRPr lang="en-IN" dirty="0"/>
@@ -10269,6 +9062,7 @@
               <a:rPr lang="en-IN" i="1" dirty="0"/>
               <a:t>Current Time: &lt;span id="txt"&gt;&lt;/span&gt;  </a:t>
             </a:r>
+            <a:endParaRPr lang="en-IN" i="1" dirty="0"/>
           </a:p>
           <a:p>
             <a:pPr marL="0" indent="0">
@@ -10278,6 +9072,7 @@
               <a:rPr lang="en-IN" i="1" dirty="0"/>
               <a:t>	&lt;script&gt;  </a:t>
             </a:r>
+            <a:endParaRPr lang="en-IN" i="1" dirty="0"/>
           </a:p>
           <a:p>
             <a:pPr marL="0" indent="0">
@@ -10287,6 +9082,7 @@
               <a:rPr lang="en-IN" i="1" dirty="0"/>
               <a:t>	var today=new Date();  </a:t>
             </a:r>
+            <a:endParaRPr lang="en-IN" i="1" dirty="0"/>
           </a:p>
           <a:p>
             <a:pPr marL="0" indent="0">
@@ -10304,6 +9100,7 @@
               <a:rPr lang="en-IN" i="1" dirty="0"/>
               <a:t>();  </a:t>
             </a:r>
+            <a:endParaRPr lang="en-IN" i="1" dirty="0"/>
           </a:p>
           <a:p>
             <a:pPr marL="0" indent="0">
@@ -10321,6 +9118,7 @@
               <a:rPr lang="en-IN" i="1" dirty="0"/>
               <a:t>();  </a:t>
             </a:r>
+            <a:endParaRPr lang="en-IN" i="1" dirty="0"/>
           </a:p>
           <a:p>
             <a:pPr marL="0" indent="0">
@@ -10338,6 +9136,7 @@
               <a:rPr lang="en-IN" i="1" dirty="0"/>
               <a:t>();  </a:t>
             </a:r>
+            <a:endParaRPr lang="en-IN" i="1" dirty="0"/>
           </a:p>
           <a:p>
             <a:pPr marL="0" indent="0">
@@ -10363,6 +9162,7 @@
               <a:rPr lang="en-IN" i="1" dirty="0"/>
               <a:t>=h+":"+m+":"+s;  </a:t>
             </a:r>
+            <a:endParaRPr lang="en-IN" i="1" dirty="0"/>
           </a:p>
           <a:p>
             <a:pPr marL="0" indent="0">
@@ -10372,15 +9172,11 @@
               <a:rPr lang="en-IN" i="1" dirty="0"/>
               <a:t>	&lt;/script&gt; </a:t>
             </a:r>
+            <a:endParaRPr lang="en-IN" i="1" dirty="0"/>
           </a:p>
         </p:txBody>
       </p:sp>
     </p:spTree>
-    <p:extLst>
-      <p:ext uri="{BB962C8B-B14F-4D97-AF65-F5344CB8AC3E}">
-        <p14:creationId xmlns:p14="http://schemas.microsoft.com/office/powerpoint/2010/main" val="1225637090"/>
-      </p:ext>
-    </p:extLst>
   </p:cSld>
   <p:clrMapOvr>
     <a:masterClrMapping/>
@@ -10407,13 +9203,7 @@
       </p:grpSpPr>
       <p:sp>
         <p:nvSpPr>
-          <p:cNvPr id="2" name="Title 1">
-            <a:extLst>
-              <a:ext uri="{FF2B5EF4-FFF2-40B4-BE49-F238E27FC236}">
-                <a16:creationId xmlns:a16="http://schemas.microsoft.com/office/drawing/2014/main" id="{5A561EAF-BC95-4B2B-8714-AB4EF132CC1F}"/>
-              </a:ext>
-            </a:extLst>
-          </p:cNvPr>
+          <p:cNvPr id="2" name="Title 1"/>
           <p:cNvSpPr>
             <a:spLocks noGrp="1"/>
           </p:cNvSpPr>
@@ -10437,18 +9227,13 @@
               <a:rPr lang="en-IN" dirty="0"/>
               <a:t>JavaScript Digital Clock Example</a:t>
             </a:r>
-          </a:p>
-        </p:txBody>
-      </p:sp>
-      <p:sp>
-        <p:nvSpPr>
-          <p:cNvPr id="3" name="Content Placeholder 2">
-            <a:extLst>
-              <a:ext uri="{FF2B5EF4-FFF2-40B4-BE49-F238E27FC236}">
-                <a16:creationId xmlns:a16="http://schemas.microsoft.com/office/drawing/2014/main" id="{11E59D1E-144C-4CDE-B1F4-5602CCCD9FB0}"/>
-              </a:ext>
-            </a:extLst>
-          </p:cNvPr>
+            <a:endParaRPr lang="en-IN" dirty="0"/>
+          </a:p>
+        </p:txBody>
+      </p:sp>
+      <p:sp>
+        <p:nvSpPr>
+          <p:cNvPr id="3" name="Content Placeholder 2"/>
           <p:cNvSpPr>
             <a:spLocks noGrp="1"/>
           </p:cNvSpPr>
@@ -10475,6 +9260,7 @@
               <a:rPr lang="en-IN" dirty="0"/>
               <a:t>Let's see the simple example to display digital clock using JavaScript date object.</a:t>
             </a:r>
+            <a:endParaRPr lang="en-IN" dirty="0"/>
           </a:p>
           <a:p>
             <a:pPr marL="0" indent="0">
@@ -10500,6 +9286,7 @@
               <a:rPr lang="en-IN" dirty="0"/>
               <a:t>() method.</a:t>
             </a:r>
+            <a:endParaRPr lang="en-IN" dirty="0"/>
           </a:p>
           <a:p>
             <a:pPr marL="0" indent="0">
@@ -10509,6 +9296,7 @@
               <a:rPr lang="en-IN" dirty="0"/>
               <a:t>	Current Time: &lt;span id="txt"&gt;&lt;/span&gt;  </a:t>
             </a:r>
+            <a:endParaRPr lang="en-IN" dirty="0"/>
           </a:p>
           <a:p>
             <a:pPr marL="0" indent="0">
@@ -10518,6 +9306,7 @@
               <a:rPr lang="en-IN" dirty="0"/>
               <a:t>	&lt;script&gt;  </a:t>
             </a:r>
+            <a:endParaRPr lang="en-IN" dirty="0"/>
           </a:p>
           <a:p>
             <a:pPr marL="0" indent="0">
@@ -10543,6 +9332,7 @@
               <a:rPr lang="en-IN" dirty="0"/>
               <a:t>(); }  </a:t>
             </a:r>
+            <a:endParaRPr lang="en-IN" dirty="0"/>
           </a:p>
           <a:p>
             <a:pPr marL="0" indent="0">
@@ -10560,6 +9350,7 @@
               <a:rPr lang="en-IN" dirty="0"/>
               <a:t>(){  </a:t>
             </a:r>
+            <a:endParaRPr lang="en-IN" dirty="0"/>
           </a:p>
           <a:p>
             <a:pPr marL="0" indent="0">
@@ -10569,6 +9360,7 @@
               <a:rPr lang="en-IN" dirty="0"/>
               <a:t>		var today=new Date();  </a:t>
             </a:r>
+            <a:endParaRPr lang="en-IN" dirty="0"/>
           </a:p>
           <a:p>
             <a:pPr marL="0" indent="0">
@@ -10586,6 +9378,7 @@
               <a:rPr lang="en-IN" dirty="0"/>
               <a:t>();  </a:t>
             </a:r>
+            <a:endParaRPr lang="en-IN" dirty="0"/>
           </a:p>
           <a:p>
             <a:pPr marL="0" indent="0">
@@ -10603,6 +9396,7 @@
               <a:rPr lang="en-IN" dirty="0"/>
               <a:t>();  </a:t>
             </a:r>
+            <a:endParaRPr lang="en-IN" dirty="0"/>
           </a:p>
           <a:p>
             <a:pPr marL="0" indent="0">
@@ -10620,6 +9414,7 @@
               <a:rPr lang="en-IN" dirty="0"/>
               <a:t>();  </a:t>
             </a:r>
+            <a:endParaRPr lang="en-IN" dirty="0"/>
           </a:p>
           <a:p>
             <a:pPr marL="0" indent="0">
@@ -10629,6 +9424,7 @@
               <a:rPr lang="en-IN" dirty="0"/>
               <a:t>		// add a zero in front of numbers&lt;10  </a:t>
             </a:r>
+            <a:endParaRPr lang="en-IN" dirty="0"/>
           </a:p>
           <a:p>
             <a:pPr marL="0" indent="0">
@@ -10646,6 +9442,7 @@
               <a:rPr lang="en-IN" dirty="0"/>
               <a:t>(m);  </a:t>
             </a:r>
+            <a:endParaRPr lang="en-IN" dirty="0"/>
           </a:p>
           <a:p>
             <a:pPr marL="0" indent="0">
@@ -10663,6 +9460,7 @@
               <a:rPr lang="en-IN" dirty="0"/>
               <a:t>(s);  </a:t>
             </a:r>
+            <a:endParaRPr lang="en-IN" dirty="0"/>
           </a:p>
           <a:p>
             <a:pPr marL="0" indent="0">
@@ -10688,6 +9486,7 @@
               <a:rPr lang="en-IN" dirty="0"/>
               <a:t>=h+":"+m+":"+s;  </a:t>
             </a:r>
+            <a:endParaRPr lang="en-IN" dirty="0"/>
           </a:p>
           <a:p>
             <a:pPr marL="0" indent="0">
@@ -10713,6 +9512,7 @@
               <a:rPr lang="en-IN" dirty="0"/>
               <a:t>()},1000);  </a:t>
             </a:r>
+            <a:endParaRPr lang="en-IN" dirty="0"/>
           </a:p>
           <a:p>
             <a:pPr marL="0" indent="0">
@@ -10722,6 +9522,7 @@
               <a:rPr lang="en-IN" dirty="0"/>
               <a:t>	}  </a:t>
             </a:r>
+            <a:endParaRPr lang="en-IN" dirty="0"/>
           </a:p>
           <a:p>
             <a:pPr marL="0" indent="0">
@@ -10747,6 +9548,7 @@
               <a:rPr lang="en-IN" dirty="0"/>
               <a:t>()",1000);//another way  </a:t>
             </a:r>
+            <a:endParaRPr lang="en-IN" dirty="0"/>
           </a:p>
           <a:p>
             <a:pPr marL="0" indent="0">
@@ -10772,6 +9574,7 @@
               <a:rPr lang="en-IN" dirty="0"/>
               <a:t>){  </a:t>
             </a:r>
+            <a:endParaRPr lang="en-IN" dirty="0"/>
           </a:p>
           <a:p>
             <a:pPr marL="0" indent="0">
@@ -10789,6 +9592,7 @@
               <a:rPr lang="en-IN" dirty="0"/>
               <a:t>&lt;10){  </a:t>
             </a:r>
+            <a:endParaRPr lang="en-IN" dirty="0"/>
           </a:p>
           <a:p>
             <a:pPr marL="0" indent="0">
@@ -10814,6 +9618,7 @@
               <a:rPr lang="en-IN" dirty="0"/>
               <a:t>;  </a:t>
             </a:r>
+            <a:endParaRPr lang="en-IN" dirty="0"/>
           </a:p>
           <a:p>
             <a:pPr marL="0" indent="0">
@@ -10823,6 +9628,7 @@
               <a:rPr lang="en-IN" dirty="0"/>
               <a:t>		}  </a:t>
             </a:r>
+            <a:endParaRPr lang="en-IN" dirty="0"/>
           </a:p>
           <a:p>
             <a:pPr marL="0" indent="0">
@@ -10840,6 +9646,7 @@
               <a:rPr lang="en-IN" dirty="0"/>
               <a:t>;  </a:t>
             </a:r>
+            <a:endParaRPr lang="en-IN" dirty="0"/>
           </a:p>
           <a:p>
             <a:pPr marL="0" indent="0">
@@ -10849,6 +9656,7 @@
               <a:rPr lang="en-IN" dirty="0"/>
               <a:t>	}  </a:t>
             </a:r>
+            <a:endParaRPr lang="en-IN" dirty="0"/>
           </a:p>
           <a:p>
             <a:pPr marL="0" indent="0">
@@ -10858,15 +9666,11 @@
               <a:rPr lang="en-IN" dirty="0"/>
               <a:t>	&lt;/script&gt; </a:t>
             </a:r>
+            <a:endParaRPr lang="en-IN" dirty="0"/>
           </a:p>
         </p:txBody>
       </p:sp>
     </p:spTree>
-    <p:extLst>
-      <p:ext uri="{BB962C8B-B14F-4D97-AF65-F5344CB8AC3E}">
-        <p14:creationId xmlns:p14="http://schemas.microsoft.com/office/powerpoint/2010/main" val="139951094"/>
-      </p:ext>
-    </p:extLst>
   </p:cSld>
   <p:clrMapOvr>
     <a:masterClrMapping/>
@@ -10893,13 +9697,7 @@
       </p:grpSpPr>
       <p:sp>
         <p:nvSpPr>
-          <p:cNvPr id="2" name="Title 1">
-            <a:extLst>
-              <a:ext uri="{FF2B5EF4-FFF2-40B4-BE49-F238E27FC236}">
-                <a16:creationId xmlns:a16="http://schemas.microsoft.com/office/drawing/2014/main" id="{F021DAFD-1211-45D1-B32C-8C1076A7B1DF}"/>
-              </a:ext>
-            </a:extLst>
-          </p:cNvPr>
+          <p:cNvPr id="2" name="Title 1"/>
           <p:cNvSpPr>
             <a:spLocks noGrp="1"/>
           </p:cNvSpPr>
@@ -10922,13 +9720,7 @@
       </p:sp>
       <p:sp>
         <p:nvSpPr>
-          <p:cNvPr id="3" name="Content Placeholder 2">
-            <a:extLst>
-              <a:ext uri="{FF2B5EF4-FFF2-40B4-BE49-F238E27FC236}">
-                <a16:creationId xmlns:a16="http://schemas.microsoft.com/office/drawing/2014/main" id="{4F56C220-1183-4C09-B125-9D8E27B3DEE8}"/>
-              </a:ext>
-            </a:extLst>
-          </p:cNvPr>
+          <p:cNvPr id="3" name="Content Placeholder 2"/>
           <p:cNvSpPr>
             <a:spLocks noGrp="1"/>
           </p:cNvSpPr>
@@ -10947,6 +9739,7 @@
               <a:rPr lang="en-US" dirty="0"/>
               <a:t>The Browser Object Model (BOM) is used to interact with the browser.</a:t>
             </a:r>
+            <a:endParaRPr lang="en-US" dirty="0"/>
           </a:p>
           <a:p>
             <a:endParaRPr lang="en-US" dirty="0"/>
@@ -10956,6 +9749,7 @@
               <a:rPr lang="en-US" dirty="0"/>
               <a:t>The default object of browser is window means you can call all the functions of window by specifying window or directly. For example:</a:t>
             </a:r>
+            <a:endParaRPr lang="en-US" dirty="0"/>
           </a:p>
           <a:p>
             <a:endParaRPr lang="en-US" dirty="0"/>
@@ -10984,6 +9778,7 @@
               <a:rPr lang="en-US" dirty="0"/>
               <a:t>");  </a:t>
             </a:r>
+            <a:endParaRPr lang="en-US" dirty="0"/>
           </a:p>
           <a:p>
             <a:pPr marL="0" indent="0">
@@ -10993,6 +9788,7 @@
               <a:rPr lang="en-US" dirty="0"/>
               <a:t>	is same as:</a:t>
             </a:r>
+            <a:endParaRPr lang="en-US" dirty="0"/>
           </a:p>
           <a:p>
             <a:pPr marL="0" indent="0">
@@ -11010,6 +9806,7 @@
               <a:rPr lang="en-US" dirty="0"/>
               <a:t>");  </a:t>
             </a:r>
+            <a:endParaRPr lang="en-US" dirty="0"/>
           </a:p>
           <a:p>
             <a:pPr marL="0" indent="0">
@@ -11043,11 +9840,6 @@
         </p:txBody>
       </p:sp>
     </p:spTree>
-    <p:extLst>
-      <p:ext uri="{BB962C8B-B14F-4D97-AF65-F5344CB8AC3E}">
-        <p14:creationId xmlns:p14="http://schemas.microsoft.com/office/powerpoint/2010/main" val="1688718634"/>
-      </p:ext>
-    </p:extLst>
   </p:cSld>
   <p:clrMapOvr>
     <a:masterClrMapping/>
@@ -11074,13 +9866,7 @@
       </p:grpSpPr>
       <p:sp>
         <p:nvSpPr>
-          <p:cNvPr id="2" name="Title 1">
-            <a:extLst>
-              <a:ext uri="{FF2B5EF4-FFF2-40B4-BE49-F238E27FC236}">
-                <a16:creationId xmlns:a16="http://schemas.microsoft.com/office/drawing/2014/main" id="{BED7D11D-0522-4F93-9D50-972BC2698165}"/>
-              </a:ext>
-            </a:extLst>
-          </p:cNvPr>
+          <p:cNvPr id="2" name="Title 1"/>
           <p:cNvSpPr>
             <a:spLocks noGrp="1"/>
           </p:cNvSpPr>
@@ -11097,18 +9883,13 @@
               <a:rPr lang="en-IN" dirty="0"/>
               <a:t>Application of JavaScript</a:t>
             </a:r>
-          </a:p>
-        </p:txBody>
-      </p:sp>
-      <p:sp>
-        <p:nvSpPr>
-          <p:cNvPr id="3" name="Content Placeholder 2">
-            <a:extLst>
-              <a:ext uri="{FF2B5EF4-FFF2-40B4-BE49-F238E27FC236}">
-                <a16:creationId xmlns:a16="http://schemas.microsoft.com/office/drawing/2014/main" id="{462C5AC1-F0EE-4F82-8C82-C2890CF1AC83}"/>
-              </a:ext>
-            </a:extLst>
-          </p:cNvPr>
+            <a:endParaRPr lang="en-IN" dirty="0"/>
+          </a:p>
+        </p:txBody>
+      </p:sp>
+      <p:sp>
+        <p:nvSpPr>
+          <p:cNvPr id="3" name="Content Placeholder 2"/>
           <p:cNvSpPr>
             <a:spLocks noGrp="1"/>
           </p:cNvSpPr>
@@ -11130,6 +9911,7 @@
               <a:rPr lang="en-IN" dirty="0"/>
               <a:t>JavaScript is used to create interactive websites. It is mainly used for:</a:t>
             </a:r>
+            <a:endParaRPr lang="en-IN" dirty="0"/>
           </a:p>
           <a:p>
             <a:pPr algn="just"/>
@@ -11141,6 +9923,7 @@
               <a:rPr lang="en-IN" dirty="0"/>
               <a:t>Client-side validation,</a:t>
             </a:r>
+            <a:endParaRPr lang="en-IN" dirty="0"/>
           </a:p>
           <a:p>
             <a:pPr algn="just"/>
@@ -11148,6 +9931,7 @@
               <a:rPr lang="en-IN" dirty="0"/>
               <a:t>Dynamic drop-down menus,</a:t>
             </a:r>
+            <a:endParaRPr lang="en-IN" dirty="0"/>
           </a:p>
           <a:p>
             <a:pPr algn="just"/>
@@ -11155,6 +9939,7 @@
               <a:rPr lang="en-IN" dirty="0"/>
               <a:t>Displaying date and time,</a:t>
             </a:r>
+            <a:endParaRPr lang="en-IN" dirty="0"/>
           </a:p>
           <a:p>
             <a:pPr algn="just"/>
@@ -11162,6 +9947,7 @@
               <a:rPr lang="en-IN" dirty="0"/>
               <a:t>Displaying pop-up windows and dialog boxes (like an alert dialog box, confirm dialog box and prompt dialog box),</a:t>
             </a:r>
+            <a:endParaRPr lang="en-IN" dirty="0"/>
           </a:p>
           <a:p>
             <a:pPr algn="just"/>
@@ -11169,15 +9955,11 @@
               <a:rPr lang="en-IN" dirty="0"/>
               <a:t>Displaying clocks etc.</a:t>
             </a:r>
+            <a:endParaRPr lang="en-IN" dirty="0"/>
           </a:p>
         </p:txBody>
       </p:sp>
     </p:spTree>
-    <p:extLst>
-      <p:ext uri="{BB962C8B-B14F-4D97-AF65-F5344CB8AC3E}">
-        <p14:creationId xmlns:p14="http://schemas.microsoft.com/office/powerpoint/2010/main" val="170238564"/>
-      </p:ext>
-    </p:extLst>
   </p:cSld>
   <p:clrMapOvr>
     <a:masterClrMapping/>
@@ -11204,13 +9986,7 @@
       </p:grpSpPr>
       <p:sp>
         <p:nvSpPr>
-          <p:cNvPr id="2" name="Title 1">
-            <a:extLst>
-              <a:ext uri="{FF2B5EF4-FFF2-40B4-BE49-F238E27FC236}">
-                <a16:creationId xmlns:a16="http://schemas.microsoft.com/office/drawing/2014/main" id="{85D4506C-E83F-4892-8B2A-10F8106E6344}"/>
-              </a:ext>
-            </a:extLst>
-          </p:cNvPr>
+          <p:cNvPr id="2" name="Title 1"/>
           <p:cNvSpPr>
             <a:spLocks noGrp="1"/>
           </p:cNvSpPr>
@@ -11233,20 +10009,14 @@
       </p:sp>
       <p:pic>
         <p:nvPicPr>
-          <p:cNvPr id="5" name="Picture 4">
-            <a:extLst>
-              <a:ext uri="{FF2B5EF4-FFF2-40B4-BE49-F238E27FC236}">
-                <a16:creationId xmlns:a16="http://schemas.microsoft.com/office/drawing/2014/main" id="{62E7911D-3FA1-42C5-92A2-1C0CE5E559F8}"/>
-              </a:ext>
-            </a:extLst>
-          </p:cNvPr>
+          <p:cNvPr id="5" name="Picture 4"/>
           <p:cNvPicPr>
             <a:picLocks noChangeAspect="1"/>
           </p:cNvPicPr>
           <p:nvPr/>
         </p:nvPicPr>
         <p:blipFill>
-          <a:blip r:embed="rId2"/>
+          <a:blip r:embed="rId1"/>
           <a:stretch>
             <a:fillRect/>
           </a:stretch>
@@ -11262,11 +10032,6 @@
         </p:spPr>
       </p:pic>
     </p:spTree>
-    <p:extLst>
-      <p:ext uri="{BB962C8B-B14F-4D97-AF65-F5344CB8AC3E}">
-        <p14:creationId xmlns:p14="http://schemas.microsoft.com/office/powerpoint/2010/main" val="3635606618"/>
-      </p:ext>
-    </p:extLst>
   </p:cSld>
   <p:clrMapOvr>
     <a:masterClrMapping/>
@@ -11293,13 +10058,7 @@
       </p:grpSpPr>
       <p:sp>
         <p:nvSpPr>
-          <p:cNvPr id="2" name="Title 1">
-            <a:extLst>
-              <a:ext uri="{FF2B5EF4-FFF2-40B4-BE49-F238E27FC236}">
-                <a16:creationId xmlns:a16="http://schemas.microsoft.com/office/drawing/2014/main" id="{77900596-D1D6-4158-8565-933DE42A038D}"/>
-              </a:ext>
-            </a:extLst>
-          </p:cNvPr>
+          <p:cNvPr id="2" name="Title 1"/>
           <p:cNvSpPr>
             <a:spLocks noGrp="1"/>
           </p:cNvSpPr>
@@ -11322,13 +10081,7 @@
       </p:sp>
       <p:sp>
         <p:nvSpPr>
-          <p:cNvPr id="3" name="Content Placeholder 2">
-            <a:extLst>
-              <a:ext uri="{FF2B5EF4-FFF2-40B4-BE49-F238E27FC236}">
-                <a16:creationId xmlns:a16="http://schemas.microsoft.com/office/drawing/2014/main" id="{1F8D8A7E-0709-48A5-A14F-401082A2A914}"/>
-              </a:ext>
-            </a:extLst>
-          </p:cNvPr>
+          <p:cNvPr id="3" name="Content Placeholder 2"/>
           <p:cNvSpPr>
             <a:spLocks noGrp="1"/>
           </p:cNvSpPr>
@@ -11347,6 +10100,7 @@
               <a:rPr lang="en-US" dirty="0"/>
               <a:t>The window object represents a window in browser. An object of window is created automatically by the browser.</a:t>
             </a:r>
+            <a:endParaRPr lang="en-US" dirty="0"/>
           </a:p>
           <a:p>
             <a:endParaRPr lang="en-US" dirty="0"/>
@@ -11372,6 +10126,7 @@
               <a:rPr lang="en-US" dirty="0"/>
               <a:t> objects are string, array, date etc.</a:t>
             </a:r>
+            <a:endParaRPr lang="en-US" dirty="0"/>
           </a:p>
           <a:p>
             <a:endParaRPr lang="en-US" dirty="0"/>
@@ -11381,6 +10136,7 @@
               <a:rPr lang="en-US" dirty="0"/>
               <a:t>The important methods of window object are as follows:</a:t>
             </a:r>
+            <a:endParaRPr lang="en-US" dirty="0"/>
           </a:p>
           <a:p>
             <a:pPr marL="0" indent="0">
@@ -11396,6 +10152,7 @@
               <a:rPr lang="en-US" dirty="0"/>
               <a:t>alert()	displays the alert box containing message with ok button.</a:t>
             </a:r>
+            <a:endParaRPr lang="en-US" dirty="0"/>
           </a:p>
           <a:p>
             <a:pPr marL="0" indent="0">
@@ -11405,6 +10162,7 @@
               <a:rPr lang="en-US" dirty="0"/>
               <a:t>confirm()	displays the confirm dialog box containing message with ok and cancel button.</a:t>
             </a:r>
+            <a:endParaRPr lang="en-US" dirty="0"/>
           </a:p>
           <a:p>
             <a:pPr marL="0" indent="0">
@@ -11414,6 +10172,7 @@
               <a:rPr lang="en-US" dirty="0"/>
               <a:t>prompt()	displays a dialog box to get input from the user.</a:t>
             </a:r>
+            <a:endParaRPr lang="en-US" dirty="0"/>
           </a:p>
           <a:p>
             <a:pPr marL="0" indent="0">
@@ -11423,6 +10182,7 @@
               <a:rPr lang="en-US" dirty="0"/>
               <a:t>open()	opens the new window.</a:t>
             </a:r>
+            <a:endParaRPr lang="en-US" dirty="0"/>
           </a:p>
           <a:p>
             <a:pPr marL="0" indent="0">
@@ -11432,6 +10192,7 @@
               <a:rPr lang="en-US" dirty="0"/>
               <a:t>close()	closes the current window.</a:t>
             </a:r>
+            <a:endParaRPr lang="en-US" dirty="0"/>
           </a:p>
           <a:p>
             <a:pPr marL="0" indent="0">
@@ -11450,11 +10211,6 @@
         </p:txBody>
       </p:sp>
     </p:spTree>
-    <p:extLst>
-      <p:ext uri="{BB962C8B-B14F-4D97-AF65-F5344CB8AC3E}">
-        <p14:creationId xmlns:p14="http://schemas.microsoft.com/office/powerpoint/2010/main" val="2811337222"/>
-      </p:ext>
-    </p:extLst>
   </p:cSld>
   <p:clrMapOvr>
     <a:masterClrMapping/>
@@ -11481,13 +10237,7 @@
       </p:grpSpPr>
       <p:sp>
         <p:nvSpPr>
-          <p:cNvPr id="2" name="Title 1">
-            <a:extLst>
-              <a:ext uri="{FF2B5EF4-FFF2-40B4-BE49-F238E27FC236}">
-                <a16:creationId xmlns:a16="http://schemas.microsoft.com/office/drawing/2014/main" id="{1B6C5A73-C075-4A3E-B1C7-1F3FE177E79E}"/>
-              </a:ext>
-            </a:extLst>
-          </p:cNvPr>
+          <p:cNvPr id="2" name="Title 1"/>
           <p:cNvSpPr>
             <a:spLocks noGrp="1"/>
           </p:cNvSpPr>
@@ -11514,13 +10264,7 @@
       </p:sp>
       <p:sp>
         <p:nvSpPr>
-          <p:cNvPr id="3" name="Content Placeholder 2">
-            <a:extLst>
-              <a:ext uri="{FF2B5EF4-FFF2-40B4-BE49-F238E27FC236}">
-                <a16:creationId xmlns:a16="http://schemas.microsoft.com/office/drawing/2014/main" id="{65117B9B-06FD-4CF8-A6B9-3A3578602E75}"/>
-              </a:ext>
-            </a:extLst>
-          </p:cNvPr>
+          <p:cNvPr id="3" name="Content Placeholder 2"/>
           <p:cNvSpPr>
             <a:spLocks noGrp="1"/>
           </p:cNvSpPr>
@@ -11539,6 +10283,7 @@
               <a:rPr lang="en-US" dirty="0"/>
               <a:t>It displays the content in a new window.</a:t>
             </a:r>
+            <a:endParaRPr lang="en-US" dirty="0"/>
           </a:p>
           <a:p>
             <a:endParaRPr lang="en-US" dirty="0"/>
@@ -11559,6 +10304,7 @@
               <a:rPr lang="en-US" dirty="0"/>
               <a:t>"&gt;  </a:t>
             </a:r>
+            <a:endParaRPr lang="en-US" dirty="0"/>
           </a:p>
           <a:p>
             <a:pPr marL="0" indent="0">
@@ -11568,6 +10314,7 @@
               <a:rPr lang="en-US" dirty="0"/>
               <a:t>	function msg(){  </a:t>
             </a:r>
+            <a:endParaRPr lang="en-US" dirty="0"/>
           </a:p>
           <a:p>
             <a:pPr marL="0" indent="0">
@@ -11577,6 +10324,7 @@
               <a:rPr lang="en-US" dirty="0"/>
               <a:t>	open("http://www.javatpoint.com");  </a:t>
             </a:r>
+            <a:endParaRPr lang="en-US" dirty="0"/>
           </a:p>
           <a:p>
             <a:pPr marL="0" indent="0">
@@ -11586,6 +10334,7 @@
               <a:rPr lang="en-US" dirty="0"/>
               <a:t>	}  </a:t>
             </a:r>
+            <a:endParaRPr lang="en-US" dirty="0"/>
           </a:p>
           <a:p>
             <a:pPr marL="0" indent="0">
@@ -11595,6 +10344,7 @@
               <a:rPr lang="en-US" dirty="0"/>
               <a:t>	&lt;/script&gt;  </a:t>
             </a:r>
+            <a:endParaRPr lang="en-US" dirty="0"/>
           </a:p>
           <a:p>
             <a:pPr marL="0" indent="0">
@@ -11617,11 +10367,6 @@
         </p:txBody>
       </p:sp>
     </p:spTree>
-    <p:extLst>
-      <p:ext uri="{BB962C8B-B14F-4D97-AF65-F5344CB8AC3E}">
-        <p14:creationId xmlns:p14="http://schemas.microsoft.com/office/powerpoint/2010/main" val="1287825339"/>
-      </p:ext>
-    </p:extLst>
   </p:cSld>
   <p:clrMapOvr>
     <a:masterClrMapping/>
@@ -11648,13 +10393,7 @@
       </p:grpSpPr>
       <p:sp>
         <p:nvSpPr>
-          <p:cNvPr id="2" name="Title 1">
-            <a:extLst>
-              <a:ext uri="{FF2B5EF4-FFF2-40B4-BE49-F238E27FC236}">
-                <a16:creationId xmlns:a16="http://schemas.microsoft.com/office/drawing/2014/main" id="{0AA3A868-A765-407B-A085-0202F18E8BA6}"/>
-              </a:ext>
-            </a:extLst>
-          </p:cNvPr>
+          <p:cNvPr id="2" name="Title 1"/>
           <p:cNvSpPr>
             <a:spLocks noGrp="1"/>
           </p:cNvSpPr>
@@ -11689,13 +10428,7 @@
       </p:sp>
       <p:sp>
         <p:nvSpPr>
-          <p:cNvPr id="3" name="Content Placeholder 2">
-            <a:extLst>
-              <a:ext uri="{FF2B5EF4-FFF2-40B4-BE49-F238E27FC236}">
-                <a16:creationId xmlns:a16="http://schemas.microsoft.com/office/drawing/2014/main" id="{A0B6D751-FF84-430B-AFCF-281DA989558A}"/>
-              </a:ext>
-            </a:extLst>
-          </p:cNvPr>
+          <p:cNvPr id="3" name="Content Placeholder 2"/>
           <p:cNvSpPr>
             <a:spLocks noGrp="1"/>
           </p:cNvSpPr>
@@ -11714,6 +10447,7 @@
               <a:rPr lang="en-IN" dirty="0"/>
               <a:t>It performs its task after the given milliseconds.</a:t>
             </a:r>
+            <a:endParaRPr lang="en-IN" dirty="0"/>
           </a:p>
           <a:p>
             <a:endParaRPr lang="en-IN" dirty="0"/>
@@ -11734,6 +10468,7 @@
               <a:rPr lang="en-IN" dirty="0"/>
               <a:t>"&gt;  </a:t>
             </a:r>
+            <a:endParaRPr lang="en-IN" dirty="0"/>
           </a:p>
           <a:p>
             <a:pPr marL="0" indent="0">
@@ -11751,6 +10486,7 @@
               <a:rPr lang="en-IN" dirty="0"/>
               <a:t>(){  </a:t>
             </a:r>
+            <a:endParaRPr lang="en-IN" dirty="0"/>
           </a:p>
           <a:p>
             <a:pPr marL="0" indent="0">
@@ -11768,6 +10504,7 @@
               <a:rPr lang="en-IN" dirty="0"/>
               <a:t>(  </a:t>
             </a:r>
+            <a:endParaRPr lang="en-IN" dirty="0"/>
           </a:p>
           <a:p>
             <a:pPr marL="0" indent="0">
@@ -11777,6 +10514,7 @@
               <a:rPr lang="en-IN" dirty="0"/>
               <a:t>	function(){  </a:t>
             </a:r>
+            <a:endParaRPr lang="en-IN" dirty="0"/>
           </a:p>
           <a:p>
             <a:pPr marL="0" indent="0">
@@ -11794,6 +10532,7 @@
               <a:rPr lang="en-IN" dirty="0"/>
               <a:t> after 2 seconds")  </a:t>
             </a:r>
+            <a:endParaRPr lang="en-IN" dirty="0"/>
           </a:p>
           <a:p>
             <a:pPr marL="0" indent="0">
@@ -11803,6 +10542,7 @@
               <a:rPr lang="en-IN" dirty="0"/>
               <a:t>	},2000);  </a:t>
             </a:r>
+            <a:endParaRPr lang="en-IN" dirty="0"/>
           </a:p>
           <a:p>
             <a:pPr marL="0" indent="0">
@@ -11812,6 +10552,7 @@
               <a:rPr lang="en-IN" dirty="0"/>
               <a:t>	}  </a:t>
             </a:r>
+            <a:endParaRPr lang="en-IN" dirty="0"/>
           </a:p>
           <a:p>
             <a:pPr marL="0" indent="0">
@@ -11821,6 +10562,7 @@
               <a:rPr lang="en-IN" dirty="0"/>
               <a:t>	&lt;/script&gt;    </a:t>
             </a:r>
+            <a:endParaRPr lang="en-IN" dirty="0"/>
           </a:p>
           <a:p>
             <a:pPr marL="0" indent="0">
@@ -11838,15 +10580,11 @@
               <a:rPr lang="en-IN" dirty="0"/>
               <a:t>()"/&gt; </a:t>
             </a:r>
+            <a:endParaRPr lang="en-IN" dirty="0"/>
           </a:p>
         </p:txBody>
       </p:sp>
     </p:spTree>
-    <p:extLst>
-      <p:ext uri="{BB962C8B-B14F-4D97-AF65-F5344CB8AC3E}">
-        <p14:creationId xmlns:p14="http://schemas.microsoft.com/office/powerpoint/2010/main" val="3172834056"/>
-      </p:ext>
-    </p:extLst>
   </p:cSld>
   <p:clrMapOvr>
     <a:masterClrMapping/>
@@ -11873,13 +10611,7 @@
       </p:grpSpPr>
       <p:sp>
         <p:nvSpPr>
-          <p:cNvPr id="2" name="Title 1">
-            <a:extLst>
-              <a:ext uri="{FF2B5EF4-FFF2-40B4-BE49-F238E27FC236}">
-                <a16:creationId xmlns:a16="http://schemas.microsoft.com/office/drawing/2014/main" id="{E7DDF94C-8FC2-4B41-AFA0-AD403C3C6527}"/>
-              </a:ext>
-            </a:extLst>
-          </p:cNvPr>
+          <p:cNvPr id="2" name="Title 1"/>
           <p:cNvSpPr>
             <a:spLocks noGrp="1"/>
           </p:cNvSpPr>
@@ -11902,13 +10634,7 @@
       </p:sp>
       <p:sp>
         <p:nvSpPr>
-          <p:cNvPr id="3" name="Content Placeholder 2">
-            <a:extLst>
-              <a:ext uri="{FF2B5EF4-FFF2-40B4-BE49-F238E27FC236}">
-                <a16:creationId xmlns:a16="http://schemas.microsoft.com/office/drawing/2014/main" id="{1E3EC328-C0C0-4FB2-A2FB-AE3A624780F9}"/>
-              </a:ext>
-            </a:extLst>
-          </p:cNvPr>
+          <p:cNvPr id="3" name="Content Placeholder 2"/>
           <p:cNvSpPr>
             <a:spLocks noGrp="1"/>
           </p:cNvSpPr>
@@ -11927,12 +10653,14 @@
               <a:rPr lang="en-US" dirty="0"/>
               <a:t>The JavaScript history object represents an array of URLs visited by the user. </a:t>
             </a:r>
+            <a:endParaRPr lang="en-US" dirty="0"/>
           </a:p>
           <a:p>
             <a:r>
               <a:rPr lang="en-US" dirty="0"/>
               <a:t>By using this object, you can load previous, forward or any particular page.</a:t>
             </a:r>
+            <a:endParaRPr lang="en-US" dirty="0"/>
           </a:p>
           <a:p>
             <a:endParaRPr lang="en-US" dirty="0"/>
@@ -11942,6 +10670,7 @@
               <a:rPr lang="en-US" dirty="0"/>
               <a:t>The history object is the window property, so it can be accessed by:</a:t>
             </a:r>
+            <a:endParaRPr lang="en-US" dirty="0"/>
           </a:p>
           <a:p>
             <a:endParaRPr lang="en-US" dirty="0"/>
@@ -11962,6 +10691,7 @@
               <a:rPr lang="en-US" dirty="0"/>
               <a:t>  </a:t>
             </a:r>
+            <a:endParaRPr lang="en-US" dirty="0"/>
           </a:p>
           <a:p>
             <a:pPr marL="0" indent="0">
@@ -11971,6 +10701,7 @@
               <a:rPr lang="en-US" dirty="0"/>
               <a:t>	Or,</a:t>
             </a:r>
+            <a:endParaRPr lang="en-US" dirty="0"/>
           </a:p>
           <a:p>
             <a:pPr marL="0" indent="0">
@@ -11985,11 +10716,6 @@
         </p:txBody>
       </p:sp>
     </p:spTree>
-    <p:extLst>
-      <p:ext uri="{BB962C8B-B14F-4D97-AF65-F5344CB8AC3E}">
-        <p14:creationId xmlns:p14="http://schemas.microsoft.com/office/powerpoint/2010/main" val="3390428568"/>
-      </p:ext>
-    </p:extLst>
   </p:cSld>
   <p:clrMapOvr>
     <a:masterClrMapping/>
@@ -12016,13 +10742,7 @@
       </p:grpSpPr>
       <p:sp>
         <p:nvSpPr>
-          <p:cNvPr id="2" name="Title 1">
-            <a:extLst>
-              <a:ext uri="{FF2B5EF4-FFF2-40B4-BE49-F238E27FC236}">
-                <a16:creationId xmlns:a16="http://schemas.microsoft.com/office/drawing/2014/main" id="{ED614860-9B7F-4153-8C86-9BFA6584F3E4}"/>
-              </a:ext>
-            </a:extLst>
-          </p:cNvPr>
+          <p:cNvPr id="2" name="Title 1"/>
           <p:cNvSpPr>
             <a:spLocks noGrp="1"/>
           </p:cNvSpPr>
@@ -12045,13 +10765,7 @@
       </p:sp>
       <p:sp>
         <p:nvSpPr>
-          <p:cNvPr id="3" name="Content Placeholder 2">
-            <a:extLst>
-              <a:ext uri="{FF2B5EF4-FFF2-40B4-BE49-F238E27FC236}">
-                <a16:creationId xmlns:a16="http://schemas.microsoft.com/office/drawing/2014/main" id="{61FCBB55-B981-4EAC-97F2-0B26906D0CA5}"/>
-              </a:ext>
-            </a:extLst>
-          </p:cNvPr>
+          <p:cNvPr id="3" name="Content Placeholder 2"/>
           <p:cNvSpPr>
             <a:spLocks noGrp="1"/>
           </p:cNvSpPr>
@@ -12070,6 +10784,7 @@
               <a:rPr lang="en-US" dirty="0"/>
               <a:t>There are only 1 property of history object.</a:t>
             </a:r>
+            <a:endParaRPr lang="en-US" dirty="0"/>
           </a:p>
           <a:p>
             <a:endParaRPr lang="en-US" dirty="0"/>
@@ -12079,12 +10794,14 @@
               <a:rPr lang="en-US" dirty="0"/>
               <a:t>Property	Description</a:t>
             </a:r>
+            <a:endParaRPr lang="en-US" dirty="0"/>
           </a:p>
           <a:p>
             <a:r>
               <a:rPr lang="en-US" dirty="0"/>
               <a:t>length	returns the length of the history URLs.</a:t>
             </a:r>
+            <a:endParaRPr lang="en-US" dirty="0"/>
           </a:p>
           <a:p>
             <a:endParaRPr lang="en-US" dirty="0"/>
@@ -12094,6 +10811,7 @@
               <a:rPr lang="en-US" dirty="0"/>
               <a:t>There are only 3 methods of history object.</a:t>
             </a:r>
+            <a:endParaRPr lang="en-US" dirty="0"/>
           </a:p>
           <a:p>
             <a:endParaRPr lang="en-US" dirty="0"/>
@@ -12103,33 +10821,32 @@
               <a:rPr lang="en-US" dirty="0"/>
               <a:t>Method	Description</a:t>
             </a:r>
+            <a:endParaRPr lang="en-US" dirty="0"/>
           </a:p>
           <a:p>
             <a:r>
               <a:rPr lang="en-US" dirty="0"/>
               <a:t>forward()	loads the next page.</a:t>
             </a:r>
+            <a:endParaRPr lang="en-US" dirty="0"/>
           </a:p>
           <a:p>
             <a:r>
               <a:rPr lang="en-US" dirty="0"/>
               <a:t>back()	loads the previous page.</a:t>
             </a:r>
+            <a:endParaRPr lang="en-US" dirty="0"/>
           </a:p>
           <a:p>
             <a:r>
               <a:rPr lang="en-US" dirty="0"/>
               <a:t>go()		loads the given page number.</a:t>
             </a:r>
+            <a:endParaRPr lang="en-US" dirty="0"/>
           </a:p>
         </p:txBody>
       </p:sp>
     </p:spTree>
-    <p:extLst>
-      <p:ext uri="{BB962C8B-B14F-4D97-AF65-F5344CB8AC3E}">
-        <p14:creationId xmlns:p14="http://schemas.microsoft.com/office/powerpoint/2010/main" val="1493763610"/>
-      </p:ext>
-    </p:extLst>
   </p:cSld>
   <p:clrMapOvr>
     <a:masterClrMapping/>
@@ -12156,13 +10873,7 @@
       </p:grpSpPr>
       <p:sp>
         <p:nvSpPr>
-          <p:cNvPr id="2" name="Title 1">
-            <a:extLst>
-              <a:ext uri="{FF2B5EF4-FFF2-40B4-BE49-F238E27FC236}">
-                <a16:creationId xmlns:a16="http://schemas.microsoft.com/office/drawing/2014/main" id="{58CD4C08-B85F-4474-B2EE-B9CFC6C8413B}"/>
-              </a:ext>
-            </a:extLst>
-          </p:cNvPr>
+          <p:cNvPr id="2" name="Title 1"/>
           <p:cNvSpPr>
             <a:spLocks noGrp="1"/>
           </p:cNvSpPr>
@@ -12185,13 +10896,7 @@
       </p:sp>
       <p:sp>
         <p:nvSpPr>
-          <p:cNvPr id="3" name="Content Placeholder 2">
-            <a:extLst>
-              <a:ext uri="{FF2B5EF4-FFF2-40B4-BE49-F238E27FC236}">
-                <a16:creationId xmlns:a16="http://schemas.microsoft.com/office/drawing/2014/main" id="{526751EB-05D9-4380-A17C-ACB4183BF65C}"/>
-              </a:ext>
-            </a:extLst>
-          </p:cNvPr>
+          <p:cNvPr id="3" name="Content Placeholder 2"/>
           <p:cNvSpPr>
             <a:spLocks noGrp="1"/>
           </p:cNvSpPr>
@@ -12208,6 +10913,7 @@
               <a:rPr lang="en-US" dirty="0"/>
               <a:t>Let’s see the different usage of history object.</a:t>
             </a:r>
+            <a:endParaRPr lang="en-US" dirty="0"/>
           </a:p>
           <a:p>
             <a:endParaRPr lang="en-US" dirty="0"/>
@@ -12228,6 +10934,7 @@
               <a:rPr lang="en-US" dirty="0"/>
               <a:t>();//for previous page  </a:t>
             </a:r>
+            <a:endParaRPr lang="en-US" dirty="0"/>
           </a:p>
           <a:p>
             <a:pPr marL="0" indent="0">
@@ -12245,6 +10952,7 @@
               <a:rPr lang="en-US" dirty="0"/>
               <a:t>();//for next page  </a:t>
             </a:r>
+            <a:endParaRPr lang="en-US" dirty="0"/>
           </a:p>
           <a:p>
             <a:pPr marL="0" indent="0">
@@ -12262,6 +10970,7 @@
               <a:rPr lang="en-US" dirty="0"/>
               <a:t>(2);//for next 2nd page  </a:t>
             </a:r>
+            <a:endParaRPr lang="en-US" dirty="0"/>
           </a:p>
           <a:p>
             <a:pPr marL="0" indent="0">
@@ -12287,11 +10996,6 @@
         </p:txBody>
       </p:sp>
     </p:spTree>
-    <p:extLst>
-      <p:ext uri="{BB962C8B-B14F-4D97-AF65-F5344CB8AC3E}">
-        <p14:creationId xmlns:p14="http://schemas.microsoft.com/office/powerpoint/2010/main" val="1178715485"/>
-      </p:ext>
-    </p:extLst>
   </p:cSld>
   <p:clrMapOvr>
     <a:masterClrMapping/>
@@ -12318,13 +11022,7 @@
       </p:grpSpPr>
       <p:sp>
         <p:nvSpPr>
-          <p:cNvPr id="2" name="Title 1">
-            <a:extLst>
-              <a:ext uri="{FF2B5EF4-FFF2-40B4-BE49-F238E27FC236}">
-                <a16:creationId xmlns:a16="http://schemas.microsoft.com/office/drawing/2014/main" id="{273760AD-AB7B-4212-B357-17EB0C45EDA1}"/>
-              </a:ext>
-            </a:extLst>
-          </p:cNvPr>
+          <p:cNvPr id="2" name="Title 1"/>
           <p:cNvSpPr>
             <a:spLocks noGrp="1"/>
           </p:cNvSpPr>
@@ -12347,13 +11045,7 @@
       </p:sp>
       <p:sp>
         <p:nvSpPr>
-          <p:cNvPr id="3" name="Content Placeholder 2">
-            <a:extLst>
-              <a:ext uri="{FF2B5EF4-FFF2-40B4-BE49-F238E27FC236}">
-                <a16:creationId xmlns:a16="http://schemas.microsoft.com/office/drawing/2014/main" id="{65E3FCFA-84A0-4553-B1A3-396A0AD7C72F}"/>
-              </a:ext>
-            </a:extLst>
-          </p:cNvPr>
+          <p:cNvPr id="3" name="Content Placeholder 2"/>
           <p:cNvSpPr>
             <a:spLocks noGrp="1"/>
           </p:cNvSpPr>
@@ -12396,6 +11088,7 @@
               <a:rPr lang="en-US" dirty="0"/>
               <a:t> etc.</a:t>
             </a:r>
+            <a:endParaRPr lang="en-US" dirty="0"/>
           </a:p>
           <a:p>
             <a:endParaRPr lang="en-US" dirty="0"/>
@@ -12405,6 +11098,7 @@
               <a:rPr lang="en-US" dirty="0"/>
               <a:t>The navigator object is the window property, so it can be accessed by:</a:t>
             </a:r>
+            <a:endParaRPr lang="en-US" dirty="0"/>
           </a:p>
           <a:p>
             <a:endParaRPr lang="en-US" dirty="0"/>
@@ -12425,6 +11119,7 @@
               <a:rPr lang="en-US" dirty="0"/>
               <a:t>  </a:t>
             </a:r>
+            <a:endParaRPr lang="en-US" dirty="0"/>
           </a:p>
           <a:p>
             <a:pPr marL="0" indent="0">
@@ -12434,6 +11129,7 @@
               <a:rPr lang="en-US" dirty="0"/>
               <a:t>	Or,</a:t>
             </a:r>
+            <a:endParaRPr lang="en-US" dirty="0"/>
           </a:p>
           <a:p>
             <a:pPr marL="0" indent="0">
@@ -12448,11 +11144,6 @@
         </p:txBody>
       </p:sp>
     </p:spTree>
-    <p:extLst>
-      <p:ext uri="{BB962C8B-B14F-4D97-AF65-F5344CB8AC3E}">
-        <p14:creationId xmlns:p14="http://schemas.microsoft.com/office/powerpoint/2010/main" val="125449355"/>
-      </p:ext>
-    </p:extLst>
   </p:cSld>
   <p:clrMapOvr>
     <a:masterClrMapping/>
@@ -12479,13 +11170,7 @@
       </p:grpSpPr>
       <p:sp>
         <p:nvSpPr>
-          <p:cNvPr id="2" name="Title 1">
-            <a:extLst>
-              <a:ext uri="{FF2B5EF4-FFF2-40B4-BE49-F238E27FC236}">
-                <a16:creationId xmlns:a16="http://schemas.microsoft.com/office/drawing/2014/main" id="{88AE373F-FFA0-42B6-82C1-4BF8D18824EC}"/>
-              </a:ext>
-            </a:extLst>
-          </p:cNvPr>
+          <p:cNvPr id="2" name="Title 1"/>
           <p:cNvSpPr>
             <a:spLocks noGrp="1"/>
           </p:cNvSpPr>
@@ -12508,13 +11193,7 @@
       </p:sp>
       <p:pic>
         <p:nvPicPr>
-          <p:cNvPr id="5" name="Content Placeholder 4">
-            <a:extLst>
-              <a:ext uri="{FF2B5EF4-FFF2-40B4-BE49-F238E27FC236}">
-                <a16:creationId xmlns:a16="http://schemas.microsoft.com/office/drawing/2014/main" id="{ED38D2AF-E765-4767-B404-5142543163DF}"/>
-              </a:ext>
-            </a:extLst>
-          </p:cNvPr>
+          <p:cNvPr id="5" name="Content Placeholder 4"/>
           <p:cNvPicPr>
             <a:picLocks noGrp="1" noChangeAspect="1"/>
           </p:cNvPicPr>
@@ -12523,7 +11202,7 @@
           </p:nvPr>
         </p:nvPicPr>
         <p:blipFill>
-          <a:blip r:embed="rId2"/>
+          <a:blip r:embed="rId1"/>
           <a:stretch>
             <a:fillRect/>
           </a:stretch>
@@ -12536,11 +11215,6 @@
         </p:spPr>
       </p:pic>
     </p:spTree>
-    <p:extLst>
-      <p:ext uri="{BB962C8B-B14F-4D97-AF65-F5344CB8AC3E}">
-        <p14:creationId xmlns:p14="http://schemas.microsoft.com/office/powerpoint/2010/main" val="823580347"/>
-      </p:ext>
-    </p:extLst>
   </p:cSld>
   <p:clrMapOvr>
     <a:masterClrMapping/>
@@ -12567,13 +11241,7 @@
       </p:grpSpPr>
       <p:sp>
         <p:nvSpPr>
-          <p:cNvPr id="2" name="Title 1">
-            <a:extLst>
-              <a:ext uri="{FF2B5EF4-FFF2-40B4-BE49-F238E27FC236}">
-                <a16:creationId xmlns:a16="http://schemas.microsoft.com/office/drawing/2014/main" id="{BD63ED76-B70C-4D5D-9405-D6662099D431}"/>
-              </a:ext>
-            </a:extLst>
-          </p:cNvPr>
+          <p:cNvPr id="2" name="Title 1"/>
           <p:cNvSpPr>
             <a:spLocks noGrp="1"/>
           </p:cNvSpPr>
@@ -12596,13 +11264,7 @@
       </p:sp>
       <p:sp>
         <p:nvSpPr>
-          <p:cNvPr id="3" name="Content Placeholder 2">
-            <a:extLst>
-              <a:ext uri="{FF2B5EF4-FFF2-40B4-BE49-F238E27FC236}">
-                <a16:creationId xmlns:a16="http://schemas.microsoft.com/office/drawing/2014/main" id="{4B300771-3BEB-427C-AD86-2798FFC7C160}"/>
-              </a:ext>
-            </a:extLst>
-          </p:cNvPr>
+          <p:cNvPr id="3" name="Content Placeholder 2"/>
           <p:cNvSpPr>
             <a:spLocks noGrp="1"/>
           </p:cNvSpPr>
@@ -12624,6 +11286,7 @@
               <a:rPr lang="en-US" dirty="0"/>
               <a:t>The methods of navigator object are given below.</a:t>
             </a:r>
+            <a:endParaRPr lang="en-US" dirty="0"/>
           </a:p>
           <a:p>
             <a:endParaRPr lang="en-US" dirty="0"/>
@@ -12636,6 +11299,7 @@
               <a:rPr lang="en-US" dirty="0"/>
               <a:t>Method	Description</a:t>
             </a:r>
+            <a:endParaRPr lang="en-US" dirty="0"/>
           </a:p>
           <a:p>
             <a:pPr marL="0" indent="0">
@@ -12649,6 +11313,7 @@
               <a:rPr lang="en-US" dirty="0"/>
               <a:t>()	checks if java is enabled.</a:t>
             </a:r>
+            <a:endParaRPr lang="en-US" dirty="0"/>
           </a:p>
           <a:p>
             <a:pPr marL="0" indent="0">
@@ -12667,11 +11332,6 @@
         </p:txBody>
       </p:sp>
     </p:spTree>
-    <p:extLst>
-      <p:ext uri="{BB962C8B-B14F-4D97-AF65-F5344CB8AC3E}">
-        <p14:creationId xmlns:p14="http://schemas.microsoft.com/office/powerpoint/2010/main" val="595911137"/>
-      </p:ext>
-    </p:extLst>
   </p:cSld>
   <p:clrMapOvr>
     <a:masterClrMapping/>
@@ -12698,13 +11358,7 @@
       </p:grpSpPr>
       <p:sp>
         <p:nvSpPr>
-          <p:cNvPr id="2" name="Title 1">
-            <a:extLst>
-              <a:ext uri="{FF2B5EF4-FFF2-40B4-BE49-F238E27FC236}">
-                <a16:creationId xmlns:a16="http://schemas.microsoft.com/office/drawing/2014/main" id="{6BE8F925-5775-4295-8AFB-B54FB623DC81}"/>
-              </a:ext>
-            </a:extLst>
-          </p:cNvPr>
+          <p:cNvPr id="2" name="Title 1"/>
           <p:cNvSpPr>
             <a:spLocks noGrp="1"/>
           </p:cNvSpPr>
@@ -12721,32 +11375,27 @@
               <a:rPr lang="en-IN" dirty="0"/>
               <a:t>JavaScript Example</a:t>
             </a:r>
+            <a:endParaRPr lang="en-IN" dirty="0"/>
           </a:p>
         </p:txBody>
       </p:sp>
       <p:pic>
         <p:nvPicPr>
-          <p:cNvPr id="5" name="Picture 4">
-            <a:extLst>
-              <a:ext uri="{FF2B5EF4-FFF2-40B4-BE49-F238E27FC236}">
-                <a16:creationId xmlns:a16="http://schemas.microsoft.com/office/drawing/2014/main" id="{A15A0A72-9DE1-4861-B165-65438967407F}"/>
-              </a:ext>
-            </a:extLst>
-          </p:cNvPr>
+          <p:cNvPr id="5" name="Picture 4"/>
           <p:cNvPicPr>
             <a:picLocks noChangeAspect="1"/>
           </p:cNvPicPr>
           <p:nvPr/>
         </p:nvPicPr>
         <p:blipFill>
-          <a:blip r:embed="rId2"/>
+          <a:blip r:embed="rId1"/>
           <a:stretch>
             <a:fillRect/>
           </a:stretch>
         </p:blipFill>
         <p:spPr>
           <a:xfrm>
-            <a:off x="838200" y="2995228"/>
+            <a:off x="999490" y="3030788"/>
             <a:ext cx="10753577" cy="1440479"/>
           </a:xfrm>
           <a:prstGeom prst="rect">
@@ -12755,11 +11404,6 @@
         </p:spPr>
       </p:pic>
     </p:spTree>
-    <p:extLst>
-      <p:ext uri="{BB962C8B-B14F-4D97-AF65-F5344CB8AC3E}">
-        <p14:creationId xmlns:p14="http://schemas.microsoft.com/office/powerpoint/2010/main" val="2406021205"/>
-      </p:ext>
-    </p:extLst>
   </p:cSld>
   <p:clrMapOvr>
     <a:masterClrMapping/>
@@ -12786,13 +11430,7 @@
       </p:grpSpPr>
       <p:sp>
         <p:nvSpPr>
-          <p:cNvPr id="2" name="Title 1">
-            <a:extLst>
-              <a:ext uri="{FF2B5EF4-FFF2-40B4-BE49-F238E27FC236}">
-                <a16:creationId xmlns:a16="http://schemas.microsoft.com/office/drawing/2014/main" id="{F264DE30-1E8A-48A9-A48D-A976BAD586A2}"/>
-              </a:ext>
-            </a:extLst>
-          </p:cNvPr>
+          <p:cNvPr id="2" name="Title 1"/>
           <p:cNvSpPr>
             <a:spLocks noGrp="1"/>
           </p:cNvSpPr>
@@ -12809,18 +11447,13 @@
               <a:rPr lang="en-IN" dirty="0"/>
               <a:t>Example of navigator object</a:t>
             </a:r>
-          </a:p>
-        </p:txBody>
-      </p:sp>
-      <p:sp>
-        <p:nvSpPr>
-          <p:cNvPr id="3" name="Content Placeholder 2">
-            <a:extLst>
-              <a:ext uri="{FF2B5EF4-FFF2-40B4-BE49-F238E27FC236}">
-                <a16:creationId xmlns:a16="http://schemas.microsoft.com/office/drawing/2014/main" id="{285CA7C7-DB94-43DD-8C7A-B0EA211D9AB8}"/>
-              </a:ext>
-            </a:extLst>
-          </p:cNvPr>
+            <a:endParaRPr lang="en-IN" dirty="0"/>
+          </a:p>
+        </p:txBody>
+      </p:sp>
+      <p:sp>
+        <p:nvSpPr>
+          <p:cNvPr id="3" name="Content Placeholder 2"/>
           <p:cNvSpPr>
             <a:spLocks noGrp="1"/>
           </p:cNvSpPr>
@@ -12839,6 +11472,7 @@
               <a:rPr lang="en-IN" dirty="0"/>
               <a:t>Let’s see the different usage of history object.</a:t>
             </a:r>
+            <a:endParaRPr lang="en-IN" dirty="0"/>
           </a:p>
           <a:p>
             <a:endParaRPr lang="en-IN" dirty="0"/>
@@ -12848,6 +11482,7 @@
               <a:rPr lang="en-IN" dirty="0"/>
               <a:t>&lt;script&gt;  </a:t>
             </a:r>
+            <a:endParaRPr lang="en-IN" dirty="0"/>
           </a:p>
           <a:p>
             <a:r>
@@ -12882,6 +11517,7 @@
               <a:rPr lang="en-IN" dirty="0"/>
               <a:t>);  </a:t>
             </a:r>
+            <a:endParaRPr lang="en-IN" dirty="0"/>
           </a:p>
           <a:p>
             <a:r>
@@ -12916,6 +11552,7 @@
               <a:rPr lang="en-IN" dirty="0"/>
               <a:t>);  </a:t>
             </a:r>
+            <a:endParaRPr lang="en-IN" dirty="0"/>
           </a:p>
           <a:p>
             <a:r>
@@ -12950,6 +11587,7 @@
               <a:rPr lang="en-IN" dirty="0"/>
               <a:t>);  </a:t>
             </a:r>
+            <a:endParaRPr lang="en-IN" dirty="0"/>
           </a:p>
           <a:p>
             <a:r>
@@ -12984,6 +11622,7 @@
               <a:rPr lang="en-IN" dirty="0"/>
               <a:t>);  </a:t>
             </a:r>
+            <a:endParaRPr lang="en-IN" dirty="0"/>
           </a:p>
           <a:p>
             <a:r>
@@ -13018,6 +11657,7 @@
               <a:rPr lang="en-IN" dirty="0"/>
               <a:t>);  </a:t>
             </a:r>
+            <a:endParaRPr lang="en-IN" dirty="0"/>
           </a:p>
           <a:p>
             <a:r>
@@ -13052,6 +11692,7 @@
               <a:rPr lang="en-IN" dirty="0"/>
               <a:t>);  </a:t>
             </a:r>
+            <a:endParaRPr lang="en-IN" dirty="0"/>
           </a:p>
           <a:p>
             <a:r>
@@ -13086,6 +11727,7 @@
               <a:rPr lang="en-IN" dirty="0"/>
               <a:t>);  </a:t>
             </a:r>
+            <a:endParaRPr lang="en-IN" dirty="0"/>
           </a:p>
           <a:p>
             <a:r>
@@ -13120,21 +11762,18 @@
               <a:rPr lang="en-IN" dirty="0"/>
               <a:t>);  </a:t>
             </a:r>
+            <a:endParaRPr lang="en-IN" dirty="0"/>
           </a:p>
           <a:p>
             <a:r>
               <a:rPr lang="en-IN" dirty="0"/>
               <a:t>&lt;/script&gt; </a:t>
             </a:r>
+            <a:endParaRPr lang="en-IN" dirty="0"/>
           </a:p>
         </p:txBody>
       </p:sp>
     </p:spTree>
-    <p:extLst>
-      <p:ext uri="{BB962C8B-B14F-4D97-AF65-F5344CB8AC3E}">
-        <p14:creationId xmlns:p14="http://schemas.microsoft.com/office/powerpoint/2010/main" val="3870059848"/>
-      </p:ext>
-    </p:extLst>
   </p:cSld>
   <p:clrMapOvr>
     <a:masterClrMapping/>
@@ -13161,13 +11800,7 @@
       </p:grpSpPr>
       <p:sp>
         <p:nvSpPr>
-          <p:cNvPr id="2" name="Title 1">
-            <a:extLst>
-              <a:ext uri="{FF2B5EF4-FFF2-40B4-BE49-F238E27FC236}">
-                <a16:creationId xmlns:a16="http://schemas.microsoft.com/office/drawing/2014/main" id="{3AC03B3D-3BEA-4BB6-AB2F-D2D97FA02B38}"/>
-              </a:ext>
-            </a:extLst>
-          </p:cNvPr>
+          <p:cNvPr id="2" name="Title 1"/>
           <p:cNvSpPr>
             <a:spLocks noGrp="1"/>
           </p:cNvSpPr>
@@ -13190,13 +11823,7 @@
       </p:sp>
       <p:sp>
         <p:nvSpPr>
-          <p:cNvPr id="3" name="Content Placeholder 2">
-            <a:extLst>
-              <a:ext uri="{FF2B5EF4-FFF2-40B4-BE49-F238E27FC236}">
-                <a16:creationId xmlns:a16="http://schemas.microsoft.com/office/drawing/2014/main" id="{4C19AAA8-0214-4620-B420-B232AECCE38A}"/>
-              </a:ext>
-            </a:extLst>
-          </p:cNvPr>
+          <p:cNvPr id="3" name="Content Placeholder 2"/>
           <p:cNvSpPr>
             <a:spLocks noGrp="1"/>
           </p:cNvSpPr>
@@ -13234,6 +11861,7 @@
               <a:rPr lang="en-US" dirty="0"/>
               <a:t> etc.</a:t>
             </a:r>
+            <a:endParaRPr lang="en-US" dirty="0"/>
           </a:p>
           <a:p>
             <a:endParaRPr lang="en-US" dirty="0"/>
@@ -13243,6 +11871,7 @@
               <a:rPr lang="en-US" dirty="0"/>
               <a:t>The screen object is the window property, so it can be accessed by:</a:t>
             </a:r>
+            <a:endParaRPr lang="en-US" dirty="0"/>
           </a:p>
           <a:p>
             <a:endParaRPr lang="en-US" dirty="0"/>
@@ -13263,6 +11892,7 @@
               <a:rPr lang="en-US" dirty="0"/>
               <a:t>  </a:t>
             </a:r>
+            <a:endParaRPr lang="en-US" dirty="0"/>
           </a:p>
           <a:p>
             <a:pPr marL="0" indent="0">
@@ -13272,6 +11902,7 @@
               <a:rPr lang="en-US" dirty="0"/>
               <a:t>	Or,</a:t>
             </a:r>
+            <a:endParaRPr lang="en-US" dirty="0"/>
           </a:p>
           <a:p>
             <a:pPr marL="0" indent="0">
@@ -13286,11 +11917,6 @@
         </p:txBody>
       </p:sp>
     </p:spTree>
-    <p:extLst>
-      <p:ext uri="{BB962C8B-B14F-4D97-AF65-F5344CB8AC3E}">
-        <p14:creationId xmlns:p14="http://schemas.microsoft.com/office/powerpoint/2010/main" val="1581891555"/>
-      </p:ext>
-    </p:extLst>
   </p:cSld>
   <p:clrMapOvr>
     <a:masterClrMapping/>
@@ -13317,13 +11943,7 @@
       </p:grpSpPr>
       <p:sp>
         <p:nvSpPr>
-          <p:cNvPr id="2" name="Title 1">
-            <a:extLst>
-              <a:ext uri="{FF2B5EF4-FFF2-40B4-BE49-F238E27FC236}">
-                <a16:creationId xmlns:a16="http://schemas.microsoft.com/office/drawing/2014/main" id="{544DE421-A3D8-46F3-984E-936BB8167D81}"/>
-              </a:ext>
-            </a:extLst>
-          </p:cNvPr>
+          <p:cNvPr id="2" name="Title 1"/>
           <p:cNvSpPr>
             <a:spLocks noGrp="1"/>
           </p:cNvSpPr>
@@ -13346,13 +11966,7 @@
       </p:sp>
       <p:pic>
         <p:nvPicPr>
-          <p:cNvPr id="5" name="Content Placeholder 4">
-            <a:extLst>
-              <a:ext uri="{FF2B5EF4-FFF2-40B4-BE49-F238E27FC236}">
-                <a16:creationId xmlns:a16="http://schemas.microsoft.com/office/drawing/2014/main" id="{5FF1B494-9B00-4F8E-AE5E-425CF30658A2}"/>
-              </a:ext>
-            </a:extLst>
-          </p:cNvPr>
+          <p:cNvPr id="5" name="Content Placeholder 4"/>
           <p:cNvPicPr>
             <a:picLocks noGrp="1" noChangeAspect="1"/>
           </p:cNvPicPr>
@@ -13361,7 +11975,7 @@
           </p:nvPr>
         </p:nvPicPr>
         <p:blipFill>
-          <a:blip r:embed="rId2"/>
+          <a:blip r:embed="rId1"/>
           <a:stretch>
             <a:fillRect/>
           </a:stretch>
@@ -13374,11 +11988,6 @@
         </p:spPr>
       </p:pic>
     </p:spTree>
-    <p:extLst>
-      <p:ext uri="{BB962C8B-B14F-4D97-AF65-F5344CB8AC3E}">
-        <p14:creationId xmlns:p14="http://schemas.microsoft.com/office/powerpoint/2010/main" val="3557051780"/>
-      </p:ext>
-    </p:extLst>
   </p:cSld>
   <p:clrMapOvr>
     <a:masterClrMapping/>
@@ -13405,13 +12014,7 @@
       </p:grpSpPr>
       <p:sp>
         <p:nvSpPr>
-          <p:cNvPr id="2" name="Title 1">
-            <a:extLst>
-              <a:ext uri="{FF2B5EF4-FFF2-40B4-BE49-F238E27FC236}">
-                <a16:creationId xmlns:a16="http://schemas.microsoft.com/office/drawing/2014/main" id="{AB9EFEE4-B92D-44CF-9DBE-6811D1CB64DA}"/>
-              </a:ext>
-            </a:extLst>
-          </p:cNvPr>
+          <p:cNvPr id="2" name="Title 1"/>
           <p:cNvSpPr>
             <a:spLocks noGrp="1"/>
           </p:cNvSpPr>
@@ -13428,18 +12031,13 @@
               <a:rPr lang="en-IN" dirty="0"/>
               <a:t>Example of JavaScript Screen Object</a:t>
             </a:r>
-          </a:p>
-        </p:txBody>
-      </p:sp>
-      <p:sp>
-        <p:nvSpPr>
-          <p:cNvPr id="3" name="Content Placeholder 2">
-            <a:extLst>
-              <a:ext uri="{FF2B5EF4-FFF2-40B4-BE49-F238E27FC236}">
-                <a16:creationId xmlns:a16="http://schemas.microsoft.com/office/drawing/2014/main" id="{D3F9B44D-EF56-43B2-A1C5-89232E53F8AE}"/>
-              </a:ext>
-            </a:extLst>
-          </p:cNvPr>
+            <a:endParaRPr lang="en-IN" dirty="0"/>
+          </a:p>
+        </p:txBody>
+      </p:sp>
+      <p:sp>
+        <p:nvSpPr>
+          <p:cNvPr id="3" name="Content Placeholder 2"/>
           <p:cNvSpPr>
             <a:spLocks noGrp="1"/>
           </p:cNvSpPr>
@@ -13458,6 +12056,7 @@
               <a:rPr lang="en-IN" dirty="0"/>
               <a:t>Let’s see the different usage of screen object.</a:t>
             </a:r>
+            <a:endParaRPr lang="en-IN" dirty="0"/>
           </a:p>
           <a:p>
             <a:endParaRPr lang="en-IN" dirty="0"/>
@@ -13467,6 +12066,7 @@
               <a:rPr lang="en-IN" dirty="0"/>
               <a:t>&lt;script&gt;  </a:t>
             </a:r>
+            <a:endParaRPr lang="en-IN" dirty="0"/>
           </a:p>
           <a:p>
             <a:r>
@@ -13501,6 +12101,7 @@
               <a:rPr lang="en-IN" dirty="0"/>
               <a:t>);  </a:t>
             </a:r>
+            <a:endParaRPr lang="en-IN" dirty="0"/>
           </a:p>
           <a:p>
             <a:r>
@@ -13535,6 +12136,7 @@
               <a:rPr lang="en-IN" dirty="0"/>
               <a:t>);  </a:t>
             </a:r>
+            <a:endParaRPr lang="en-IN" dirty="0"/>
           </a:p>
           <a:p>
             <a:r>
@@ -13569,6 +12171,7 @@
               <a:rPr lang="en-IN" dirty="0"/>
               <a:t>);  </a:t>
             </a:r>
+            <a:endParaRPr lang="en-IN" dirty="0"/>
           </a:p>
           <a:p>
             <a:r>
@@ -13603,6 +12206,7 @@
               <a:rPr lang="en-IN" dirty="0"/>
               <a:t>);  </a:t>
             </a:r>
+            <a:endParaRPr lang="en-IN" dirty="0"/>
           </a:p>
           <a:p>
             <a:r>
@@ -13637,6 +12241,7 @@
               <a:rPr lang="en-IN" dirty="0"/>
               <a:t>);  </a:t>
             </a:r>
+            <a:endParaRPr lang="en-IN" dirty="0"/>
           </a:p>
           <a:p>
             <a:r>
@@ -13671,21 +12276,18 @@
               <a:rPr lang="en-IN" dirty="0"/>
               <a:t>);  </a:t>
             </a:r>
+            <a:endParaRPr lang="en-IN" dirty="0"/>
           </a:p>
           <a:p>
             <a:r>
               <a:rPr lang="en-IN" dirty="0"/>
               <a:t>&lt;/script&gt; </a:t>
             </a:r>
+            <a:endParaRPr lang="en-IN" dirty="0"/>
           </a:p>
         </p:txBody>
       </p:sp>
     </p:spTree>
-    <p:extLst>
-      <p:ext uri="{BB962C8B-B14F-4D97-AF65-F5344CB8AC3E}">
-        <p14:creationId xmlns:p14="http://schemas.microsoft.com/office/powerpoint/2010/main" val="766239431"/>
-      </p:ext>
-    </p:extLst>
   </p:cSld>
   <p:clrMapOvr>
     <a:masterClrMapping/>
@@ -13712,13 +12314,7 @@
       </p:grpSpPr>
       <p:sp>
         <p:nvSpPr>
-          <p:cNvPr id="2" name="Title 1">
-            <a:extLst>
-              <a:ext uri="{FF2B5EF4-FFF2-40B4-BE49-F238E27FC236}">
-                <a16:creationId xmlns:a16="http://schemas.microsoft.com/office/drawing/2014/main" id="{3CF17BA9-F6BA-49DB-BBDB-1A83323D8626}"/>
-              </a:ext>
-            </a:extLst>
-          </p:cNvPr>
+          <p:cNvPr id="2" name="Title 1"/>
           <p:cNvSpPr>
             <a:spLocks noGrp="1"/>
           </p:cNvSpPr>
@@ -13741,13 +12337,7 @@
       </p:sp>
       <p:sp>
         <p:nvSpPr>
-          <p:cNvPr id="3" name="Content Placeholder 2">
-            <a:extLst>
-              <a:ext uri="{FF2B5EF4-FFF2-40B4-BE49-F238E27FC236}">
-                <a16:creationId xmlns:a16="http://schemas.microsoft.com/office/drawing/2014/main" id="{96768D0B-E777-4B5B-98D3-FC511679CAAF}"/>
-              </a:ext>
-            </a:extLst>
-          </p:cNvPr>
+          <p:cNvPr id="3" name="Content Placeholder 2"/>
           <p:cNvSpPr>
             <a:spLocks noGrp="1"/>
           </p:cNvSpPr>
@@ -13766,6 +12356,7 @@
               <a:rPr lang="en-US" dirty="0"/>
               <a:t>When html document is loaded in the browser, it becomes a document object. It is the root element that represents the html document. It has properties and methods. By the help of document object, we can add dynamic content to our web page.</a:t>
             </a:r>
+            <a:endParaRPr lang="en-US" dirty="0"/>
           </a:p>
           <a:p>
             <a:endParaRPr lang="en-US" dirty="0"/>
@@ -13775,6 +12366,7 @@
               <a:rPr lang="en-US" dirty="0"/>
               <a:t>As mentioned earlier, it is the object of window. So</a:t>
             </a:r>
+            <a:endParaRPr lang="en-US" dirty="0"/>
           </a:p>
           <a:p>
             <a:pPr marL="0" indent="0">
@@ -13792,6 +12384,7 @@
               <a:rPr lang="en-US" dirty="0"/>
               <a:t>  </a:t>
             </a:r>
+            <a:endParaRPr lang="en-US" dirty="0"/>
           </a:p>
           <a:p>
             <a:pPr marL="0" indent="0">
@@ -13801,6 +12394,7 @@
               <a:rPr lang="en-US" dirty="0"/>
               <a:t>	Is same as</a:t>
             </a:r>
+            <a:endParaRPr lang="en-US" dirty="0"/>
           </a:p>
           <a:p>
             <a:pPr marL="0" indent="0">
@@ -13810,6 +12404,7 @@
               <a:rPr lang="en-US" dirty="0"/>
               <a:t>	document  </a:t>
             </a:r>
+            <a:endParaRPr lang="en-US" dirty="0"/>
           </a:p>
           <a:p>
             <a:r>
@@ -13821,11 +12416,6 @@
         </p:txBody>
       </p:sp>
     </p:spTree>
-    <p:extLst>
-      <p:ext uri="{BB962C8B-B14F-4D97-AF65-F5344CB8AC3E}">
-        <p14:creationId xmlns:p14="http://schemas.microsoft.com/office/powerpoint/2010/main" val="352265071"/>
-      </p:ext>
-    </p:extLst>
   </p:cSld>
   <p:clrMapOvr>
     <a:masterClrMapping/>
@@ -13852,13 +12442,7 @@
       </p:grpSpPr>
       <p:sp>
         <p:nvSpPr>
-          <p:cNvPr id="2" name="Title 1">
-            <a:extLst>
-              <a:ext uri="{FF2B5EF4-FFF2-40B4-BE49-F238E27FC236}">
-                <a16:creationId xmlns:a16="http://schemas.microsoft.com/office/drawing/2014/main" id="{FED68579-6A5F-4B73-ABC1-F23914CCA03F}"/>
-              </a:ext>
-            </a:extLst>
-          </p:cNvPr>
+          <p:cNvPr id="2" name="Title 1"/>
           <p:cNvSpPr>
             <a:spLocks noGrp="1"/>
           </p:cNvSpPr>
@@ -13881,13 +12465,7 @@
       </p:sp>
       <p:pic>
         <p:nvPicPr>
-          <p:cNvPr id="5" name="Content Placeholder 4">
-            <a:extLst>
-              <a:ext uri="{FF2B5EF4-FFF2-40B4-BE49-F238E27FC236}">
-                <a16:creationId xmlns:a16="http://schemas.microsoft.com/office/drawing/2014/main" id="{E2A72F7D-223F-4700-9A4A-828AC084F994}"/>
-              </a:ext>
-            </a:extLst>
-          </p:cNvPr>
+          <p:cNvPr id="5" name="Content Placeholder 4"/>
           <p:cNvPicPr>
             <a:picLocks noGrp="1" noChangeAspect="1"/>
           </p:cNvPicPr>
@@ -13896,7 +12474,7 @@
           </p:nvPr>
         </p:nvPicPr>
         <p:blipFill>
-          <a:blip r:embed="rId2"/>
+          <a:blip r:embed="rId1"/>
           <a:stretch>
             <a:fillRect/>
           </a:stretch>
@@ -13909,11 +12487,6 @@
         </p:spPr>
       </p:pic>
     </p:spTree>
-    <p:extLst>
-      <p:ext uri="{BB962C8B-B14F-4D97-AF65-F5344CB8AC3E}">
-        <p14:creationId xmlns:p14="http://schemas.microsoft.com/office/powerpoint/2010/main" val="2188049203"/>
-      </p:ext>
-    </p:extLst>
   </p:cSld>
   <p:clrMapOvr>
     <a:masterClrMapping/>
@@ -13940,13 +12513,7 @@
       </p:grpSpPr>
       <p:sp>
         <p:nvSpPr>
-          <p:cNvPr id="2" name="Title 1">
-            <a:extLst>
-              <a:ext uri="{FF2B5EF4-FFF2-40B4-BE49-F238E27FC236}">
-                <a16:creationId xmlns:a16="http://schemas.microsoft.com/office/drawing/2014/main" id="{96513D0E-3690-4ACA-AF32-EECEBE0FCB09}"/>
-              </a:ext>
-            </a:extLst>
-          </p:cNvPr>
+          <p:cNvPr id="2" name="Title 1"/>
           <p:cNvSpPr>
             <a:spLocks noGrp="1"/>
           </p:cNvSpPr>
@@ -13975,13 +12542,7 @@
       </p:sp>
       <p:pic>
         <p:nvPicPr>
-          <p:cNvPr id="5" name="Content Placeholder 4">
-            <a:extLst>
-              <a:ext uri="{FF2B5EF4-FFF2-40B4-BE49-F238E27FC236}">
-                <a16:creationId xmlns:a16="http://schemas.microsoft.com/office/drawing/2014/main" id="{2827F2A4-E61F-4D9D-AB73-7FF99CA7BF40}"/>
-              </a:ext>
-            </a:extLst>
-          </p:cNvPr>
+          <p:cNvPr id="5" name="Content Placeholder 4"/>
           <p:cNvPicPr>
             <a:picLocks noGrp="1" noChangeAspect="1"/>
           </p:cNvPicPr>
@@ -13990,7 +12551,7 @@
           </p:nvPr>
         </p:nvPicPr>
         <p:blipFill>
-          <a:blip r:embed="rId2"/>
+          <a:blip r:embed="rId1"/>
           <a:stretch>
             <a:fillRect/>
           </a:stretch>
@@ -14003,11 +12564,6 @@
         </p:spPr>
       </p:pic>
     </p:spTree>
-    <p:extLst>
-      <p:ext uri="{BB962C8B-B14F-4D97-AF65-F5344CB8AC3E}">
-        <p14:creationId xmlns:p14="http://schemas.microsoft.com/office/powerpoint/2010/main" val="1071918765"/>
-      </p:ext>
-    </p:extLst>
   </p:cSld>
   <p:clrMapOvr>
     <a:masterClrMapping/>
@@ -14034,13 +12590,7 @@
       </p:grpSpPr>
       <p:sp>
         <p:nvSpPr>
-          <p:cNvPr id="2" name="Title 1">
-            <a:extLst>
-              <a:ext uri="{FF2B5EF4-FFF2-40B4-BE49-F238E27FC236}">
-                <a16:creationId xmlns:a16="http://schemas.microsoft.com/office/drawing/2014/main" id="{33B47345-3BE0-46C8-BD23-6269AC49BDDA}"/>
-              </a:ext>
-            </a:extLst>
-          </p:cNvPr>
+          <p:cNvPr id="2" name="Title 1"/>
           <p:cNvSpPr>
             <a:spLocks noGrp="1"/>
           </p:cNvSpPr>
@@ -14063,13 +12613,7 @@
       </p:sp>
       <p:sp>
         <p:nvSpPr>
-          <p:cNvPr id="3" name="Content Placeholder 2">
-            <a:extLst>
-              <a:ext uri="{FF2B5EF4-FFF2-40B4-BE49-F238E27FC236}">
-                <a16:creationId xmlns:a16="http://schemas.microsoft.com/office/drawing/2014/main" id="{4356D95E-F2BB-4A84-A576-A971B170D04C}"/>
-              </a:ext>
-            </a:extLst>
-          </p:cNvPr>
+          <p:cNvPr id="3" name="Content Placeholder 2"/>
           <p:cNvSpPr>
             <a:spLocks noGrp="1"/>
           </p:cNvSpPr>
@@ -14088,6 +12632,7 @@
               <a:rPr lang="en-US" dirty="0"/>
               <a:t>In this example, we are going to get the value of input text by user. Here, we are using document.form1.name.value to get the value of name field.</a:t>
             </a:r>
+            <a:endParaRPr lang="en-US" dirty="0"/>
           </a:p>
           <a:p>
             <a:endParaRPr lang="en-US" dirty="0"/>
@@ -14097,6 +12642,7 @@
               <a:rPr lang="en-US" dirty="0"/>
               <a:t>Here, document is the root element that represents the html document.</a:t>
             </a:r>
+            <a:endParaRPr lang="en-US" dirty="0"/>
           </a:p>
           <a:p>
             <a:endParaRPr lang="en-US" dirty="0"/>
@@ -14106,6 +12652,7 @@
               <a:rPr lang="en-US" dirty="0"/>
               <a:t>form1 is the name of the form.</a:t>
             </a:r>
+            <a:endParaRPr lang="en-US" dirty="0"/>
           </a:p>
           <a:p>
             <a:endParaRPr lang="en-US" dirty="0"/>
@@ -14115,6 +12662,7 @@
               <a:rPr lang="en-US" dirty="0"/>
               <a:t>name is the attribute name of the input text.</a:t>
             </a:r>
+            <a:endParaRPr lang="en-US" dirty="0"/>
           </a:p>
           <a:p>
             <a:endParaRPr lang="en-US" dirty="0"/>
@@ -14124,6 +12672,7 @@
               <a:rPr lang="en-US" dirty="0"/>
               <a:t>value is the property, that returns the value of the input text.</a:t>
             </a:r>
+            <a:endParaRPr lang="en-US" dirty="0"/>
           </a:p>
           <a:p>
             <a:endParaRPr lang="en-US" dirty="0"/>
@@ -14138,11 +12687,6 @@
         </p:txBody>
       </p:sp>
     </p:spTree>
-    <p:extLst>
-      <p:ext uri="{BB962C8B-B14F-4D97-AF65-F5344CB8AC3E}">
-        <p14:creationId xmlns:p14="http://schemas.microsoft.com/office/powerpoint/2010/main" val="2044706923"/>
-      </p:ext>
-    </p:extLst>
   </p:cSld>
   <p:clrMapOvr>
     <a:masterClrMapping/>
@@ -14169,13 +12713,7 @@
       </p:grpSpPr>
       <p:sp>
         <p:nvSpPr>
-          <p:cNvPr id="2" name="Title 1">
-            <a:extLst>
-              <a:ext uri="{FF2B5EF4-FFF2-40B4-BE49-F238E27FC236}">
-                <a16:creationId xmlns:a16="http://schemas.microsoft.com/office/drawing/2014/main" id="{5DFADB9A-3F82-4719-A9F9-E5F083B719EE}"/>
-              </a:ext>
-            </a:extLst>
-          </p:cNvPr>
+          <p:cNvPr id="2" name="Title 1"/>
           <p:cNvSpPr>
             <a:spLocks noGrp="1"/>
           </p:cNvSpPr>
@@ -14198,13 +12736,7 @@
       </p:sp>
       <p:pic>
         <p:nvPicPr>
-          <p:cNvPr id="5" name="Content Placeholder 4">
-            <a:extLst>
-              <a:ext uri="{FF2B5EF4-FFF2-40B4-BE49-F238E27FC236}">
-                <a16:creationId xmlns:a16="http://schemas.microsoft.com/office/drawing/2014/main" id="{473D27D6-FEF8-415E-8E73-9197352D590D}"/>
-              </a:ext>
-            </a:extLst>
-          </p:cNvPr>
+          <p:cNvPr id="5" name="Content Placeholder 4"/>
           <p:cNvPicPr>
             <a:picLocks noGrp="1" noChangeAspect="1"/>
           </p:cNvPicPr>
@@ -14213,7 +12745,7 @@
           </p:nvPr>
         </p:nvPicPr>
         <p:blipFill>
-          <a:blip r:embed="rId2"/>
+          <a:blip r:embed="rId1"/>
           <a:stretch>
             <a:fillRect/>
           </a:stretch>
@@ -14226,11 +12758,6 @@
         </p:spPr>
       </p:pic>
     </p:spTree>
-    <p:extLst>
-      <p:ext uri="{BB962C8B-B14F-4D97-AF65-F5344CB8AC3E}">
-        <p14:creationId xmlns:p14="http://schemas.microsoft.com/office/powerpoint/2010/main" val="2425506145"/>
-      </p:ext>
-    </p:extLst>
   </p:cSld>
   <p:clrMapOvr>
     <a:masterClrMapping/>
@@ -14257,13 +12784,7 @@
       </p:grpSpPr>
       <p:sp>
         <p:nvSpPr>
-          <p:cNvPr id="2" name="Title 1">
-            <a:extLst>
-              <a:ext uri="{FF2B5EF4-FFF2-40B4-BE49-F238E27FC236}">
-                <a16:creationId xmlns:a16="http://schemas.microsoft.com/office/drawing/2014/main" id="{B5CADA28-48ED-4181-8FFD-2D230A811DDA}"/>
-              </a:ext>
-            </a:extLst>
-          </p:cNvPr>
+          <p:cNvPr id="2" name="Title 1"/>
           <p:cNvSpPr>
             <a:spLocks noGrp="1"/>
           </p:cNvSpPr>
@@ -14324,13 +12845,7 @@
       </p:sp>
       <p:sp>
         <p:nvSpPr>
-          <p:cNvPr id="3" name="Content Placeholder 2">
-            <a:extLst>
-              <a:ext uri="{FF2B5EF4-FFF2-40B4-BE49-F238E27FC236}">
-                <a16:creationId xmlns:a16="http://schemas.microsoft.com/office/drawing/2014/main" id="{AAD1B8F7-17FF-4040-B8C9-3AE094C6029E}"/>
-              </a:ext>
-            </a:extLst>
-          </p:cNvPr>
+          <p:cNvPr id="3" name="Content Placeholder 2"/>
           <p:cNvSpPr>
             <a:spLocks noGrp="1"/>
           </p:cNvSpPr>
@@ -14357,6 +12872,7 @@
               <a:rPr lang="en-US" dirty="0"/>
               <a:t>() method returns the element of specified id.</a:t>
             </a:r>
+            <a:endParaRPr lang="en-US" dirty="0"/>
           </a:p>
           <a:p>
             <a:endParaRPr lang="en-US" dirty="0"/>
@@ -14374,6 +12890,7 @@
               <a:rPr lang="en-US" dirty="0"/>
               <a:t>() method to get value of the input text. But we need to define id for the input field.</a:t>
             </a:r>
+            <a:endParaRPr lang="en-US" dirty="0"/>
           </a:p>
           <a:p>
             <a:endParaRPr lang="en-US" dirty="0"/>
@@ -14396,11 +12913,6 @@
         </p:txBody>
       </p:sp>
     </p:spTree>
-    <p:extLst>
-      <p:ext uri="{BB962C8B-B14F-4D97-AF65-F5344CB8AC3E}">
-        <p14:creationId xmlns:p14="http://schemas.microsoft.com/office/powerpoint/2010/main" val="1679229497"/>
-      </p:ext>
-    </p:extLst>
   </p:cSld>
   <p:clrMapOvr>
     <a:masterClrMapping/>
@@ -14427,13 +12939,7 @@
       </p:grpSpPr>
       <p:sp>
         <p:nvSpPr>
-          <p:cNvPr id="2" name="Title 1">
-            <a:extLst>
-              <a:ext uri="{FF2B5EF4-FFF2-40B4-BE49-F238E27FC236}">
-                <a16:creationId xmlns:a16="http://schemas.microsoft.com/office/drawing/2014/main" id="{F3A290CD-6F25-494A-8D9E-AA3603F7044B}"/>
-              </a:ext>
-            </a:extLst>
-          </p:cNvPr>
+          <p:cNvPr id="2" name="Title 1"/>
           <p:cNvSpPr>
             <a:spLocks noGrp="1"/>
           </p:cNvSpPr>
@@ -14456,13 +12962,7 @@
       </p:sp>
       <p:sp>
         <p:nvSpPr>
-          <p:cNvPr id="3" name="Content Placeholder 2">
-            <a:extLst>
-              <a:ext uri="{FF2B5EF4-FFF2-40B4-BE49-F238E27FC236}">
-                <a16:creationId xmlns:a16="http://schemas.microsoft.com/office/drawing/2014/main" id="{771F6F3A-E033-4C7B-B37B-F66A3C3CBDFE}"/>
-              </a:ext>
-            </a:extLst>
-          </p:cNvPr>
+          <p:cNvPr id="3" name="Content Placeholder 2"/>
           <p:cNvSpPr>
             <a:spLocks noGrp="1"/>
           </p:cNvSpPr>
@@ -14481,6 +12981,7 @@
               <a:rPr lang="en-US" dirty="0"/>
               <a:t>A JavaScript variable is simply a name of storage location. There are two types of variables in JavaScript : local variable and global variable.</a:t>
             </a:r>
+            <a:endParaRPr lang="en-US" dirty="0"/>
           </a:p>
           <a:p>
             <a:endParaRPr lang="en-US" dirty="0"/>
@@ -14490,6 +12991,7 @@
               <a:rPr lang="en-US" dirty="0"/>
               <a:t>There are some rules while declaring a JavaScript variable (also known as identifiers).</a:t>
             </a:r>
+            <a:endParaRPr lang="en-US" dirty="0"/>
           </a:p>
           <a:p>
             <a:endParaRPr lang="en-US" dirty="0"/>
@@ -14499,12 +13001,14 @@
               <a:rPr lang="en-US" dirty="0"/>
               <a:t>Name must start with a letter (a to z or A to Z), underscore( _ ), or dollar( $ ) sign.</a:t>
             </a:r>
+            <a:endParaRPr lang="en-US" dirty="0"/>
           </a:p>
           <a:p>
             <a:r>
               <a:rPr lang="en-US" dirty="0"/>
               <a:t>After first letter we can use digits (0 to 9), for example value1.</a:t>
             </a:r>
+            <a:endParaRPr lang="en-US" dirty="0"/>
           </a:p>
           <a:p>
             <a:r>
@@ -14516,11 +13020,6 @@
         </p:txBody>
       </p:sp>
     </p:spTree>
-    <p:extLst>
-      <p:ext uri="{BB962C8B-B14F-4D97-AF65-F5344CB8AC3E}">
-        <p14:creationId xmlns:p14="http://schemas.microsoft.com/office/powerpoint/2010/main" val="4034439395"/>
-      </p:ext>
-    </p:extLst>
   </p:cSld>
   <p:clrMapOvr>
     <a:masterClrMapping/>
@@ -14547,13 +13046,7 @@
       </p:grpSpPr>
       <p:sp>
         <p:nvSpPr>
-          <p:cNvPr id="2" name="Title 1">
-            <a:extLst>
-              <a:ext uri="{FF2B5EF4-FFF2-40B4-BE49-F238E27FC236}">
-                <a16:creationId xmlns:a16="http://schemas.microsoft.com/office/drawing/2014/main" id="{A11FBE47-9099-45CA-8FE9-E6B152F7FC61}"/>
-              </a:ext>
-            </a:extLst>
-          </p:cNvPr>
+          <p:cNvPr id="2" name="Title 1"/>
           <p:cNvSpPr>
             <a:spLocks noGrp="1"/>
           </p:cNvSpPr>
@@ -14570,18 +13063,13 @@
               <a:rPr lang="en-IN" dirty="0"/>
               <a:t>Example</a:t>
             </a:r>
+            <a:endParaRPr lang="en-IN" dirty="0"/>
           </a:p>
         </p:txBody>
       </p:sp>
       <p:pic>
         <p:nvPicPr>
-          <p:cNvPr id="5" name="Content Placeholder 4">
-            <a:extLst>
-              <a:ext uri="{FF2B5EF4-FFF2-40B4-BE49-F238E27FC236}">
-                <a16:creationId xmlns:a16="http://schemas.microsoft.com/office/drawing/2014/main" id="{60DE88F9-B378-4457-A28B-ED8FD6711775}"/>
-              </a:ext>
-            </a:extLst>
-          </p:cNvPr>
+          <p:cNvPr id="5" name="Content Placeholder 4"/>
           <p:cNvPicPr>
             <a:picLocks noGrp="1" noChangeAspect="1"/>
           </p:cNvPicPr>
@@ -14590,7 +13078,7 @@
           </p:nvPr>
         </p:nvPicPr>
         <p:blipFill>
-          <a:blip r:embed="rId2"/>
+          <a:blip r:embed="rId1"/>
           <a:stretch>
             <a:fillRect/>
           </a:stretch>
@@ -14603,11 +13091,6 @@
         </p:spPr>
       </p:pic>
     </p:spTree>
-    <p:extLst>
-      <p:ext uri="{BB962C8B-B14F-4D97-AF65-F5344CB8AC3E}">
-        <p14:creationId xmlns:p14="http://schemas.microsoft.com/office/powerpoint/2010/main" val="122263796"/>
-      </p:ext>
-    </p:extLst>
   </p:cSld>
   <p:clrMapOvr>
     <a:masterClrMapping/>
@@ -14634,13 +13117,7 @@
       </p:grpSpPr>
       <p:sp>
         <p:nvSpPr>
-          <p:cNvPr id="2" name="Title 1">
-            <a:extLst>
-              <a:ext uri="{FF2B5EF4-FFF2-40B4-BE49-F238E27FC236}">
-                <a16:creationId xmlns:a16="http://schemas.microsoft.com/office/drawing/2014/main" id="{2A9114D0-EBB9-4763-9108-566CB6228F0B}"/>
-              </a:ext>
-            </a:extLst>
-          </p:cNvPr>
+          <p:cNvPr id="2" name="Title 1"/>
           <p:cNvSpPr>
             <a:spLocks noGrp="1"/>
           </p:cNvSpPr>
@@ -14701,13 +13178,7 @@
       </p:sp>
       <p:sp>
         <p:nvSpPr>
-          <p:cNvPr id="3" name="Content Placeholder 2">
-            <a:extLst>
-              <a:ext uri="{FF2B5EF4-FFF2-40B4-BE49-F238E27FC236}">
-                <a16:creationId xmlns:a16="http://schemas.microsoft.com/office/drawing/2014/main" id="{FE141C5E-E638-4FF7-9524-D9D9B9C95A17}"/>
-              </a:ext>
-            </a:extLst>
-          </p:cNvPr>
+          <p:cNvPr id="3" name="Content Placeholder 2"/>
           <p:cNvSpPr>
             <a:spLocks noGrp="1"/>
           </p:cNvSpPr>
@@ -14734,6 +13205,7 @@
               <a:rPr lang="en-US" dirty="0"/>
               <a:t>() method returns all the element of specified name.</a:t>
             </a:r>
+            <a:endParaRPr lang="en-US" dirty="0"/>
           </a:p>
           <a:p>
             <a:endParaRPr lang="en-US" dirty="0"/>
@@ -14751,6 +13223,7 @@
               <a:rPr lang="en-US" dirty="0"/>
               <a:t>() method is given below:</a:t>
             </a:r>
+            <a:endParaRPr lang="en-US" dirty="0"/>
           </a:p>
           <a:p>
             <a:endParaRPr lang="en-US" dirty="0"/>
@@ -14771,6 +13244,7 @@
               <a:rPr lang="en-US" dirty="0"/>
               <a:t>("name")  </a:t>
             </a:r>
+            <a:endParaRPr lang="en-US" dirty="0"/>
           </a:p>
           <a:p>
             <a:pPr marL="0" indent="0">
@@ -14780,6 +13254,7 @@
               <a:rPr lang="en-US" dirty="0"/>
               <a:t>	</a:t>
             </a:r>
+            <a:endParaRPr lang="en-US" dirty="0"/>
           </a:p>
           <a:p>
             <a:pPr marL="0" indent="0">
@@ -14789,6 +13264,7 @@
               <a:rPr lang="en-US" dirty="0"/>
               <a:t>Here, name is required.</a:t>
             </a:r>
+            <a:endParaRPr lang="en-US" dirty="0"/>
           </a:p>
           <a:p>
             <a:endParaRPr lang="en-US" dirty="0"/>
@@ -14809,6 +13285,7 @@
               <a:rPr lang="en-US" dirty="0"/>
               <a:t>() method</a:t>
             </a:r>
+            <a:endParaRPr lang="en-US" dirty="0"/>
           </a:p>
           <a:p>
             <a:pPr marL="0" indent="0">
@@ -14831,11 +13308,6 @@
         </p:txBody>
       </p:sp>
     </p:spTree>
-    <p:extLst>
-      <p:ext uri="{BB962C8B-B14F-4D97-AF65-F5344CB8AC3E}">
-        <p14:creationId xmlns:p14="http://schemas.microsoft.com/office/powerpoint/2010/main" val="2874584532"/>
-      </p:ext>
-    </p:extLst>
   </p:cSld>
   <p:clrMapOvr>
     <a:masterClrMapping/>
@@ -14862,13 +13334,7 @@
       </p:grpSpPr>
       <p:sp>
         <p:nvSpPr>
-          <p:cNvPr id="2" name="Title 1">
-            <a:extLst>
-              <a:ext uri="{FF2B5EF4-FFF2-40B4-BE49-F238E27FC236}">
-                <a16:creationId xmlns:a16="http://schemas.microsoft.com/office/drawing/2014/main" id="{8D83CE5B-8676-43B3-8DB2-5DA7D28420D5}"/>
-              </a:ext>
-            </a:extLst>
-          </p:cNvPr>
+          <p:cNvPr id="2" name="Title 1"/>
           <p:cNvSpPr>
             <a:spLocks noGrp="1"/>
           </p:cNvSpPr>
@@ -14885,18 +13351,13 @@
               <a:rPr lang="en-IN" dirty="0"/>
               <a:t>Example</a:t>
             </a:r>
+            <a:endParaRPr lang="en-IN" dirty="0"/>
           </a:p>
         </p:txBody>
       </p:sp>
       <p:pic>
         <p:nvPicPr>
-          <p:cNvPr id="5" name="Content Placeholder 4">
-            <a:extLst>
-              <a:ext uri="{FF2B5EF4-FFF2-40B4-BE49-F238E27FC236}">
-                <a16:creationId xmlns:a16="http://schemas.microsoft.com/office/drawing/2014/main" id="{D179F2CE-92A8-4216-B139-96D9EDAF50F6}"/>
-              </a:ext>
-            </a:extLst>
-          </p:cNvPr>
+          <p:cNvPr id="5" name="Content Placeholder 4"/>
           <p:cNvPicPr>
             <a:picLocks noGrp="1" noChangeAspect="1"/>
           </p:cNvPicPr>
@@ -14905,7 +13366,7 @@
           </p:nvPr>
         </p:nvPicPr>
         <p:blipFill>
-          <a:blip r:embed="rId2"/>
+          <a:blip r:embed="rId1"/>
           <a:stretch>
             <a:fillRect/>
           </a:stretch>
@@ -14918,11 +13379,6 @@
         </p:spPr>
       </p:pic>
     </p:spTree>
-    <p:extLst>
-      <p:ext uri="{BB962C8B-B14F-4D97-AF65-F5344CB8AC3E}">
-        <p14:creationId xmlns:p14="http://schemas.microsoft.com/office/powerpoint/2010/main" val="2552252342"/>
-      </p:ext>
-    </p:extLst>
   </p:cSld>
   <p:clrMapOvr>
     <a:masterClrMapping/>
@@ -14949,13 +13405,7 @@
       </p:grpSpPr>
       <p:sp>
         <p:nvSpPr>
-          <p:cNvPr id="2" name="Title 1">
-            <a:extLst>
-              <a:ext uri="{FF2B5EF4-FFF2-40B4-BE49-F238E27FC236}">
-                <a16:creationId xmlns:a16="http://schemas.microsoft.com/office/drawing/2014/main" id="{9C289C7F-0903-4DE1-8DE2-440CF5D3B2EA}"/>
-              </a:ext>
-            </a:extLst>
-          </p:cNvPr>
+          <p:cNvPr id="2" name="Title 1"/>
           <p:cNvSpPr>
             <a:spLocks noGrp="1"/>
           </p:cNvSpPr>
@@ -14992,13 +13442,7 @@
       </p:sp>
       <p:sp>
         <p:nvSpPr>
-          <p:cNvPr id="3" name="Content Placeholder 2">
-            <a:extLst>
-              <a:ext uri="{FF2B5EF4-FFF2-40B4-BE49-F238E27FC236}">
-                <a16:creationId xmlns:a16="http://schemas.microsoft.com/office/drawing/2014/main" id="{3652A9A5-4F3B-4C09-A635-3E6AEA7B2F81}"/>
-              </a:ext>
-            </a:extLst>
-          </p:cNvPr>
+          <p:cNvPr id="3" name="Content Placeholder 2"/>
           <p:cNvSpPr>
             <a:spLocks noGrp="1"/>
           </p:cNvSpPr>
@@ -15025,6 +13469,7 @@
               <a:rPr lang="en-US" dirty="0"/>
               <a:t>() method returns all the element of specified tag name.</a:t>
             </a:r>
+            <a:endParaRPr lang="en-US" dirty="0"/>
           </a:p>
           <a:p>
             <a:endParaRPr lang="en-US" dirty="0"/>
@@ -15042,6 +13487,7 @@
               <a:rPr lang="en-US" dirty="0"/>
               <a:t>() method is given below:</a:t>
             </a:r>
+            <a:endParaRPr lang="en-US" dirty="0"/>
           </a:p>
           <a:p>
             <a:endParaRPr lang="en-US" dirty="0"/>
@@ -15062,6 +13508,7 @@
               <a:rPr lang="en-US" dirty="0"/>
               <a:t>("name")  </a:t>
             </a:r>
+            <a:endParaRPr lang="en-US" dirty="0"/>
           </a:p>
           <a:p>
             <a:pPr marL="0" indent="0">
@@ -15071,6 +13518,7 @@
               <a:rPr lang="en-US" dirty="0"/>
               <a:t>	</a:t>
             </a:r>
+            <a:endParaRPr lang="en-US" dirty="0"/>
           </a:p>
           <a:p>
             <a:pPr marL="0" indent="0">
@@ -15080,6 +13528,7 @@
               <a:rPr lang="en-US" dirty="0"/>
               <a:t>	Here, name is required.</a:t>
             </a:r>
+            <a:endParaRPr lang="en-US" dirty="0"/>
           </a:p>
           <a:p>
             <a:endParaRPr lang="en-US" dirty="0"/>
@@ -15100,6 +13549,7 @@
               <a:rPr lang="en-US" dirty="0"/>
               <a:t>() method</a:t>
             </a:r>
+            <a:endParaRPr lang="en-US" dirty="0"/>
           </a:p>
           <a:p>
             <a:pPr marL="0" indent="0">
@@ -15122,11 +13572,6 @@
         </p:txBody>
       </p:sp>
     </p:spTree>
-    <p:extLst>
-      <p:ext uri="{BB962C8B-B14F-4D97-AF65-F5344CB8AC3E}">
-        <p14:creationId xmlns:p14="http://schemas.microsoft.com/office/powerpoint/2010/main" val="656369227"/>
-      </p:ext>
-    </p:extLst>
   </p:cSld>
   <p:clrMapOvr>
     <a:masterClrMapping/>
@@ -15153,13 +13598,7 @@
       </p:grpSpPr>
       <p:sp>
         <p:nvSpPr>
-          <p:cNvPr id="2" name="Title 1">
-            <a:extLst>
-              <a:ext uri="{FF2B5EF4-FFF2-40B4-BE49-F238E27FC236}">
-                <a16:creationId xmlns:a16="http://schemas.microsoft.com/office/drawing/2014/main" id="{E5BC0FE1-708C-48CA-86AF-5D75D34BD7B2}"/>
-              </a:ext>
-            </a:extLst>
-          </p:cNvPr>
+          <p:cNvPr id="2" name="Title 1"/>
           <p:cNvSpPr>
             <a:spLocks noGrp="1"/>
           </p:cNvSpPr>
@@ -15176,18 +13615,13 @@
               <a:rPr lang="en-IN" dirty="0"/>
               <a:t>Example</a:t>
             </a:r>
+            <a:endParaRPr lang="en-IN" dirty="0"/>
           </a:p>
         </p:txBody>
       </p:sp>
       <p:pic>
         <p:nvPicPr>
-          <p:cNvPr id="5" name="Content Placeholder 4">
-            <a:extLst>
-              <a:ext uri="{FF2B5EF4-FFF2-40B4-BE49-F238E27FC236}">
-                <a16:creationId xmlns:a16="http://schemas.microsoft.com/office/drawing/2014/main" id="{547527A0-2AC2-4FE6-936B-C9549DCAEACE}"/>
-              </a:ext>
-            </a:extLst>
-          </p:cNvPr>
+          <p:cNvPr id="5" name="Content Placeholder 4"/>
           <p:cNvPicPr>
             <a:picLocks noGrp="1" noChangeAspect="1"/>
           </p:cNvPicPr>
@@ -15196,7 +13630,7 @@
           </p:nvPr>
         </p:nvPicPr>
         <p:blipFill>
-          <a:blip r:embed="rId2"/>
+          <a:blip r:embed="rId1"/>
           <a:stretch>
             <a:fillRect/>
           </a:stretch>
@@ -15209,11 +13643,6 @@
         </p:spPr>
       </p:pic>
     </p:spTree>
-    <p:extLst>
-      <p:ext uri="{BB962C8B-B14F-4D97-AF65-F5344CB8AC3E}">
-        <p14:creationId xmlns:p14="http://schemas.microsoft.com/office/powerpoint/2010/main" val="3189394227"/>
-      </p:ext>
-    </p:extLst>
   </p:cSld>
   <p:clrMapOvr>
     <a:masterClrMapping/>
@@ -15240,13 +13669,7 @@
       </p:grpSpPr>
       <p:sp>
         <p:nvSpPr>
-          <p:cNvPr id="2" name="Title 1">
-            <a:extLst>
-              <a:ext uri="{FF2B5EF4-FFF2-40B4-BE49-F238E27FC236}">
-                <a16:creationId xmlns:a16="http://schemas.microsoft.com/office/drawing/2014/main" id="{9DA32DF4-A993-4733-BBA4-AEBDF49FC12B}"/>
-              </a:ext>
-            </a:extLst>
-          </p:cNvPr>
+          <p:cNvPr id="2" name="Title 1"/>
           <p:cNvSpPr>
             <a:spLocks noGrp="1"/>
           </p:cNvSpPr>
@@ -15277,13 +13700,7 @@
       </p:sp>
       <p:sp>
         <p:nvSpPr>
-          <p:cNvPr id="3" name="Content Placeholder 2">
-            <a:extLst>
-              <a:ext uri="{FF2B5EF4-FFF2-40B4-BE49-F238E27FC236}">
-                <a16:creationId xmlns:a16="http://schemas.microsoft.com/office/drawing/2014/main" id="{2447CC4D-2160-47FA-BBA5-DB2F54B3EF94}"/>
-              </a:ext>
-            </a:extLst>
-          </p:cNvPr>
+          <p:cNvPr id="3" name="Content Placeholder 2"/>
           <p:cNvSpPr>
             <a:spLocks noGrp="1"/>
           </p:cNvSpPr>
@@ -15310,6 +13727,7 @@
               <a:rPr lang="en-US" dirty="0"/>
               <a:t> property can be used to write the dynamic html on the html document.</a:t>
             </a:r>
+            <a:endParaRPr lang="en-US" dirty="0"/>
           </a:p>
           <a:p>
             <a:endParaRPr lang="en-US" dirty="0"/>
@@ -15319,6 +13737,7 @@
               <a:rPr lang="en-US" dirty="0"/>
               <a:t>It is used mostly in the web pages to generate the dynamic html such as registration form, comment form, links etc.</a:t>
             </a:r>
+            <a:endParaRPr lang="en-US" dirty="0"/>
           </a:p>
           <a:p>
             <a:endParaRPr lang="en-US" dirty="0"/>
@@ -15328,6 +13747,7 @@
               <a:rPr lang="en-US" dirty="0"/>
               <a:t>In this example, we are going to create the html form when user clicks on the button.</a:t>
             </a:r>
+            <a:endParaRPr lang="en-US" dirty="0"/>
           </a:p>
           <a:p>
             <a:endParaRPr lang="en-US" dirty="0"/>
@@ -15366,11 +13786,6 @@
         </p:txBody>
       </p:sp>
     </p:spTree>
-    <p:extLst>
-      <p:ext uri="{BB962C8B-B14F-4D97-AF65-F5344CB8AC3E}">
-        <p14:creationId xmlns:p14="http://schemas.microsoft.com/office/powerpoint/2010/main" val="2468824806"/>
-      </p:ext>
-    </p:extLst>
   </p:cSld>
   <p:clrMapOvr>
     <a:masterClrMapping/>
@@ -15397,13 +13812,7 @@
       </p:grpSpPr>
       <p:sp>
         <p:nvSpPr>
-          <p:cNvPr id="2" name="Title 1">
-            <a:extLst>
-              <a:ext uri="{FF2B5EF4-FFF2-40B4-BE49-F238E27FC236}">
-                <a16:creationId xmlns:a16="http://schemas.microsoft.com/office/drawing/2014/main" id="{739DE166-0EC6-4DC1-B745-969EDEEBE7DB}"/>
-              </a:ext>
-            </a:extLst>
-          </p:cNvPr>
+          <p:cNvPr id="2" name="Title 1"/>
           <p:cNvSpPr>
             <a:spLocks noGrp="1"/>
           </p:cNvSpPr>
@@ -15420,18 +13829,13 @@
               <a:rPr lang="en-IN" dirty="0"/>
               <a:t>Example</a:t>
             </a:r>
+            <a:endParaRPr lang="en-IN" dirty="0"/>
           </a:p>
         </p:txBody>
       </p:sp>
       <p:pic>
         <p:nvPicPr>
-          <p:cNvPr id="5" name="Content Placeholder 4">
-            <a:extLst>
-              <a:ext uri="{FF2B5EF4-FFF2-40B4-BE49-F238E27FC236}">
-                <a16:creationId xmlns:a16="http://schemas.microsoft.com/office/drawing/2014/main" id="{D11DD081-A365-4C3E-BEA6-7394F3CAFB54}"/>
-              </a:ext>
-            </a:extLst>
-          </p:cNvPr>
+          <p:cNvPr id="5" name="Content Placeholder 4"/>
           <p:cNvPicPr>
             <a:picLocks noGrp="1" noChangeAspect="1"/>
           </p:cNvPicPr>
@@ -15440,7 +13844,7 @@
           </p:nvPr>
         </p:nvPicPr>
         <p:blipFill>
-          <a:blip r:embed="rId2"/>
+          <a:blip r:embed="rId1"/>
           <a:stretch>
             <a:fillRect/>
           </a:stretch>
@@ -15453,11 +13857,6 @@
         </p:spPr>
       </p:pic>
     </p:spTree>
-    <p:extLst>
-      <p:ext uri="{BB962C8B-B14F-4D97-AF65-F5344CB8AC3E}">
-        <p14:creationId xmlns:p14="http://schemas.microsoft.com/office/powerpoint/2010/main" val="3754271574"/>
-      </p:ext>
-    </p:extLst>
   </p:cSld>
   <p:clrMapOvr>
     <a:masterClrMapping/>
@@ -15484,13 +13883,7 @@
       </p:grpSpPr>
       <p:sp>
         <p:nvSpPr>
-          <p:cNvPr id="2" name="Title 1">
-            <a:extLst>
-              <a:ext uri="{FF2B5EF4-FFF2-40B4-BE49-F238E27FC236}">
-                <a16:creationId xmlns:a16="http://schemas.microsoft.com/office/drawing/2014/main" id="{24709323-AADE-4E7A-A335-122A957F92A2}"/>
-              </a:ext>
-            </a:extLst>
-          </p:cNvPr>
+          <p:cNvPr id="2" name="Title 1"/>
           <p:cNvSpPr>
             <a:spLocks noGrp="1"/>
           </p:cNvSpPr>
@@ -15531,13 +13924,7 @@
       </p:sp>
       <p:pic>
         <p:nvPicPr>
-          <p:cNvPr id="5" name="Content Placeholder 4">
-            <a:extLst>
-              <a:ext uri="{FF2B5EF4-FFF2-40B4-BE49-F238E27FC236}">
-                <a16:creationId xmlns:a16="http://schemas.microsoft.com/office/drawing/2014/main" id="{2C559BDD-1A6D-4292-B3BE-809757BB7B03}"/>
-              </a:ext>
-            </a:extLst>
-          </p:cNvPr>
+          <p:cNvPr id="5" name="Content Placeholder 4"/>
           <p:cNvPicPr>
             <a:picLocks noGrp="1" noChangeAspect="1"/>
           </p:cNvPicPr>
@@ -15546,7 +13933,7 @@
           </p:nvPr>
         </p:nvPicPr>
         <p:blipFill>
-          <a:blip r:embed="rId2"/>
+          <a:blip r:embed="rId1"/>
           <a:stretch>
             <a:fillRect/>
           </a:stretch>
@@ -15559,11 +13946,6 @@
         </p:spPr>
       </p:pic>
     </p:spTree>
-    <p:extLst>
-      <p:ext uri="{BB962C8B-B14F-4D97-AF65-F5344CB8AC3E}">
-        <p14:creationId xmlns:p14="http://schemas.microsoft.com/office/powerpoint/2010/main" val="2493779550"/>
-      </p:ext>
-    </p:extLst>
   </p:cSld>
   <p:clrMapOvr>
     <a:masterClrMapping/>
@@ -15590,13 +13972,7 @@
       </p:grpSpPr>
       <p:sp>
         <p:nvSpPr>
-          <p:cNvPr id="2" name="Title 1">
-            <a:extLst>
-              <a:ext uri="{FF2B5EF4-FFF2-40B4-BE49-F238E27FC236}">
-                <a16:creationId xmlns:a16="http://schemas.microsoft.com/office/drawing/2014/main" id="{A26C6417-9847-4070-90D9-088E997D2255}"/>
-              </a:ext>
-            </a:extLst>
-          </p:cNvPr>
+          <p:cNvPr id="2" name="Title 1"/>
           <p:cNvSpPr>
             <a:spLocks noGrp="1"/>
           </p:cNvSpPr>
@@ -15635,13 +14011,7 @@
       </p:sp>
       <p:sp>
         <p:nvSpPr>
-          <p:cNvPr id="3" name="Content Placeholder 2">
-            <a:extLst>
-              <a:ext uri="{FF2B5EF4-FFF2-40B4-BE49-F238E27FC236}">
-                <a16:creationId xmlns:a16="http://schemas.microsoft.com/office/drawing/2014/main" id="{C8A8E98F-03D8-4538-AE89-E6E9F0D1DD20}"/>
-              </a:ext>
-            </a:extLst>
-          </p:cNvPr>
+          <p:cNvPr id="3" name="Content Placeholder 2"/>
           <p:cNvSpPr>
             <a:spLocks noGrp="1"/>
           </p:cNvSpPr>
@@ -15666,6 +14036,7 @@
               <a:rPr lang="en-US" dirty="0"/>
               <a:t> property can be used to write the dynamic text on the html document. Here, text will not be interpreted as html text but a normal text.</a:t>
             </a:r>
+            <a:endParaRPr lang="en-US" dirty="0"/>
           </a:p>
           <a:p>
             <a:endParaRPr lang="en-US" dirty="0"/>
@@ -15675,6 +14046,7 @@
               <a:rPr lang="en-US" dirty="0"/>
               <a:t>It is used mostly in the web pages to generate the dynamic content such as writing the validation message, password strength etc.</a:t>
             </a:r>
+            <a:endParaRPr lang="en-US" dirty="0"/>
           </a:p>
           <a:p>
             <a:endParaRPr lang="en-US" dirty="0"/>
@@ -15698,11 +14070,6 @@
         </p:txBody>
       </p:sp>
     </p:spTree>
-    <p:extLst>
-      <p:ext uri="{BB962C8B-B14F-4D97-AF65-F5344CB8AC3E}">
-        <p14:creationId xmlns:p14="http://schemas.microsoft.com/office/powerpoint/2010/main" val="3970882572"/>
-      </p:ext>
-    </p:extLst>
   </p:cSld>
   <p:clrMapOvr>
     <a:masterClrMapping/>
@@ -15729,13 +14096,7 @@
       </p:grpSpPr>
       <p:sp>
         <p:nvSpPr>
-          <p:cNvPr id="2" name="Title 1">
-            <a:extLst>
-              <a:ext uri="{FF2B5EF4-FFF2-40B4-BE49-F238E27FC236}">
-                <a16:creationId xmlns:a16="http://schemas.microsoft.com/office/drawing/2014/main" id="{3800FDD2-6F19-452A-978D-AF2E9B74DD09}"/>
-              </a:ext>
-            </a:extLst>
-          </p:cNvPr>
+          <p:cNvPr id="2" name="Title 1"/>
           <p:cNvSpPr>
             <a:spLocks noGrp="1"/>
           </p:cNvSpPr>
@@ -15766,13 +14127,7 @@
       </p:sp>
       <p:pic>
         <p:nvPicPr>
-          <p:cNvPr id="5" name="Content Placeholder 4">
-            <a:extLst>
-              <a:ext uri="{FF2B5EF4-FFF2-40B4-BE49-F238E27FC236}">
-                <a16:creationId xmlns:a16="http://schemas.microsoft.com/office/drawing/2014/main" id="{C47AA00C-ABB3-4733-9DE7-520AD688F860}"/>
-              </a:ext>
-            </a:extLst>
-          </p:cNvPr>
+          <p:cNvPr id="5" name="Content Placeholder 4"/>
           <p:cNvPicPr>
             <a:picLocks noGrp="1" noChangeAspect="1"/>
           </p:cNvPicPr>
@@ -15781,7 +14136,7 @@
           </p:nvPr>
         </p:nvPicPr>
         <p:blipFill>
-          <a:blip r:embed="rId2"/>
+          <a:blip r:embed="rId1"/>
           <a:stretch>
             <a:fillRect/>
           </a:stretch>
@@ -15794,11 +14149,6 @@
         </p:spPr>
       </p:pic>
     </p:spTree>
-    <p:extLst>
-      <p:ext uri="{BB962C8B-B14F-4D97-AF65-F5344CB8AC3E}">
-        <p14:creationId xmlns:p14="http://schemas.microsoft.com/office/powerpoint/2010/main" val="342656469"/>
-      </p:ext>
-    </p:extLst>
   </p:cSld>
   <p:clrMapOvr>
     <a:masterClrMapping/>
@@ -15825,13 +14175,7 @@
       </p:grpSpPr>
       <p:sp>
         <p:nvSpPr>
-          <p:cNvPr id="2" name="Title 1">
-            <a:extLst>
-              <a:ext uri="{FF2B5EF4-FFF2-40B4-BE49-F238E27FC236}">
-                <a16:creationId xmlns:a16="http://schemas.microsoft.com/office/drawing/2014/main" id="{56CFCF88-26A5-4295-B96F-745E7E6EC81A}"/>
-              </a:ext>
-            </a:extLst>
-          </p:cNvPr>
+          <p:cNvPr id="2" name="Title 1"/>
           <p:cNvSpPr>
             <a:spLocks noGrp="1"/>
           </p:cNvSpPr>
@@ -15848,25 +14192,20 @@
               <a:rPr lang="en-IN" dirty="0"/>
               <a:t>JavaScript Variables</a:t>
             </a:r>
+            <a:endParaRPr lang="en-IN" dirty="0"/>
           </a:p>
         </p:txBody>
       </p:sp>
       <p:pic>
         <p:nvPicPr>
-          <p:cNvPr id="5" name="Picture 4">
-            <a:extLst>
-              <a:ext uri="{FF2B5EF4-FFF2-40B4-BE49-F238E27FC236}">
-                <a16:creationId xmlns:a16="http://schemas.microsoft.com/office/drawing/2014/main" id="{E26D451B-555C-4E2F-9082-D08D80D0CBD7}"/>
-              </a:ext>
-            </a:extLst>
-          </p:cNvPr>
+          <p:cNvPr id="5" name="Picture 4"/>
           <p:cNvPicPr>
             <a:picLocks noChangeAspect="1"/>
           </p:cNvPicPr>
           <p:nvPr/>
         </p:nvPicPr>
         <p:blipFill>
-          <a:blip r:embed="rId2"/>
+          <a:blip r:embed="rId1"/>
           <a:stretch>
             <a:fillRect/>
           </a:stretch>
@@ -15882,11 +14221,6 @@
         </p:spPr>
       </p:pic>
     </p:spTree>
-    <p:extLst>
-      <p:ext uri="{BB962C8B-B14F-4D97-AF65-F5344CB8AC3E}">
-        <p14:creationId xmlns:p14="http://schemas.microsoft.com/office/powerpoint/2010/main" val="3865379998"/>
-      </p:ext>
-    </p:extLst>
   </p:cSld>
   <p:clrMapOvr>
     <a:masterClrMapping/>
@@ -15913,13 +14247,7 @@
       </p:grpSpPr>
       <p:sp>
         <p:nvSpPr>
-          <p:cNvPr id="2" name="Title 1">
-            <a:extLst>
-              <a:ext uri="{FF2B5EF4-FFF2-40B4-BE49-F238E27FC236}">
-                <a16:creationId xmlns:a16="http://schemas.microsoft.com/office/drawing/2014/main" id="{843E089B-6ED5-4608-B9CC-A1C05A8153D2}"/>
-              </a:ext>
-            </a:extLst>
-          </p:cNvPr>
+          <p:cNvPr id="2" name="Title 1"/>
           <p:cNvSpPr>
             <a:spLocks noGrp="1"/>
           </p:cNvSpPr>
@@ -15948,13 +14276,7 @@
       </p:sp>
       <p:sp>
         <p:nvSpPr>
-          <p:cNvPr id="3" name="Content Placeholder 2">
-            <a:extLst>
-              <a:ext uri="{FF2B5EF4-FFF2-40B4-BE49-F238E27FC236}">
-                <a16:creationId xmlns:a16="http://schemas.microsoft.com/office/drawing/2014/main" id="{B96B31F7-95F2-4EAF-90E7-49472E6A5DC4}"/>
-              </a:ext>
-            </a:extLst>
-          </p:cNvPr>
+          <p:cNvPr id="3" name="Content Placeholder 2"/>
           <p:cNvSpPr>
             <a:spLocks noGrp="1"/>
           </p:cNvSpPr>
@@ -15973,6 +14295,7 @@
               <a:rPr lang="en-US" dirty="0"/>
               <a:t>It is important to validate the form submitted by the user because it can have inappropriate values. So, validation is must to authenticate user.</a:t>
             </a:r>
+            <a:endParaRPr lang="en-US" dirty="0"/>
           </a:p>
           <a:p>
             <a:endParaRPr lang="en-US" dirty="0"/>
@@ -15982,6 +14305,7 @@
               <a:rPr lang="en-US" dirty="0"/>
               <a:t>JavaScript provides facility to validate the form on the client-side so data processing will be faster than server-side validation. Most of the web developers prefer JavaScript form validation.</a:t>
             </a:r>
+            <a:endParaRPr lang="en-US" dirty="0"/>
           </a:p>
           <a:p>
             <a:endParaRPr lang="en-US" dirty="0"/>
@@ -15996,11 +14320,6 @@
         </p:txBody>
       </p:sp>
     </p:spTree>
-    <p:extLst>
-      <p:ext uri="{BB962C8B-B14F-4D97-AF65-F5344CB8AC3E}">
-        <p14:creationId xmlns:p14="http://schemas.microsoft.com/office/powerpoint/2010/main" val="3184117708"/>
-      </p:ext>
-    </p:extLst>
   </p:cSld>
   <p:clrMapOvr>
     <a:masterClrMapping/>
@@ -16027,13 +14346,7 @@
       </p:grpSpPr>
       <p:sp>
         <p:nvSpPr>
-          <p:cNvPr id="2" name="Title 1">
-            <a:extLst>
-              <a:ext uri="{FF2B5EF4-FFF2-40B4-BE49-F238E27FC236}">
-                <a16:creationId xmlns:a16="http://schemas.microsoft.com/office/drawing/2014/main" id="{28E0060B-FE26-47DB-B5D3-3DD190E99129}"/>
-              </a:ext>
-            </a:extLst>
-          </p:cNvPr>
+          <p:cNvPr id="2" name="Title 1"/>
           <p:cNvSpPr>
             <a:spLocks noGrp="1"/>
           </p:cNvSpPr>
@@ -16056,13 +14369,7 @@
       </p:sp>
       <p:sp>
         <p:nvSpPr>
-          <p:cNvPr id="3" name="Content Placeholder 2">
-            <a:extLst>
-              <a:ext uri="{FF2B5EF4-FFF2-40B4-BE49-F238E27FC236}">
-                <a16:creationId xmlns:a16="http://schemas.microsoft.com/office/drawing/2014/main" id="{B4248BF5-D8EB-4D19-ABBC-5466D298BC96}"/>
-              </a:ext>
-            </a:extLst>
-          </p:cNvPr>
+          <p:cNvPr id="3" name="Content Placeholder 2"/>
           <p:cNvSpPr>
             <a:spLocks noGrp="1"/>
           </p:cNvSpPr>
@@ -16079,6 +14386,7 @@
               <a:rPr lang="en-US" dirty="0"/>
               <a:t>In this example, we are going to validate the name and password. The name can’t be empty and password can’t be less than 6 characters long.</a:t>
             </a:r>
+            <a:endParaRPr lang="en-US" dirty="0"/>
           </a:p>
           <a:p>
             <a:endParaRPr lang="en-US" dirty="0"/>
@@ -16093,11 +14401,6 @@
         </p:txBody>
       </p:sp>
     </p:spTree>
-    <p:extLst>
-      <p:ext uri="{BB962C8B-B14F-4D97-AF65-F5344CB8AC3E}">
-        <p14:creationId xmlns:p14="http://schemas.microsoft.com/office/powerpoint/2010/main" val="3959923740"/>
-      </p:ext>
-    </p:extLst>
   </p:cSld>
   <p:clrMapOvr>
     <a:masterClrMapping/>
@@ -16124,13 +14427,7 @@
       </p:grpSpPr>
       <p:sp>
         <p:nvSpPr>
-          <p:cNvPr id="2" name="Title 1">
-            <a:extLst>
-              <a:ext uri="{FF2B5EF4-FFF2-40B4-BE49-F238E27FC236}">
-                <a16:creationId xmlns:a16="http://schemas.microsoft.com/office/drawing/2014/main" id="{E269DE38-D995-40B4-B978-1D7DB0B84C8B}"/>
-              </a:ext>
-            </a:extLst>
-          </p:cNvPr>
+          <p:cNvPr id="2" name="Title 1"/>
           <p:cNvSpPr>
             <a:spLocks noGrp="1"/>
           </p:cNvSpPr>
@@ -16147,18 +14444,13 @@
               <a:rPr lang="en-IN" dirty="0"/>
               <a:t>Example</a:t>
             </a:r>
+            <a:endParaRPr lang="en-IN" dirty="0"/>
           </a:p>
         </p:txBody>
       </p:sp>
       <p:pic>
         <p:nvPicPr>
-          <p:cNvPr id="5" name="Content Placeholder 4">
-            <a:extLst>
-              <a:ext uri="{FF2B5EF4-FFF2-40B4-BE49-F238E27FC236}">
-                <a16:creationId xmlns:a16="http://schemas.microsoft.com/office/drawing/2014/main" id="{54962070-A7B7-43FF-952B-4F13ADFBA810}"/>
-              </a:ext>
-            </a:extLst>
-          </p:cNvPr>
+          <p:cNvPr id="5" name="Content Placeholder 4"/>
           <p:cNvPicPr>
             <a:picLocks noGrp="1" noChangeAspect="1"/>
           </p:cNvPicPr>
@@ -16167,7 +14459,7 @@
           </p:nvPr>
         </p:nvPicPr>
         <p:blipFill>
-          <a:blip r:embed="rId2"/>
+          <a:blip r:embed="rId1"/>
           <a:stretch>
             <a:fillRect/>
           </a:stretch>
@@ -16180,11 +14472,6 @@
         </p:spPr>
       </p:pic>
     </p:spTree>
-    <p:extLst>
-      <p:ext uri="{BB962C8B-B14F-4D97-AF65-F5344CB8AC3E}">
-        <p14:creationId xmlns:p14="http://schemas.microsoft.com/office/powerpoint/2010/main" val="1355032880"/>
-      </p:ext>
-    </p:extLst>
   </p:cSld>
   <p:clrMapOvr>
     <a:masterClrMapping/>
@@ -16211,13 +14498,7 @@
       </p:grpSpPr>
       <p:sp>
         <p:nvSpPr>
-          <p:cNvPr id="2" name="Title 1">
-            <a:extLst>
-              <a:ext uri="{FF2B5EF4-FFF2-40B4-BE49-F238E27FC236}">
-                <a16:creationId xmlns:a16="http://schemas.microsoft.com/office/drawing/2014/main" id="{995514F5-B137-47C4-ACBC-4BA077FD3FC9}"/>
-              </a:ext>
-            </a:extLst>
-          </p:cNvPr>
+          <p:cNvPr id="2" name="Title 1"/>
           <p:cNvSpPr>
             <a:spLocks noGrp="1"/>
           </p:cNvSpPr>
@@ -16246,13 +14527,7 @@
       </p:sp>
       <p:pic>
         <p:nvPicPr>
-          <p:cNvPr id="5" name="Content Placeholder 4">
-            <a:extLst>
-              <a:ext uri="{FF2B5EF4-FFF2-40B4-BE49-F238E27FC236}">
-                <a16:creationId xmlns:a16="http://schemas.microsoft.com/office/drawing/2014/main" id="{5BE006AB-4AE7-41B0-997A-7223D345D70F}"/>
-              </a:ext>
-            </a:extLst>
-          </p:cNvPr>
+          <p:cNvPr id="5" name="Content Placeholder 4"/>
           <p:cNvPicPr>
             <a:picLocks noGrp="1" noChangeAspect="1"/>
           </p:cNvPicPr>
@@ -16261,7 +14536,7 @@
           </p:nvPr>
         </p:nvPicPr>
         <p:blipFill>
-          <a:blip r:embed="rId2"/>
+          <a:blip r:embed="rId1"/>
           <a:stretch>
             <a:fillRect/>
           </a:stretch>
@@ -16274,11 +14549,6 @@
         </p:spPr>
       </p:pic>
     </p:spTree>
-    <p:extLst>
-      <p:ext uri="{BB962C8B-B14F-4D97-AF65-F5344CB8AC3E}">
-        <p14:creationId xmlns:p14="http://schemas.microsoft.com/office/powerpoint/2010/main" val="2680405776"/>
-      </p:ext>
-    </p:extLst>
   </p:cSld>
   <p:clrMapOvr>
     <a:masterClrMapping/>
@@ -16329,7 +14599,7 @@
     </a:clrScheme>
     <a:fontScheme name="Office">
       <a:majorFont>
-        <a:latin typeface="Calibri Light" panose="020F0302020204030204"/>
+        <a:latin typeface="Calibri Light"/>
         <a:ea typeface=""/>
         <a:cs typeface=""/>
         <a:font script="Jpan" typeface="游ゴシック Light"/>
@@ -16362,26 +14632,9 @@
         <a:font script="Viet" typeface="Times New Roman"/>
         <a:font script="Uigh" typeface="Microsoft Uighur"/>
         <a:font script="Geor" typeface="Sylfaen"/>
-        <a:font script="Armn" typeface="Arial"/>
-        <a:font script="Bugi" typeface="Leelawadee UI"/>
-        <a:font script="Bopo" typeface="Microsoft JhengHei"/>
-        <a:font script="Java" typeface="Javanese Text"/>
-        <a:font script="Lisu" typeface="Segoe UI"/>
-        <a:font script="Mymr" typeface="Myanmar Text"/>
-        <a:font script="Nkoo" typeface="Ebrima"/>
-        <a:font script="Olck" typeface="Nirmala UI"/>
-        <a:font script="Osma" typeface="Ebrima"/>
-        <a:font script="Phag" typeface="Phagspa"/>
-        <a:font script="Syrn" typeface="Estrangelo Edessa"/>
-        <a:font script="Syrj" typeface="Estrangelo Edessa"/>
-        <a:font script="Syre" typeface="Estrangelo Edessa"/>
-        <a:font script="Sora" typeface="Nirmala UI"/>
-        <a:font script="Tale" typeface="Microsoft Tai Le"/>
-        <a:font script="Talu" typeface="Microsoft New Tai Lue"/>
-        <a:font script="Tfng" typeface="Ebrima"/>
       </a:majorFont>
       <a:minorFont>
-        <a:latin typeface="Calibri" panose="020F0502020204030204"/>
+        <a:latin typeface="Calibri"/>
         <a:ea typeface=""/>
         <a:cs typeface=""/>
         <a:font script="Jpan" typeface="游ゴシック"/>
@@ -16414,23 +14667,6 @@
         <a:font script="Viet" typeface="Arial"/>
         <a:font script="Uigh" typeface="Microsoft Uighur"/>
         <a:font script="Geor" typeface="Sylfaen"/>
-        <a:font script="Armn" typeface="Arial"/>
-        <a:font script="Bugi" typeface="Leelawadee UI"/>
-        <a:font script="Bopo" typeface="Microsoft JhengHei"/>
-        <a:font script="Java" typeface="Javanese Text"/>
-        <a:font script="Lisu" typeface="Segoe UI"/>
-        <a:font script="Mymr" typeface="Myanmar Text"/>
-        <a:font script="Nkoo" typeface="Ebrima"/>
-        <a:font script="Olck" typeface="Nirmala UI"/>
-        <a:font script="Osma" typeface="Ebrima"/>
-        <a:font script="Phag" typeface="Phagspa"/>
-        <a:font script="Syrn" typeface="Estrangelo Edessa"/>
-        <a:font script="Syrj" typeface="Estrangelo Edessa"/>
-        <a:font script="Syre" typeface="Estrangelo Edessa"/>
-        <a:font script="Sora" typeface="Nirmala UI"/>
-        <a:font script="Tale" typeface="Microsoft Tai Le"/>
-        <a:font script="Talu" typeface="Microsoft New Tai Lue"/>
-        <a:font script="Tfng" typeface="Ebrima"/>
       </a:minorFont>
     </a:fontScheme>
     <a:fmtScheme name="Office">
@@ -16571,8 +14807,6 @@
       </a:bgFillStyleLst>
     </a:fmtScheme>
   </a:themeElements>
-  <a:objectDefaults/>
-  <a:extraClrSchemeLst/>
   <a:extLst>
     <a:ext uri="{05A4C25C-085E-4340-85A3-A5531E510DB2}">
       <thm15:themeFamily xmlns:thm15="http://schemas.microsoft.com/office/thememl/2012/main" name="Office Theme" id="{62F939B6-93AF-4DB8-9C6B-D6C7DFDC589F}" vid="{4A3C46E8-61CC-4603-A589-7422A47A8E4A}"/>
